--- a/docs/2_요구사항/mcr_requirements_kv.pptx
+++ b/docs/2_요구사항/mcr_requirements_kv.pptx
@@ -16,9 +16,10 @@
     <p:sldId id="264" r:id="rId10"/>
     <p:sldId id="265" r:id="rId11"/>
     <p:sldId id="266" r:id="rId12"/>
+    <p:sldId id="267" r:id="rId13"/>
   </p:sldIdLst>
   <p:notesMasterIdLst>
-    <p:notesMasterId r:id="rId13"/>
+    <p:notesMasterId r:id="rId14"/>
   </p:notesMasterIdLst>
   <p:sldSz cx="12191695" cy="6858000"/>
   <p:notesSz cx="6858000" cy="12191695"/>
@@ -712,6 +713,94 @@
             <a:fld id="{F7021451-1387-4CA6-816F-3879F97B5CBC}" type="slidenum">
               <a:rPr lang="en-US"/>
               <a:t>11</a:t>
+            </a:fld>
+            <a:endParaRPr lang="en-US"/>
+          </a:p>
+        </p:txBody>
+      </p:sp>
+    </p:spTree>
+    <p:extLst>
+      <p:ext uri="{BB962C8B-B14F-4D97-AF65-F5344CB8AC3E}">
+        <p14:creationId xmlns:p14="http://schemas.microsoft.com/office/powerpoint/2010/main" val="1024086991"/>
+      </p:ext>
+    </p:extLst>
+  </p:cSld>
+  <p:clrMapOvr>
+    <a:masterClrMapping/>
+  </p:clrMapOvr>
+</p:notes>
+</file>
+
+<file path=ppt/notesSlides/notesSlide12.xml><?xml version="1.0" encoding="utf-8"?>
+<p:notes xmlns:a="http://schemas.openxmlformats.org/drawingml/2006/main" xmlns:r="http://schemas.openxmlformats.org/officeDocument/2006/relationships" xmlns:p="http://schemas.openxmlformats.org/presentationml/2006/main">
+  <p:cSld>
+    <p:spTree>
+      <p:nvGrpSpPr>
+        <p:cNvPr id="1" name=""/>
+        <p:cNvGrpSpPr/>
+        <p:nvPr/>
+      </p:nvGrpSpPr>
+      <p:grpSpPr>
+        <a:xfrm>
+          <a:off x="0" y="0"/>
+          <a:ext cx="0" cy="0"/>
+          <a:chOff x="0" y="0"/>
+          <a:chExt cx="0" cy="0"/>
+        </a:xfrm>
+      </p:grpSpPr>
+      <p:sp>
+        <p:nvSpPr>
+          <p:cNvPr id="2" name="Slide Image Placeholder 1"/>
+          <p:cNvSpPr>
+            <a:spLocks noGrp="1" noRot="1" noChangeAspect="1"/>
+          </p:cNvSpPr>
+          <p:nvPr>
+            <p:ph type="sldImg"/>
+          </p:nvPr>
+        </p:nvSpPr>
+        <p:spPr/>
+      </p:sp>
+      <p:sp>
+        <p:nvSpPr>
+          <p:cNvPr id="3" name="Notes Placeholder 2"/>
+          <p:cNvSpPr>
+            <a:spLocks noGrp="1"/>
+          </p:cNvSpPr>
+          <p:nvPr>
+            <p:ph type="body" idx="1"/>
+          </p:nvPr>
+        </p:nvSpPr>
+        <p:spPr/>
+        <p:txBody>
+          <a:bodyPr/>
+          <a:lstStyle/>
+          <a:p>
+            <a:r>
+              <a:rPr lang="en-US" dirty="0"/>
+              <a:t/>
+            </a:r>
+            <a:endParaRPr lang="en-US" dirty="0"/>
+          </a:p>
+        </p:txBody>
+      </p:sp>
+      <p:sp>
+        <p:nvSpPr>
+          <p:cNvPr id="4" name="Slide Number Placeholder 3"/>
+          <p:cNvSpPr>
+            <a:spLocks noGrp="1"/>
+          </p:cNvSpPr>
+          <p:nvPr>
+            <p:ph type="sldNum" sz="quarter" idx="10"/>
+          </p:nvPr>
+        </p:nvSpPr>
+        <p:spPr/>
+        <p:txBody>
+          <a:bodyPr/>
+          <a:lstStyle/>
+          <a:p>
+            <a:fld id="{F7021451-1387-4CA6-816F-3879F97B5CBC}" type="slidenum">
+              <a:rPr lang="en-US"/>
+              <a:t>12</a:t>
             </a:fld>
             <a:endParaRPr lang="en-US"/>
           </a:p>
@@ -4666,6 +4755,1569 @@
             <a:avLst/>
           </a:prstGeom>
           <a:solidFill>
+            <a:srgbClr val="1F3864"/>
+          </a:solidFill>
+          <a:ln/>
+        </p:spPr>
+      </p:sp>
+      <p:sp>
+        <p:nvSpPr>
+          <p:cNvPr id="3" name="Text 1"/>
+          <p:cNvSpPr/>
+          <p:nvPr/>
+        </p:nvSpPr>
+        <p:spPr>
+          <a:xfrm>
+            <a:off x="320040" y="109728"/>
+            <a:ext cx="6675120" cy="694944"/>
+          </a:xfrm>
+          <a:prstGeom prst="rect">
+            <a:avLst/>
+          </a:prstGeom>
+          <a:noFill/>
+          <a:ln/>
+        </p:spPr>
+        <p:txBody>
+          <a:bodyPr wrap="square" lIns="0" tIns="0" rIns="0" bIns="0" rtlCol="0" anchor="ctr">
+            <a:normAutofit/>
+          </a:bodyPr>
+          <a:lstStyle/>
+          <a:p>
+            <a:pPr algn="l" indent="0" marL="0">
+              <a:buNone/>
+            </a:pPr>
+            <a:r>
+              <a:rPr lang="en-US" sz="3000" b="1" dirty="0">
+                <a:solidFill>
+                  <a:srgbClr val="FFFFFF"/>
+                </a:solidFill>
+                <a:latin typeface="Malgun Gothic" pitchFamily="34" charset="0"/>
+                <a:ea typeface="Malgun Gothic" pitchFamily="34" charset="-122"/>
+                <a:cs typeface="Malgun Gothic" pitchFamily="34" charset="-120"/>
+              </a:rPr>
+              <a:t>부록 C-3. QA3 TTFT (prefill 성능)</a:t>
+            </a:r>
+            <a:endParaRPr lang="en-US" sz="3000" dirty="0"/>
+          </a:p>
+        </p:txBody>
+      </p:sp>
+      <p:sp>
+        <p:nvSpPr>
+          <p:cNvPr id="4" name="Shape 2"/>
+          <p:cNvSpPr/>
+          <p:nvPr/>
+        </p:nvSpPr>
+        <p:spPr>
+          <a:xfrm>
+            <a:off x="7208215" y="320040"/>
+            <a:ext cx="786384" cy="274320"/>
+          </a:xfrm>
+          <a:prstGeom prst="rect">
+            <a:avLst/>
+          </a:prstGeom>
+          <a:solidFill>
+            <a:srgbClr val="E9E9E9"/>
+          </a:solidFill>
+          <a:ln w="9525">
+            <a:solidFill>
+              <a:srgbClr val="A6A6A6"/>
+            </a:solidFill>
+            <a:prstDash val="solid"/>
+          </a:ln>
+        </p:spPr>
+      </p:sp>
+      <p:sp>
+        <p:nvSpPr>
+          <p:cNvPr id="5" name="Text 3"/>
+          <p:cNvSpPr/>
+          <p:nvPr/>
+        </p:nvSpPr>
+        <p:spPr>
+          <a:xfrm>
+            <a:off x="7208215" y="320040"/>
+            <a:ext cx="786384" cy="274320"/>
+          </a:xfrm>
+          <a:prstGeom prst="rect">
+            <a:avLst/>
+          </a:prstGeom>
+          <a:noFill/>
+          <a:ln/>
+        </p:spPr>
+        <p:txBody>
+          <a:bodyPr wrap="square" lIns="0" tIns="0" rIns="0" bIns="0" rtlCol="0" anchor="ctr"/>
+          <a:lstStyle/>
+          <a:p>
+            <a:pPr algn="ctr" indent="0" marL="0">
+              <a:buNone/>
+            </a:pPr>
+            <a:r>
+              <a:rPr lang="en-US" sz="900" dirty="0">
+                <a:solidFill>
+                  <a:srgbClr val="595959"/>
+                </a:solidFill>
+                <a:latin typeface="Malgun Gothic" pitchFamily="34" charset="0"/>
+                <a:ea typeface="Malgun Gothic" pitchFamily="34" charset="-122"/>
+                <a:cs typeface="Malgun Gothic" pitchFamily="34" charset="-120"/>
+              </a:rPr>
+              <a:t>과제 개요</a:t>
+            </a:r>
+            <a:endParaRPr lang="en-US" sz="900" dirty="0"/>
+          </a:p>
+        </p:txBody>
+      </p:sp>
+      <p:sp>
+        <p:nvSpPr>
+          <p:cNvPr id="6" name="Shape 4"/>
+          <p:cNvSpPr/>
+          <p:nvPr/>
+        </p:nvSpPr>
+        <p:spPr>
+          <a:xfrm>
+            <a:off x="8008315" y="338328"/>
+            <a:ext cx="155448" cy="237744"/>
+          </a:xfrm>
+          <a:prstGeom prst="chevron">
+            <a:avLst/>
+          </a:prstGeom>
+          <a:solidFill>
+            <a:srgbClr val="9AA0A6"/>
+          </a:solidFill>
+          <a:ln/>
+        </p:spPr>
+      </p:sp>
+      <p:sp>
+        <p:nvSpPr>
+          <p:cNvPr id="7" name="Shape 5"/>
+          <p:cNvSpPr/>
+          <p:nvPr/>
+        </p:nvSpPr>
+        <p:spPr>
+          <a:xfrm>
+            <a:off x="8177479" y="320040"/>
+            <a:ext cx="786384" cy="274320"/>
+          </a:xfrm>
+          <a:prstGeom prst="rect">
+            <a:avLst/>
+          </a:prstGeom>
+          <a:solidFill>
+            <a:srgbClr val="FFC000"/>
+          </a:solidFill>
+          <a:ln w="9525">
+            <a:solidFill>
+              <a:srgbClr val="FFC000"/>
+            </a:solidFill>
+            <a:prstDash val="solid"/>
+          </a:ln>
+        </p:spPr>
+      </p:sp>
+      <p:sp>
+        <p:nvSpPr>
+          <p:cNvPr id="8" name="Text 6"/>
+          <p:cNvSpPr/>
+          <p:nvPr/>
+        </p:nvSpPr>
+        <p:spPr>
+          <a:xfrm>
+            <a:off x="8177479" y="320040"/>
+            <a:ext cx="786384" cy="274320"/>
+          </a:xfrm>
+          <a:prstGeom prst="rect">
+            <a:avLst/>
+          </a:prstGeom>
+          <a:noFill/>
+          <a:ln/>
+        </p:spPr>
+        <p:txBody>
+          <a:bodyPr wrap="square" lIns="0" tIns="0" rIns="0" bIns="0" rtlCol="0" anchor="ctr"/>
+          <a:lstStyle/>
+          <a:p>
+            <a:pPr algn="ctr" indent="0" marL="0">
+              <a:buNone/>
+            </a:pPr>
+            <a:r>
+              <a:rPr lang="en-US" sz="900" b="1" dirty="0">
+                <a:solidFill>
+                  <a:srgbClr val="1F3864"/>
+                </a:solidFill>
+                <a:latin typeface="Malgun Gothic" pitchFamily="34" charset="0"/>
+                <a:ea typeface="Malgun Gothic" pitchFamily="34" charset="-122"/>
+                <a:cs typeface="Malgun Gothic" pitchFamily="34" charset="-120"/>
+              </a:rPr>
+              <a:t>요구사항</a:t>
+            </a:r>
+            <a:endParaRPr lang="en-US" sz="900" dirty="0"/>
+          </a:p>
+        </p:txBody>
+      </p:sp>
+      <p:sp>
+        <p:nvSpPr>
+          <p:cNvPr id="9" name="Shape 7"/>
+          <p:cNvSpPr/>
+          <p:nvPr/>
+        </p:nvSpPr>
+        <p:spPr>
+          <a:xfrm>
+            <a:off x="8977579" y="338328"/>
+            <a:ext cx="155448" cy="237744"/>
+          </a:xfrm>
+          <a:prstGeom prst="chevron">
+            <a:avLst/>
+          </a:prstGeom>
+          <a:solidFill>
+            <a:srgbClr val="9AA0A6"/>
+          </a:solidFill>
+          <a:ln/>
+        </p:spPr>
+      </p:sp>
+      <p:sp>
+        <p:nvSpPr>
+          <p:cNvPr id="10" name="Shape 8"/>
+          <p:cNvSpPr/>
+          <p:nvPr/>
+        </p:nvSpPr>
+        <p:spPr>
+          <a:xfrm>
+            <a:off x="9146743" y="320040"/>
+            <a:ext cx="786384" cy="274320"/>
+          </a:xfrm>
+          <a:prstGeom prst="rect">
+            <a:avLst/>
+          </a:prstGeom>
+          <a:solidFill>
+            <a:srgbClr val="E9E9E9"/>
+          </a:solidFill>
+          <a:ln w="9525">
+            <a:solidFill>
+              <a:srgbClr val="A6A6A6"/>
+            </a:solidFill>
+            <a:prstDash val="solid"/>
+          </a:ln>
+        </p:spPr>
+      </p:sp>
+      <p:sp>
+        <p:nvSpPr>
+          <p:cNvPr id="11" name="Text 9"/>
+          <p:cNvSpPr/>
+          <p:nvPr/>
+        </p:nvSpPr>
+        <p:spPr>
+          <a:xfrm>
+            <a:off x="9146743" y="320040"/>
+            <a:ext cx="786384" cy="274320"/>
+          </a:xfrm>
+          <a:prstGeom prst="rect">
+            <a:avLst/>
+          </a:prstGeom>
+          <a:noFill/>
+          <a:ln/>
+        </p:spPr>
+        <p:txBody>
+          <a:bodyPr wrap="square" lIns="0" tIns="0" rIns="0" bIns="0" rtlCol="0" anchor="ctr"/>
+          <a:lstStyle/>
+          <a:p>
+            <a:pPr algn="ctr" indent="0" marL="0">
+              <a:buNone/>
+            </a:pPr>
+            <a:r>
+              <a:rPr lang="en-US" sz="900" dirty="0">
+                <a:solidFill>
+                  <a:srgbClr val="595959"/>
+                </a:solidFill>
+                <a:latin typeface="Malgun Gothic" pitchFamily="34" charset="0"/>
+                <a:ea typeface="Malgun Gothic" pitchFamily="34" charset="-122"/>
+                <a:cs typeface="Malgun Gothic" pitchFamily="34" charset="-120"/>
+              </a:rPr>
+              <a:t>설계</a:t>
+            </a:r>
+            <a:endParaRPr lang="en-US" sz="900" dirty="0"/>
+          </a:p>
+        </p:txBody>
+      </p:sp>
+      <p:sp>
+        <p:nvSpPr>
+          <p:cNvPr id="12" name="Shape 10"/>
+          <p:cNvSpPr/>
+          <p:nvPr/>
+        </p:nvSpPr>
+        <p:spPr>
+          <a:xfrm>
+            <a:off x="9946843" y="338328"/>
+            <a:ext cx="155448" cy="237744"/>
+          </a:xfrm>
+          <a:prstGeom prst="chevron">
+            <a:avLst/>
+          </a:prstGeom>
+          <a:solidFill>
+            <a:srgbClr val="9AA0A6"/>
+          </a:solidFill>
+          <a:ln/>
+        </p:spPr>
+      </p:sp>
+      <p:sp>
+        <p:nvSpPr>
+          <p:cNvPr id="13" name="Shape 11"/>
+          <p:cNvSpPr/>
+          <p:nvPr/>
+        </p:nvSpPr>
+        <p:spPr>
+          <a:xfrm>
+            <a:off x="10116007" y="320040"/>
+            <a:ext cx="786384" cy="274320"/>
+          </a:xfrm>
+          <a:prstGeom prst="rect">
+            <a:avLst/>
+          </a:prstGeom>
+          <a:solidFill>
+            <a:srgbClr val="E9E9E9"/>
+          </a:solidFill>
+          <a:ln w="9525">
+            <a:solidFill>
+              <a:srgbClr val="A6A6A6"/>
+            </a:solidFill>
+            <a:prstDash val="solid"/>
+          </a:ln>
+        </p:spPr>
+      </p:sp>
+      <p:sp>
+        <p:nvSpPr>
+          <p:cNvPr id="14" name="Text 12"/>
+          <p:cNvSpPr/>
+          <p:nvPr/>
+        </p:nvSpPr>
+        <p:spPr>
+          <a:xfrm>
+            <a:off x="10116007" y="320040"/>
+            <a:ext cx="786384" cy="274320"/>
+          </a:xfrm>
+          <a:prstGeom prst="rect">
+            <a:avLst/>
+          </a:prstGeom>
+          <a:noFill/>
+          <a:ln/>
+        </p:spPr>
+        <p:txBody>
+          <a:bodyPr wrap="square" lIns="0" tIns="0" rIns="0" bIns="0" rtlCol="0" anchor="ctr"/>
+          <a:lstStyle/>
+          <a:p>
+            <a:pPr algn="ctr" indent="0" marL="0">
+              <a:buNone/>
+            </a:pPr>
+            <a:r>
+              <a:rPr lang="en-US" sz="900" dirty="0">
+                <a:solidFill>
+                  <a:srgbClr val="595959"/>
+                </a:solidFill>
+                <a:latin typeface="Malgun Gothic" pitchFamily="34" charset="0"/>
+                <a:ea typeface="Malgun Gothic" pitchFamily="34" charset="-122"/>
+                <a:cs typeface="Malgun Gothic" pitchFamily="34" charset="-120"/>
+              </a:rPr>
+              <a:t>검증</a:t>
+            </a:r>
+            <a:endParaRPr lang="en-US" sz="900" dirty="0"/>
+          </a:p>
+        </p:txBody>
+      </p:sp>
+      <p:sp>
+        <p:nvSpPr>
+          <p:cNvPr id="15" name="Shape 13"/>
+          <p:cNvSpPr/>
+          <p:nvPr/>
+        </p:nvSpPr>
+        <p:spPr>
+          <a:xfrm>
+            <a:off x="10916107" y="338328"/>
+            <a:ext cx="155448" cy="237744"/>
+          </a:xfrm>
+          <a:prstGeom prst="chevron">
+            <a:avLst/>
+          </a:prstGeom>
+          <a:solidFill>
+            <a:srgbClr val="9AA0A6"/>
+          </a:solidFill>
+          <a:ln/>
+        </p:spPr>
+      </p:sp>
+      <p:sp>
+        <p:nvSpPr>
+          <p:cNvPr id="16" name="Shape 14"/>
+          <p:cNvSpPr/>
+          <p:nvPr/>
+        </p:nvSpPr>
+        <p:spPr>
+          <a:xfrm>
+            <a:off x="11085271" y="320040"/>
+            <a:ext cx="786384" cy="274320"/>
+          </a:xfrm>
+          <a:prstGeom prst="rect">
+            <a:avLst/>
+          </a:prstGeom>
+          <a:solidFill>
+            <a:srgbClr val="E9E9E9"/>
+          </a:solidFill>
+          <a:ln w="9525">
+            <a:solidFill>
+              <a:srgbClr val="A6A6A6"/>
+            </a:solidFill>
+            <a:prstDash val="solid"/>
+          </a:ln>
+        </p:spPr>
+      </p:sp>
+      <p:sp>
+        <p:nvSpPr>
+          <p:cNvPr id="17" name="Text 15"/>
+          <p:cNvSpPr/>
+          <p:nvPr/>
+        </p:nvSpPr>
+        <p:spPr>
+          <a:xfrm>
+            <a:off x="11085271" y="320040"/>
+            <a:ext cx="786384" cy="274320"/>
+          </a:xfrm>
+          <a:prstGeom prst="rect">
+            <a:avLst/>
+          </a:prstGeom>
+          <a:noFill/>
+          <a:ln/>
+        </p:spPr>
+        <p:txBody>
+          <a:bodyPr wrap="square" lIns="0" tIns="0" rIns="0" bIns="0" rtlCol="0" anchor="ctr"/>
+          <a:lstStyle/>
+          <a:p>
+            <a:pPr algn="ctr" indent="0" marL="0">
+              <a:buNone/>
+            </a:pPr>
+            <a:r>
+              <a:rPr lang="en-US" sz="900" dirty="0">
+                <a:solidFill>
+                  <a:srgbClr val="595959"/>
+                </a:solidFill>
+                <a:latin typeface="Malgun Gothic" pitchFamily="34" charset="0"/>
+                <a:ea typeface="Malgun Gothic" pitchFamily="34" charset="-122"/>
+                <a:cs typeface="Malgun Gothic" pitchFamily="34" charset="-120"/>
+              </a:rPr>
+              <a:t>결론</a:t>
+            </a:r>
+            <a:endParaRPr lang="en-US" sz="900" dirty="0"/>
+          </a:p>
+        </p:txBody>
+      </p:sp>
+      <p:sp>
+        <p:nvSpPr>
+          <p:cNvPr id="18" name="Text 16"/>
+          <p:cNvSpPr/>
+          <p:nvPr/>
+        </p:nvSpPr>
+        <p:spPr>
+          <a:xfrm>
+            <a:off x="10728655" y="6492240"/>
+            <a:ext cx="1280160" cy="256032"/>
+          </a:xfrm>
+          <a:prstGeom prst="rect">
+            <a:avLst/>
+          </a:prstGeom>
+          <a:noFill/>
+          <a:ln/>
+        </p:spPr>
+        <p:txBody>
+          <a:bodyPr wrap="square" lIns="0" tIns="0" rIns="0" bIns="0" rtlCol="0" anchor="ctr"/>
+          <a:lstStyle/>
+          <a:p>
+            <a:pPr algn="r" indent="0" marL="0">
+              <a:buNone/>
+            </a:pPr>
+            <a:r>
+              <a:rPr lang="en-US" sz="1000" dirty="0">
+                <a:solidFill>
+                  <a:srgbClr val="7F7F7F"/>
+                </a:solidFill>
+                <a:latin typeface="Malgun Gothic" pitchFamily="34" charset="0"/>
+                <a:ea typeface="Malgun Gothic" pitchFamily="34" charset="-122"/>
+                <a:cs typeface="Malgun Gothic" pitchFamily="34" charset="-120"/>
+              </a:rPr>
+              <a:t>29 / 33</a:t>
+            </a:r>
+            <a:endParaRPr lang="en-US" sz="1000" dirty="0"/>
+          </a:p>
+        </p:txBody>
+      </p:sp>
+      <p:sp>
+        <p:nvSpPr>
+          <p:cNvPr id="19" name="Text 17"/>
+          <p:cNvSpPr/>
+          <p:nvPr/>
+        </p:nvSpPr>
+        <p:spPr>
+          <a:xfrm>
+            <a:off x="320040" y="1060704"/>
+            <a:ext cx="11247120" cy="274320"/>
+          </a:xfrm>
+          <a:prstGeom prst="rect">
+            <a:avLst/>
+          </a:prstGeom>
+          <a:noFill/>
+          <a:ln/>
+        </p:spPr>
+        <p:txBody>
+          <a:bodyPr wrap="square" rtlCol="0" anchor="ctr"/>
+          <a:lstStyle/>
+          <a:p>
+            <a:pPr indent="0" marL="0">
+              <a:buNone/>
+            </a:pPr>
+            <a:r>
+              <a:rPr lang="en-US" sz="1050" b="1" dirty="0">
+                <a:solidFill>
+                  <a:srgbClr val="1F3864"/>
+                </a:solidFill>
+                <a:latin typeface="Malgun Gothic" pitchFamily="34" charset="0"/>
+                <a:ea typeface="Malgun Gothic" pitchFamily="34" charset="-122"/>
+                <a:cs typeface="Malgun Gothic" pitchFamily="34" charset="-120"/>
+              </a:rPr>
+              <a:t>○ </a:t>
+            </a:r>
+            <a:pPr indent="0" marL="0">
+              <a:buNone/>
+            </a:pPr>
+            <a:r>
+              <a:rPr lang="en-US" sz="1050" b="1" dirty="0">
+                <a:solidFill>
+                  <a:srgbClr val="262626"/>
+                </a:solidFill>
+                <a:latin typeface="Malgun Gothic" pitchFamily="34" charset="0"/>
+                <a:ea typeface="Malgun Gothic" pitchFamily="34" charset="-122"/>
+                <a:cs typeface="Malgun Gothic" pitchFamily="34" charset="-120"/>
+              </a:rPr>
+              <a:t>QA3 — RAG·multiturn·agent 시나리오의 사용자 체감 판정 지표: 다시 만들지 않기의 효과</a:t>
+            </a:r>
+            <a:pPr indent="0" marL="0">
+              <a:buNone/>
+            </a:pPr>
+            <a:r>
+              <a:rPr lang="en-US" sz="900" b="1" dirty="0">
+                <a:solidFill>
+                  <a:srgbClr val="1F3864"/>
+                </a:solidFill>
+                <a:latin typeface="Malgun Gothic" pitchFamily="34" charset="0"/>
+                <a:ea typeface="Malgun Gothic" pitchFamily="34" charset="-122"/>
+                <a:cs typeface="Malgun Gothic" pitchFamily="34" charset="-120"/>
+              </a:rPr>
+              <a:t>   [중요도 H(5) · 난이도 M(3) · 우선순위 3]</a:t>
+            </a:r>
+            <a:endParaRPr lang="en-US" sz="1050" dirty="0"/>
+          </a:p>
+        </p:txBody>
+      </p:sp>
+      <p:sp>
+        <p:nvSpPr>
+          <p:cNvPr id="20" name="Shape 18"/>
+          <p:cNvSpPr/>
+          <p:nvPr/>
+        </p:nvSpPr>
+        <p:spPr>
+          <a:xfrm>
+            <a:off x="320040" y="1444752"/>
+            <a:ext cx="6537960" cy="310896"/>
+          </a:xfrm>
+          <a:prstGeom prst="rect">
+            <a:avLst/>
+          </a:prstGeom>
+          <a:solidFill>
+            <a:srgbClr val="1F3864"/>
+          </a:solidFill>
+          <a:ln/>
+        </p:spPr>
+      </p:sp>
+      <p:sp>
+        <p:nvSpPr>
+          <p:cNvPr id="21" name="Text 19"/>
+          <p:cNvSpPr/>
+          <p:nvPr/>
+        </p:nvSpPr>
+        <p:spPr>
+          <a:xfrm>
+            <a:off x="365760" y="1444752"/>
+            <a:ext cx="6446520" cy="310896"/>
+          </a:xfrm>
+          <a:prstGeom prst="rect">
+            <a:avLst/>
+          </a:prstGeom>
+          <a:noFill/>
+          <a:ln/>
+        </p:spPr>
+        <p:txBody>
+          <a:bodyPr wrap="square" lIns="0" tIns="0" rIns="0" bIns="0" rtlCol="0" anchor="ctr"/>
+          <a:lstStyle/>
+          <a:p>
+            <a:pPr algn="ctr" indent="0" marL="0">
+              <a:buNone/>
+            </a:pPr>
+            <a:r>
+              <a:rPr lang="en-US" sz="1300" b="1" dirty="0">
+                <a:solidFill>
+                  <a:srgbClr val="FFFFFF"/>
+                </a:solidFill>
+                <a:latin typeface="Malgun Gothic" pitchFamily="34" charset="0"/>
+                <a:ea typeface="Malgun Gothic" pitchFamily="34" charset="-122"/>
+                <a:cs typeface="Malgun Gothic" pitchFamily="34" charset="-120"/>
+              </a:rPr>
+              <a:t>정의 · 측정 · Baseline</a:t>
+            </a:r>
+            <a:endParaRPr lang="en-US" sz="1300" dirty="0"/>
+          </a:p>
+        </p:txBody>
+      </p:sp>
+      <p:sp>
+        <p:nvSpPr>
+          <p:cNvPr id="22" name="Text 20"/>
+          <p:cNvSpPr/>
+          <p:nvPr/>
+        </p:nvSpPr>
+        <p:spPr>
+          <a:xfrm>
+            <a:off x="365760" y="1901952"/>
+            <a:ext cx="6446520" cy="3108960"/>
+          </a:xfrm>
+          <a:prstGeom prst="rect">
+            <a:avLst/>
+          </a:prstGeom>
+          <a:noFill/>
+          <a:ln/>
+        </p:spPr>
+        <p:txBody>
+          <a:bodyPr wrap="square" lIns="0" tIns="0" rIns="0" bIns="0" rtlCol="0" anchor="t"/>
+          <a:lstStyle/>
+          <a:p>
+            <a:pPr algn="l" marL="177800" indent="-177800">
+              <a:spcAft>
+                <a:spcPts val="600"/>
+              </a:spcAft>
+              <a:buSzPct val="100000"/>
+              <a:buChar char="◆"/>
+            </a:pPr>
+            <a:r>
+              <a:rPr lang="en-US" sz="900" b="1" dirty="0">
+                <a:solidFill>
+                  <a:srgbClr val="262626"/>
+                </a:solidFill>
+                <a:latin typeface="Malgun Gothic" pitchFamily="34" charset="0"/>
+                <a:ea typeface="Malgun Gothic" pitchFamily="34" charset="-122"/>
+                <a:cs typeface="Malgun Gothic" pitchFamily="34" charset="-120"/>
+              </a:rPr>
+              <a:t>정의: baseline 대비 TTFT 단축 배율 (prefill 축) — KV 재사용(prefix·비접두)·복원 vs 재계산 판단의 효과 축</a:t>
+            </a:r>
+            <a:endParaRPr lang="en-US" sz="900" dirty="0"/>
+          </a:p>
+          <a:p>
+            <a:pPr algn="l" marL="177800" indent="-177800">
+              <a:spcAft>
+                <a:spcPts val="600"/>
+              </a:spcAft>
+              <a:buSzPct val="100000"/>
+              <a:buChar char="◆"/>
+            </a:pPr>
+            <a:r>
+              <a:rPr lang="en-US" sz="900" dirty="0">
+                <a:solidFill>
+                  <a:srgbClr val="262626"/>
+                </a:solidFill>
+                <a:latin typeface="Malgun Gothic" pitchFamily="34" charset="0"/>
+                <a:ea typeface="Malgun Gothic" pitchFamily="34" charset="-122"/>
+                <a:cs typeface="Malgun Gothic" pitchFamily="34" charset="-120"/>
+              </a:rPr>
+              <a:t>대표 워크로드 3종을 동일 HW·동일 실행 구성에서 E2E 서빙 (retrieval은 외부 컴포넌트 — 양쪽 동일 적용)</a:t>
+            </a:r>
+            <a:endParaRPr lang="en-US" sz="900" dirty="0"/>
+          </a:p>
+          <a:p>
+            <a:pPr algn="l" marL="177800" indent="-177800">
+              <a:spcAft>
+                <a:spcPts val="600"/>
+              </a:spcAft>
+              <a:buSzPct val="100000"/>
+              <a:buChar char="◆"/>
+            </a:pPr>
+            <a:r>
+              <a:rPr lang="en-US" sz="900" b="1" dirty="0">
+                <a:solidFill>
+                  <a:srgbClr val="262626"/>
+                </a:solidFill>
+                <a:latin typeface="Malgun Gothic" pitchFamily="34" charset="0"/>
+                <a:ea typeface="Malgun Gothic" pitchFamily="34" charset="-122"/>
+                <a:cs typeface="Malgun Gothic" pitchFamily="34" charset="-120"/>
+              </a:rPr>
+              <a:t>측정: 워크로드 평균 기준 판정 · p99 분포 병행 — 재사용 hit/miss 이질성으로 꼬리는 cache-miss cold 요청이 지배 (평균 = 재사용 실효, p99 = cold-path)</a:t>
+            </a:r>
+            <a:endParaRPr lang="en-US" sz="900" dirty="0"/>
+          </a:p>
+          <a:p>
+            <a:pPr algn="l" marL="177800" indent="-177800">
+              <a:spcAft>
+                <a:spcPts val="600"/>
+              </a:spcAft>
+              <a:buSzPct val="100000"/>
+              <a:buChar char="◆"/>
+            </a:pPr>
+            <a:r>
+              <a:rPr lang="en-US" sz="900" dirty="0">
+                <a:solidFill>
+                  <a:srgbClr val="262626"/>
+                </a:solidFill>
+                <a:latin typeface="Malgun Gothic" pitchFamily="34" charset="0"/>
+                <a:ea typeface="Malgun Gothic" pitchFamily="34" charset="-122"/>
+                <a:cs typeface="Malgun Gothic" pitchFamily="34" charset="-120"/>
+              </a:rPr>
+              <a:t>Baseline: 동일 HW · GPU HBM 단일 tier (QA1과 공유) — 현행 표준 스택의 최선이므로 순증분 분리</a:t>
+            </a:r>
+            <a:endParaRPr lang="en-US" sz="900" dirty="0"/>
+          </a:p>
+          <a:p>
+            <a:pPr algn="l" marL="177800" indent="-177800">
+              <a:spcAft>
+                <a:spcPts val="600"/>
+              </a:spcAft>
+              <a:buSzPct val="100000"/>
+              <a:buChar char="◆"/>
+            </a:pPr>
+            <a:r>
+              <a:rPr lang="en-US" sz="900" dirty="0">
+                <a:solidFill>
+                  <a:srgbClr val="262626"/>
+                </a:solidFill>
+                <a:latin typeface="Malgun Gothic" pitchFamily="34" charset="0"/>
+                <a:ea typeface="Malgun Gothic" pitchFamily="34" charset="-122"/>
+                <a:cs typeface="Malgun Gothic" pitchFamily="34" charset="-120"/>
+              </a:rPr>
+              <a:t>ablation: 재사용 off 대비 증분 · 보조: cache hit rate (중간 지표)</a:t>
+            </a:r>
+            <a:endParaRPr lang="en-US" sz="900" dirty="0"/>
+          </a:p>
+        </p:txBody>
+      </p:sp>
+      <p:sp>
+        <p:nvSpPr>
+          <p:cNvPr id="23" name="Shape 21"/>
+          <p:cNvSpPr/>
+          <p:nvPr/>
+        </p:nvSpPr>
+        <p:spPr>
+          <a:xfrm>
+            <a:off x="7223760" y="1444752"/>
+            <a:ext cx="4507992" cy="310896"/>
+          </a:xfrm>
+          <a:prstGeom prst="rect">
+            <a:avLst/>
+          </a:prstGeom>
+          <a:solidFill>
+            <a:srgbClr val="4E7C3A"/>
+          </a:solidFill>
+          <a:ln/>
+        </p:spPr>
+      </p:sp>
+      <p:sp>
+        <p:nvSpPr>
+          <p:cNvPr id="24" name="Text 22"/>
+          <p:cNvSpPr/>
+          <p:nvPr/>
+        </p:nvSpPr>
+        <p:spPr>
+          <a:xfrm>
+            <a:off x="7269480" y="1444752"/>
+            <a:ext cx="4416552" cy="310896"/>
+          </a:xfrm>
+          <a:prstGeom prst="rect">
+            <a:avLst/>
+          </a:prstGeom>
+          <a:noFill/>
+          <a:ln/>
+        </p:spPr>
+        <p:txBody>
+          <a:bodyPr wrap="square" lIns="0" tIns="0" rIns="0" bIns="0" rtlCol="0" anchor="ctr"/>
+          <a:lstStyle/>
+          <a:p>
+            <a:pPr algn="ctr" indent="0" marL="0">
+              <a:buNone/>
+            </a:pPr>
+            <a:r>
+              <a:rPr lang="en-US" sz="1300" b="1" dirty="0">
+                <a:solidFill>
+                  <a:srgbClr val="FFFFFF"/>
+                </a:solidFill>
+                <a:latin typeface="Malgun Gothic" pitchFamily="34" charset="0"/>
+                <a:ea typeface="Malgun Gothic" pitchFamily="34" charset="-122"/>
+                <a:cs typeface="Malgun Gothic" pitchFamily="34" charset="-120"/>
+              </a:rPr>
+              <a:t>별점 정량 bin</a:t>
+            </a:r>
+            <a:endParaRPr lang="en-US" sz="1300" dirty="0"/>
+          </a:p>
+        </p:txBody>
+      </p:sp>
+      <p:graphicFrame>
+        <p:nvGraphicFramePr>
+          <p:cNvPr id="11" name="Table 0"/>
+          <p:cNvGraphicFramePr>
+            <a:graphicFrameLocks noGrp="1"/>
+          </p:cNvGraphicFramePr>
+          <p:nvPr>
+            <p:extLst>
+              <p:ext uri="{D42A27DB-BD31-4B8C-83A1-F6EECF244321}">
+                <p14:modId xmlns:p14="http://schemas.microsoft.com/office/powerpoint/2010/main" val="1579011935"/>
+              </p:ext>
+            </p:extLst>
+          </p:nvPr>
+        </p:nvGraphicFramePr>
+        <p:xfrm>
+          <a:off x="7223760" y="1901952"/>
+          <a:ext cx="4507992" cy="914400"/>
+        </p:xfrm>
+        <a:graphic>
+          <a:graphicData uri="http://schemas.openxmlformats.org/drawingml/2006/table">
+            <a:tbl>
+              <a:tblPr/>
+              <a:tblGrid>
+                <a:gridCol w="777240"/>
+                <a:gridCol w="3730752"/>
+              </a:tblGrid>
+              <a:tr h="0">
+                <a:tc>
+                  <a:txBody>
+                    <a:bodyPr/>
+                    <a:lstStyle/>
+                    <a:p>
+                      <a:pPr algn="ctr" indent="0" marL="0">
+                        <a:buNone/>
+                      </a:pPr>
+                      <a:r>
+                        <a:rPr lang="en-US" sz="960" b="1" dirty="0">
+                          <a:solidFill>
+                            <a:srgbClr val="FFFFFF"/>
+                          </a:solidFill>
+                          <a:latin typeface="Malgun Gothic" pitchFamily="34" charset="0"/>
+                          <a:ea typeface="Malgun Gothic" pitchFamily="34" charset="-122"/>
+                          <a:cs typeface="Malgun Gothic" pitchFamily="34" charset="-120"/>
+                        </a:rPr>
+                        <a:t>별점</a:t>
+                      </a:r>
+                      <a:endParaRPr lang="en-US" sz="960" dirty="0">
+                        <a:latin typeface="Malgun Gothic" charset="0"/>
+                        <a:ea typeface="Malgun Gothic" charset="0"/>
+                        <a:cs typeface="Malgun Gothic" charset="0"/>
+                      </a:endParaRPr>
+                    </a:p>
+                  </a:txBody>
+                  <a:tcPr marL="91440" marR="91440" marT="45720" marB="45720" anchor="ctr">
+                    <a:lnL w="6350" cap="flat" cmpd="sng" algn="ctr">
+                      <a:solidFill>
+                        <a:srgbClr val="A6A6A6"/>
+                      </a:solidFill>
+                      <a:prstDash val="solid"/>
+                      <a:round/>
+                      <a:headEnd type="none" w="med" len="med"/>
+                      <a:tailEnd type="none" w="med" len="med"/>
+                    </a:lnL>
+                    <a:lnR w="6350" cap="flat" cmpd="sng" algn="ctr">
+                      <a:solidFill>
+                        <a:srgbClr val="A6A6A6"/>
+                      </a:solidFill>
+                      <a:prstDash val="solid"/>
+                      <a:round/>
+                      <a:headEnd type="none" w="med" len="med"/>
+                      <a:tailEnd type="none" w="med" len="med"/>
+                    </a:lnR>
+                    <a:lnT w="6350" cap="flat" cmpd="sng" algn="ctr">
+                      <a:solidFill>
+                        <a:srgbClr val="A6A6A6"/>
+                      </a:solidFill>
+                      <a:prstDash val="solid"/>
+                      <a:round/>
+                      <a:headEnd type="none" w="med" len="med"/>
+                      <a:tailEnd type="none" w="med" len="med"/>
+                    </a:lnT>
+                    <a:lnB w="6350" cap="flat" cmpd="sng" algn="ctr">
+                      <a:solidFill>
+                        <a:srgbClr val="A6A6A6"/>
+                      </a:solidFill>
+                      <a:prstDash val="solid"/>
+                      <a:round/>
+                      <a:headEnd type="none" w="med" len="med"/>
+                      <a:tailEnd type="none" w="med" len="med"/>
+                    </a:lnB>
+                    <a:solidFill>
+                      <a:srgbClr val="3C5F2C"/>
+                    </a:solidFill>
+                  </a:tcPr>
+                </a:tc>
+                <a:tc>
+                  <a:txBody>
+                    <a:bodyPr/>
+                    <a:lstStyle/>
+                    <a:p>
+                      <a:pPr algn="ctr" indent="0" marL="0">
+                        <a:buNone/>
+                      </a:pPr>
+                      <a:r>
+                        <a:rPr lang="en-US" sz="960" b="1" dirty="0">
+                          <a:solidFill>
+                            <a:srgbClr val="FFFFFF"/>
+                          </a:solidFill>
+                          <a:latin typeface="Malgun Gothic" pitchFamily="34" charset="0"/>
+                          <a:ea typeface="Malgun Gothic" pitchFamily="34" charset="-122"/>
+                          <a:cs typeface="Malgun Gothic" pitchFamily="34" charset="-120"/>
+                        </a:rPr>
+                        <a:t>기준</a:t>
+                      </a:r>
+                      <a:endParaRPr lang="en-US" sz="960" dirty="0">
+                        <a:latin typeface="Malgun Gothic" charset="0"/>
+                        <a:ea typeface="Malgun Gothic" charset="0"/>
+                        <a:cs typeface="Malgun Gothic" charset="0"/>
+                      </a:endParaRPr>
+                    </a:p>
+                  </a:txBody>
+                  <a:tcPr marL="91440" marR="91440" marT="45720" marB="45720" anchor="ctr">
+                    <a:lnL w="6350" cap="flat" cmpd="sng" algn="ctr">
+                      <a:solidFill>
+                        <a:srgbClr val="A6A6A6"/>
+                      </a:solidFill>
+                      <a:prstDash val="solid"/>
+                      <a:round/>
+                      <a:headEnd type="none" w="med" len="med"/>
+                      <a:tailEnd type="none" w="med" len="med"/>
+                    </a:lnL>
+                    <a:lnR w="6350" cap="flat" cmpd="sng" algn="ctr">
+                      <a:solidFill>
+                        <a:srgbClr val="A6A6A6"/>
+                      </a:solidFill>
+                      <a:prstDash val="solid"/>
+                      <a:round/>
+                      <a:headEnd type="none" w="med" len="med"/>
+                      <a:tailEnd type="none" w="med" len="med"/>
+                    </a:lnR>
+                    <a:lnT w="6350" cap="flat" cmpd="sng" algn="ctr">
+                      <a:solidFill>
+                        <a:srgbClr val="A6A6A6"/>
+                      </a:solidFill>
+                      <a:prstDash val="solid"/>
+                      <a:round/>
+                      <a:headEnd type="none" w="med" len="med"/>
+                      <a:tailEnd type="none" w="med" len="med"/>
+                    </a:lnT>
+                    <a:lnB w="6350" cap="flat" cmpd="sng" algn="ctr">
+                      <a:solidFill>
+                        <a:srgbClr val="A6A6A6"/>
+                      </a:solidFill>
+                      <a:prstDash val="solid"/>
+                      <a:round/>
+                      <a:headEnd type="none" w="med" len="med"/>
+                      <a:tailEnd type="none" w="med" len="med"/>
+                    </a:lnB>
+                    <a:solidFill>
+                      <a:srgbClr val="3C5F2C"/>
+                    </a:solidFill>
+                  </a:tcPr>
+                </a:tc>
+              </a:tr>
+              <a:tr h="0">
+                <a:tc>
+                  <a:txBody>
+                    <a:bodyPr/>
+                    <a:lstStyle/>
+                    <a:p>
+                      <a:pPr algn="ctr" indent="0" marL="0">
+                        <a:buNone/>
+                      </a:pPr>
+                      <a:r>
+                        <a:rPr lang="en-US" sz="860" dirty="0">
+                          <a:solidFill>
+                            <a:srgbClr val="262626"/>
+                          </a:solidFill>
+                          <a:latin typeface="Malgun Gothic" pitchFamily="34" charset="0"/>
+                          <a:ea typeface="Malgun Gothic" pitchFamily="34" charset="-122"/>
+                          <a:cs typeface="Malgun Gothic" pitchFamily="34" charset="-120"/>
+                        </a:rPr>
+                        <a:t>★★★</a:t>
+                      </a:r>
+                      <a:endParaRPr lang="en-US" sz="860" dirty="0">
+                        <a:latin typeface="Malgun Gothic" charset="0"/>
+                        <a:ea typeface="Malgun Gothic" charset="0"/>
+                        <a:cs typeface="Malgun Gothic" charset="0"/>
+                      </a:endParaRPr>
+                    </a:p>
+                  </a:txBody>
+                  <a:tcPr marL="50800" marR="50800" marT="25400" marB="25400" anchor="ctr">
+                    <a:lnL w="6350" cap="flat" cmpd="sng" algn="ctr">
+                      <a:solidFill>
+                        <a:srgbClr val="A6A6A6"/>
+                      </a:solidFill>
+                      <a:prstDash val="solid"/>
+                      <a:round/>
+                      <a:headEnd type="none" w="med" len="med"/>
+                      <a:tailEnd type="none" w="med" len="med"/>
+                    </a:lnL>
+                    <a:lnR w="6350" cap="flat" cmpd="sng" algn="ctr">
+                      <a:solidFill>
+                        <a:srgbClr val="A6A6A6"/>
+                      </a:solidFill>
+                      <a:prstDash val="solid"/>
+                      <a:round/>
+                      <a:headEnd type="none" w="med" len="med"/>
+                      <a:tailEnd type="none" w="med" len="med"/>
+                    </a:lnR>
+                    <a:lnT w="6350" cap="flat" cmpd="sng" algn="ctr">
+                      <a:solidFill>
+                        <a:srgbClr val="A6A6A6"/>
+                      </a:solidFill>
+                      <a:prstDash val="solid"/>
+                      <a:round/>
+                      <a:headEnd type="none" w="med" len="med"/>
+                      <a:tailEnd type="none" w="med" len="med"/>
+                    </a:lnT>
+                    <a:lnB w="6350" cap="flat" cmpd="sng" algn="ctr">
+                      <a:solidFill>
+                        <a:srgbClr val="A6A6A6"/>
+                      </a:solidFill>
+                      <a:prstDash val="solid"/>
+                      <a:round/>
+                      <a:headEnd type="none" w="med" len="med"/>
+                      <a:tailEnd type="none" w="med" len="med"/>
+                    </a:lnB>
+                    <a:solidFill>
+                      <a:srgbClr val="FFFFFF"/>
+                    </a:solidFill>
+                  </a:tcPr>
+                </a:tc>
+                <a:tc>
+                  <a:txBody>
+                    <a:bodyPr/>
+                    <a:lstStyle/>
+                    <a:p>
+                      <a:pPr algn="l" indent="0" marL="0">
+                        <a:buNone/>
+                      </a:pPr>
+                      <a:r>
+                        <a:rPr lang="en-US" sz="860" dirty="0">
+                          <a:solidFill>
+                            <a:srgbClr val="262626"/>
+                          </a:solidFill>
+                          <a:latin typeface="Malgun Gothic" pitchFamily="34" charset="0"/>
+                          <a:ea typeface="Malgun Gothic" pitchFamily="34" charset="-122"/>
+                          <a:cs typeface="Malgun Gothic" pitchFamily="34" charset="-120"/>
+                        </a:rPr>
+                        <a:t>TTFT 단축 배율 ≥ 2×</a:t>
+                      </a:r>
+                      <a:endParaRPr lang="en-US" sz="860" dirty="0">
+                        <a:latin typeface="Malgun Gothic" charset="0"/>
+                        <a:ea typeface="Malgun Gothic" charset="0"/>
+                        <a:cs typeface="Malgun Gothic" charset="0"/>
+                      </a:endParaRPr>
+                    </a:p>
+                  </a:txBody>
+                  <a:tcPr marL="50800" marR="50800" marT="25400" marB="25400" anchor="ctr">
+                    <a:lnL w="6350" cap="flat" cmpd="sng" algn="ctr">
+                      <a:solidFill>
+                        <a:srgbClr val="A6A6A6"/>
+                      </a:solidFill>
+                      <a:prstDash val="solid"/>
+                      <a:round/>
+                      <a:headEnd type="none" w="med" len="med"/>
+                      <a:tailEnd type="none" w="med" len="med"/>
+                    </a:lnL>
+                    <a:lnR w="6350" cap="flat" cmpd="sng" algn="ctr">
+                      <a:solidFill>
+                        <a:srgbClr val="A6A6A6"/>
+                      </a:solidFill>
+                      <a:prstDash val="solid"/>
+                      <a:round/>
+                      <a:headEnd type="none" w="med" len="med"/>
+                      <a:tailEnd type="none" w="med" len="med"/>
+                    </a:lnR>
+                    <a:lnT w="6350" cap="flat" cmpd="sng" algn="ctr">
+                      <a:solidFill>
+                        <a:srgbClr val="A6A6A6"/>
+                      </a:solidFill>
+                      <a:prstDash val="solid"/>
+                      <a:round/>
+                      <a:headEnd type="none" w="med" len="med"/>
+                      <a:tailEnd type="none" w="med" len="med"/>
+                    </a:lnT>
+                    <a:lnB w="6350" cap="flat" cmpd="sng" algn="ctr">
+                      <a:solidFill>
+                        <a:srgbClr val="A6A6A6"/>
+                      </a:solidFill>
+                      <a:prstDash val="solid"/>
+                      <a:round/>
+                      <a:headEnd type="none" w="med" len="med"/>
+                      <a:tailEnd type="none" w="med" len="med"/>
+                    </a:lnB>
+                    <a:solidFill>
+                      <a:srgbClr val="FFFFFF"/>
+                    </a:solidFill>
+                  </a:tcPr>
+                </a:tc>
+              </a:tr>
+              <a:tr h="0">
+                <a:tc>
+                  <a:txBody>
+                    <a:bodyPr/>
+                    <a:lstStyle/>
+                    <a:p>
+                      <a:pPr algn="ctr" indent="0" marL="0">
+                        <a:buNone/>
+                      </a:pPr>
+                      <a:r>
+                        <a:rPr lang="en-US" sz="860" dirty="0">
+                          <a:solidFill>
+                            <a:srgbClr val="262626"/>
+                          </a:solidFill>
+                          <a:latin typeface="Malgun Gothic" pitchFamily="34" charset="0"/>
+                          <a:ea typeface="Malgun Gothic" pitchFamily="34" charset="-122"/>
+                          <a:cs typeface="Malgun Gothic" pitchFamily="34" charset="-120"/>
+                        </a:rPr>
+                        <a:t>★★☆</a:t>
+                      </a:r>
+                      <a:endParaRPr lang="en-US" sz="860" dirty="0">
+                        <a:latin typeface="Malgun Gothic" charset="0"/>
+                        <a:ea typeface="Malgun Gothic" charset="0"/>
+                        <a:cs typeface="Malgun Gothic" charset="0"/>
+                      </a:endParaRPr>
+                    </a:p>
+                  </a:txBody>
+                  <a:tcPr marL="50800" marR="50800" marT="25400" marB="25400" anchor="ctr">
+                    <a:lnL w="6350" cap="flat" cmpd="sng" algn="ctr">
+                      <a:solidFill>
+                        <a:srgbClr val="A6A6A6"/>
+                      </a:solidFill>
+                      <a:prstDash val="solid"/>
+                      <a:round/>
+                      <a:headEnd type="none" w="med" len="med"/>
+                      <a:tailEnd type="none" w="med" len="med"/>
+                    </a:lnL>
+                    <a:lnR w="6350" cap="flat" cmpd="sng" algn="ctr">
+                      <a:solidFill>
+                        <a:srgbClr val="A6A6A6"/>
+                      </a:solidFill>
+                      <a:prstDash val="solid"/>
+                      <a:round/>
+                      <a:headEnd type="none" w="med" len="med"/>
+                      <a:tailEnd type="none" w="med" len="med"/>
+                    </a:lnR>
+                    <a:lnT w="6350" cap="flat" cmpd="sng" algn="ctr">
+                      <a:solidFill>
+                        <a:srgbClr val="A6A6A6"/>
+                      </a:solidFill>
+                      <a:prstDash val="solid"/>
+                      <a:round/>
+                      <a:headEnd type="none" w="med" len="med"/>
+                      <a:tailEnd type="none" w="med" len="med"/>
+                    </a:lnT>
+                    <a:lnB w="6350" cap="flat" cmpd="sng" algn="ctr">
+                      <a:solidFill>
+                        <a:srgbClr val="A6A6A6"/>
+                      </a:solidFill>
+                      <a:prstDash val="solid"/>
+                      <a:round/>
+                      <a:headEnd type="none" w="med" len="med"/>
+                      <a:tailEnd type="none" w="med" len="med"/>
+                    </a:lnB>
+                    <a:solidFill>
+                      <a:srgbClr val="FFFFFF"/>
+                    </a:solidFill>
+                  </a:tcPr>
+                </a:tc>
+                <a:tc>
+                  <a:txBody>
+                    <a:bodyPr/>
+                    <a:lstStyle/>
+                    <a:p>
+                      <a:pPr algn="l" indent="0" marL="0">
+                        <a:buNone/>
+                      </a:pPr>
+                      <a:r>
+                        <a:rPr lang="en-US" sz="860" dirty="0">
+                          <a:solidFill>
+                            <a:srgbClr val="262626"/>
+                          </a:solidFill>
+                          <a:latin typeface="Malgun Gothic" pitchFamily="34" charset="0"/>
+                          <a:ea typeface="Malgun Gothic" pitchFamily="34" charset="-122"/>
+                          <a:cs typeface="Malgun Gothic" pitchFamily="34" charset="-120"/>
+                        </a:rPr>
+                        <a:t>1.5× – 2×</a:t>
+                      </a:r>
+                      <a:endParaRPr lang="en-US" sz="860" dirty="0">
+                        <a:latin typeface="Malgun Gothic" charset="0"/>
+                        <a:ea typeface="Malgun Gothic" charset="0"/>
+                        <a:cs typeface="Malgun Gothic" charset="0"/>
+                      </a:endParaRPr>
+                    </a:p>
+                  </a:txBody>
+                  <a:tcPr marL="50800" marR="50800" marT="25400" marB="25400" anchor="ctr">
+                    <a:lnL w="6350" cap="flat" cmpd="sng" algn="ctr">
+                      <a:solidFill>
+                        <a:srgbClr val="A6A6A6"/>
+                      </a:solidFill>
+                      <a:prstDash val="solid"/>
+                      <a:round/>
+                      <a:headEnd type="none" w="med" len="med"/>
+                      <a:tailEnd type="none" w="med" len="med"/>
+                    </a:lnL>
+                    <a:lnR w="6350" cap="flat" cmpd="sng" algn="ctr">
+                      <a:solidFill>
+                        <a:srgbClr val="A6A6A6"/>
+                      </a:solidFill>
+                      <a:prstDash val="solid"/>
+                      <a:round/>
+                      <a:headEnd type="none" w="med" len="med"/>
+                      <a:tailEnd type="none" w="med" len="med"/>
+                    </a:lnR>
+                    <a:lnT w="6350" cap="flat" cmpd="sng" algn="ctr">
+                      <a:solidFill>
+                        <a:srgbClr val="A6A6A6"/>
+                      </a:solidFill>
+                      <a:prstDash val="solid"/>
+                      <a:round/>
+                      <a:headEnd type="none" w="med" len="med"/>
+                      <a:tailEnd type="none" w="med" len="med"/>
+                    </a:lnT>
+                    <a:lnB w="6350" cap="flat" cmpd="sng" algn="ctr">
+                      <a:solidFill>
+                        <a:srgbClr val="A6A6A6"/>
+                      </a:solidFill>
+                      <a:prstDash val="solid"/>
+                      <a:round/>
+                      <a:headEnd type="none" w="med" len="med"/>
+                      <a:tailEnd type="none" w="med" len="med"/>
+                    </a:lnB>
+                    <a:solidFill>
+                      <a:srgbClr val="FFFFFF"/>
+                    </a:solidFill>
+                  </a:tcPr>
+                </a:tc>
+              </a:tr>
+              <a:tr h="0">
+                <a:tc>
+                  <a:txBody>
+                    <a:bodyPr/>
+                    <a:lstStyle/>
+                    <a:p>
+                      <a:pPr algn="ctr" indent="0" marL="0">
+                        <a:buNone/>
+                      </a:pPr>
+                      <a:r>
+                        <a:rPr lang="en-US" sz="860" dirty="0">
+                          <a:solidFill>
+                            <a:srgbClr val="262626"/>
+                          </a:solidFill>
+                          <a:latin typeface="Malgun Gothic" pitchFamily="34" charset="0"/>
+                          <a:ea typeface="Malgun Gothic" pitchFamily="34" charset="-122"/>
+                          <a:cs typeface="Malgun Gothic" pitchFamily="34" charset="-120"/>
+                        </a:rPr>
+                        <a:t>★☆☆</a:t>
+                      </a:r>
+                      <a:endParaRPr lang="en-US" sz="860" dirty="0">
+                        <a:latin typeface="Malgun Gothic" charset="0"/>
+                        <a:ea typeface="Malgun Gothic" charset="0"/>
+                        <a:cs typeface="Malgun Gothic" charset="0"/>
+                      </a:endParaRPr>
+                    </a:p>
+                  </a:txBody>
+                  <a:tcPr marL="50800" marR="50800" marT="25400" marB="25400" anchor="ctr">
+                    <a:lnL w="6350" cap="flat" cmpd="sng" algn="ctr">
+                      <a:solidFill>
+                        <a:srgbClr val="A6A6A6"/>
+                      </a:solidFill>
+                      <a:prstDash val="solid"/>
+                      <a:round/>
+                      <a:headEnd type="none" w="med" len="med"/>
+                      <a:tailEnd type="none" w="med" len="med"/>
+                    </a:lnL>
+                    <a:lnR w="6350" cap="flat" cmpd="sng" algn="ctr">
+                      <a:solidFill>
+                        <a:srgbClr val="A6A6A6"/>
+                      </a:solidFill>
+                      <a:prstDash val="solid"/>
+                      <a:round/>
+                      <a:headEnd type="none" w="med" len="med"/>
+                      <a:tailEnd type="none" w="med" len="med"/>
+                    </a:lnR>
+                    <a:lnT w="6350" cap="flat" cmpd="sng" algn="ctr">
+                      <a:solidFill>
+                        <a:srgbClr val="A6A6A6"/>
+                      </a:solidFill>
+                      <a:prstDash val="solid"/>
+                      <a:round/>
+                      <a:headEnd type="none" w="med" len="med"/>
+                      <a:tailEnd type="none" w="med" len="med"/>
+                    </a:lnT>
+                    <a:lnB w="6350" cap="flat" cmpd="sng" algn="ctr">
+                      <a:solidFill>
+                        <a:srgbClr val="A6A6A6"/>
+                      </a:solidFill>
+                      <a:prstDash val="solid"/>
+                      <a:round/>
+                      <a:headEnd type="none" w="med" len="med"/>
+                      <a:tailEnd type="none" w="med" len="med"/>
+                    </a:lnB>
+                    <a:solidFill>
+                      <a:srgbClr val="FFFFFF"/>
+                    </a:solidFill>
+                  </a:tcPr>
+                </a:tc>
+                <a:tc>
+                  <a:txBody>
+                    <a:bodyPr/>
+                    <a:lstStyle/>
+                    <a:p>
+                      <a:pPr algn="l" indent="0" marL="0">
+                        <a:buNone/>
+                      </a:pPr>
+                      <a:r>
+                        <a:rPr lang="en-US" sz="860" dirty="0">
+                          <a:solidFill>
+                            <a:srgbClr val="262626"/>
+                          </a:solidFill>
+                          <a:latin typeface="Malgun Gothic" pitchFamily="34" charset="0"/>
+                          <a:ea typeface="Malgun Gothic" pitchFamily="34" charset="-122"/>
+                          <a:cs typeface="Malgun Gothic" pitchFamily="34" charset="-120"/>
+                        </a:rPr>
+                        <a:t>&lt; 1.5×</a:t>
+                      </a:r>
+                      <a:endParaRPr lang="en-US" sz="860" dirty="0">
+                        <a:latin typeface="Malgun Gothic" charset="0"/>
+                        <a:ea typeface="Malgun Gothic" charset="0"/>
+                        <a:cs typeface="Malgun Gothic" charset="0"/>
+                      </a:endParaRPr>
+                    </a:p>
+                  </a:txBody>
+                  <a:tcPr marL="50800" marR="50800" marT="25400" marB="25400" anchor="ctr">
+                    <a:lnL w="6350" cap="flat" cmpd="sng" algn="ctr">
+                      <a:solidFill>
+                        <a:srgbClr val="A6A6A6"/>
+                      </a:solidFill>
+                      <a:prstDash val="solid"/>
+                      <a:round/>
+                      <a:headEnd type="none" w="med" len="med"/>
+                      <a:tailEnd type="none" w="med" len="med"/>
+                    </a:lnL>
+                    <a:lnR w="6350" cap="flat" cmpd="sng" algn="ctr">
+                      <a:solidFill>
+                        <a:srgbClr val="A6A6A6"/>
+                      </a:solidFill>
+                      <a:prstDash val="solid"/>
+                      <a:round/>
+                      <a:headEnd type="none" w="med" len="med"/>
+                      <a:tailEnd type="none" w="med" len="med"/>
+                    </a:lnR>
+                    <a:lnT w="6350" cap="flat" cmpd="sng" algn="ctr">
+                      <a:solidFill>
+                        <a:srgbClr val="A6A6A6"/>
+                      </a:solidFill>
+                      <a:prstDash val="solid"/>
+                      <a:round/>
+                      <a:headEnd type="none" w="med" len="med"/>
+                      <a:tailEnd type="none" w="med" len="med"/>
+                    </a:lnT>
+                    <a:lnB w="6350" cap="flat" cmpd="sng" algn="ctr">
+                      <a:solidFill>
+                        <a:srgbClr val="A6A6A6"/>
+                      </a:solidFill>
+                      <a:prstDash val="solid"/>
+                      <a:round/>
+                      <a:headEnd type="none" w="med" len="med"/>
+                      <a:tailEnd type="none" w="med" len="med"/>
+                    </a:lnB>
+                    <a:solidFill>
+                      <a:srgbClr val="FFFFFF"/>
+                    </a:solidFill>
+                  </a:tcPr>
+                </a:tc>
+              </a:tr>
+            </a:tbl>
+          </a:graphicData>
+        </a:graphic>
+      </p:graphicFrame>
+      <p:sp>
+        <p:nvSpPr>
+          <p:cNvPr id="26" name="Shape 23"/>
+          <p:cNvSpPr/>
+          <p:nvPr/>
+        </p:nvSpPr>
+        <p:spPr>
+          <a:xfrm>
+            <a:off x="320040" y="4617720"/>
+            <a:ext cx="11274552" cy="310896"/>
+          </a:xfrm>
+          <a:prstGeom prst="rect">
+            <a:avLst/>
+          </a:prstGeom>
+          <a:solidFill>
+            <a:srgbClr val="1F3864"/>
+          </a:solidFill>
+          <a:ln/>
+        </p:spPr>
+      </p:sp>
+      <p:sp>
+        <p:nvSpPr>
+          <p:cNvPr id="27" name="Text 24"/>
+          <p:cNvSpPr/>
+          <p:nvPr/>
+        </p:nvSpPr>
+        <p:spPr>
+          <a:xfrm>
+            <a:off x="365760" y="4617720"/>
+            <a:ext cx="11183112" cy="310896"/>
+          </a:xfrm>
+          <a:prstGeom prst="rect">
+            <a:avLst/>
+          </a:prstGeom>
+          <a:noFill/>
+          <a:ln/>
+        </p:spPr>
+        <p:txBody>
+          <a:bodyPr wrap="square" lIns="0" tIns="0" rIns="0" bIns="0" rtlCol="0" anchor="ctr"/>
+          <a:lstStyle/>
+          <a:p>
+            <a:pPr algn="ctr" indent="0" marL="0">
+              <a:buNone/>
+            </a:pPr>
+            <a:r>
+              <a:rPr lang="en-US" sz="1300" b="1" dirty="0">
+                <a:solidFill>
+                  <a:srgbClr val="FFFFFF"/>
+                </a:solidFill>
+                <a:latin typeface="Malgun Gothic" pitchFamily="34" charset="0"/>
+                <a:ea typeface="Malgun Gothic" pitchFamily="34" charset="-122"/>
+                <a:cs typeface="Malgun Gothic" pitchFamily="34" charset="-120"/>
+              </a:rPr>
+              <a:t>bin 근거 (A 자체 실측 · B 문헌 · C 구조 논증)</a:t>
+            </a:r>
+            <a:endParaRPr lang="en-US" sz="1300" dirty="0"/>
+          </a:p>
+        </p:txBody>
+      </p:sp>
+      <p:sp>
+        <p:nvSpPr>
+          <p:cNvPr id="28" name="Text 25"/>
+          <p:cNvSpPr/>
+          <p:nvPr/>
+        </p:nvSpPr>
+        <p:spPr>
+          <a:xfrm>
+            <a:off x="365760" y="5074920"/>
+            <a:ext cx="11183112" cy="1325880"/>
+          </a:xfrm>
+          <a:prstGeom prst="rect">
+            <a:avLst/>
+          </a:prstGeom>
+          <a:noFill/>
+          <a:ln/>
+        </p:spPr>
+        <p:txBody>
+          <a:bodyPr wrap="square" rtlCol="0" anchor="t"/>
+          <a:lstStyle/>
+          <a:p>
+            <a:pPr marL="101600" indent="-101600">
+              <a:spcAft>
+                <a:spcPts val="400"/>
+              </a:spcAft>
+              <a:buSzPct val="100000"/>
+              <a:buChar char="◆"/>
+            </a:pPr>
+            <a:r>
+              <a:rPr lang="en-US" sz="880" dirty="0">
+                <a:solidFill>
+                  <a:srgbClr val="262626"/>
+                </a:solidFill>
+                <a:latin typeface="Malgun Gothic" pitchFamily="34" charset="0"/>
+                <a:ea typeface="Malgun Gothic" pitchFamily="34" charset="-122"/>
+                <a:cs typeface="Malgun Gothic" pitchFamily="34" charset="-120"/>
+              </a:rPr>
+              <a:t>CacheBlend (EuroSys'25 Best Paper) — RAG KV 재사용 + 선택 재계산(HKVD 10–15%)으로 TTFT 2.2–3.3× 단축, 품질 저하 F1/Rouge-L 0.01–0.03 (B)</a:t>
+            </a:r>
+            <a:endParaRPr lang="en-US" sz="880" dirty="0"/>
+          </a:p>
+          <a:p>
+            <a:pPr marL="101600" indent="-101600">
+              <a:spcAft>
+                <a:spcPts val="400"/>
+              </a:spcAft>
+              <a:buSzPct val="100000"/>
+              <a:buChar char="◆"/>
+            </a:pPr>
+            <a:r>
+              <a:rPr lang="en-US" sz="880" dirty="0">
+                <a:solidFill>
+                  <a:srgbClr val="262626"/>
+                </a:solidFill>
+                <a:latin typeface="Malgun Gothic" pitchFamily="34" charset="0"/>
+                <a:ea typeface="Malgun Gothic" pitchFamily="34" charset="-122"/>
+                <a:cs typeface="Malgun Gothic" pitchFamily="34" charset="-120"/>
+              </a:rPr>
+              <a:t>SGLang RadixAttention — prefix 재사용으로 prefill 재계산 제거 (B)</a:t>
+            </a:r>
+            <a:endParaRPr lang="en-US" sz="880" dirty="0"/>
+          </a:p>
+          <a:p>
+            <a:pPr marL="101600" indent="-101600">
+              <a:spcAft>
+                <a:spcPts val="400"/>
+              </a:spcAft>
+              <a:buSzPct val="100000"/>
+              <a:buChar char="◆"/>
+            </a:pPr>
+            <a:r>
+              <a:rPr lang="en-US" sz="880" dirty="0">
+                <a:solidFill>
+                  <a:srgbClr val="262626"/>
+                </a:solidFill>
+                <a:latin typeface="Malgun Gothic" pitchFamily="34" charset="0"/>
+                <a:ea typeface="Malgun Gothic" pitchFamily="34" charset="-122"/>
+                <a:cs typeface="Malgun Gothic" pitchFamily="34" charset="-120"/>
+              </a:rPr>
+              <a:t>2× = CacheBlend 하단 2.2×의 보수 반올림 (C) — prefix+비접두 결합·복원 판단을 갖춘 시스템의 하한. 1.5×는 단일 기법 부분 적용 도달선 (C)</a:t>
+            </a:r>
+            <a:endParaRPr lang="en-US" sz="880" dirty="0"/>
+          </a:p>
+        </p:txBody>
+      </p:sp>
+    </p:spTree>
+  </p:cSld>
+  <p:clrMapOvr>
+    <a:masterClrMapping/>
+  </p:clrMapOvr>
+</p:sld>
+</file>
+
+<file path=ppt/slides/slide11.xml><?xml version="1.0" encoding="utf-8"?>
+<p:sld xmlns:a="http://schemas.openxmlformats.org/drawingml/2006/main" xmlns:r="http://schemas.openxmlformats.org/officeDocument/2006/relationships" xmlns:p="http://schemas.openxmlformats.org/presentationml/2006/main">
+  <p:cSld name="Slide 11">
+    <p:spTree>
+      <p:nvGrpSpPr>
+        <p:cNvPr id="1" name=""/>
+        <p:cNvGrpSpPr/>
+        <p:nvPr/>
+      </p:nvGrpSpPr>
+      <p:grpSpPr>
+        <a:xfrm>
+          <a:off x="0" y="0"/>
+          <a:ext cx="0" cy="0"/>
+          <a:chOff x="0" y="0"/>
+          <a:chExt cx="0" cy="0"/>
+        </a:xfrm>
+      </p:grpSpPr>
+      <p:sp>
+        <p:nvSpPr>
+          <p:cNvPr id="2" name="Shape 0"/>
+          <p:cNvSpPr/>
+          <p:nvPr/>
+        </p:nvSpPr>
+        <p:spPr>
+          <a:xfrm>
+            <a:off x="0" y="0"/>
+            <a:ext cx="12191695" cy="914400"/>
+          </a:xfrm>
+          <a:prstGeom prst="rect">
+            <a:avLst/>
+          </a:prstGeom>
+          <a:solidFill>
             <a:srgbClr val="4E7C3A"/>
           </a:solidFill>
           <a:ln/>
@@ -5486,7 +7138,7 @@
       </p:sp>
       <p:graphicFrame>
         <p:nvGraphicFramePr>
-          <p:cNvPr id="11" name="Table 0"/>
+          <p:cNvPr id="12" name="Table 0"/>
           <p:cNvGraphicFramePr>
             <a:graphicFrameLocks noGrp="1"/>
           </p:cNvGraphicFramePr>
@@ -6218,9 +7870,9 @@
 </p:sld>
 </file>
 
-<file path=ppt/slides/slide11.xml><?xml version="1.0" encoding="utf-8"?>
+<file path=ppt/slides/slide12.xml><?xml version="1.0" encoding="utf-8"?>
 <p:sld xmlns:a="http://schemas.openxmlformats.org/drawingml/2006/main" xmlns:r="http://schemas.openxmlformats.org/officeDocument/2006/relationships" xmlns:p="http://schemas.openxmlformats.org/presentationml/2006/main">
-  <p:cSld name="Slide 11">
+  <p:cSld name="Slide 12">
     <p:spTree>
       <p:nvGrpSpPr>
         <p:cNvPr id="1" name=""/>
@@ -7049,7 +8701,7 @@
       </p:sp>
       <p:graphicFrame>
         <p:nvGraphicFramePr>
-          <p:cNvPr id="12" name="Table 0"/>
+          <p:cNvPr id="13" name="Table 0"/>
           <p:cNvGraphicFramePr>
             <a:graphicFrameLocks noGrp="1"/>
           </p:cNvGraphicFramePr>
@@ -20721,6 +22373,2282 @@
                 <a:ea typeface="Malgun Gothic" pitchFamily="34" charset="-122"/>
                 <a:cs typeface="Malgun Gothic" pitchFamily="34" charset="-120"/>
               </a:rPr>
+              <a:t>Architecture Driver 도출</a:t>
+            </a:r>
+            <a:endParaRPr lang="en-US" sz="3000" dirty="0"/>
+          </a:p>
+        </p:txBody>
+      </p:sp>
+      <p:sp>
+        <p:nvSpPr>
+          <p:cNvPr id="4" name="Shape 2"/>
+          <p:cNvSpPr/>
+          <p:nvPr/>
+        </p:nvSpPr>
+        <p:spPr>
+          <a:xfrm>
+            <a:off x="7208215" y="320040"/>
+            <a:ext cx="786384" cy="274320"/>
+          </a:xfrm>
+          <a:prstGeom prst="rect">
+            <a:avLst/>
+          </a:prstGeom>
+          <a:solidFill>
+            <a:srgbClr val="E9E9E9"/>
+          </a:solidFill>
+          <a:ln w="9525">
+            <a:solidFill>
+              <a:srgbClr val="A6A6A6"/>
+            </a:solidFill>
+            <a:prstDash val="solid"/>
+          </a:ln>
+        </p:spPr>
+      </p:sp>
+      <p:sp>
+        <p:nvSpPr>
+          <p:cNvPr id="5" name="Text 3"/>
+          <p:cNvSpPr/>
+          <p:nvPr/>
+        </p:nvSpPr>
+        <p:spPr>
+          <a:xfrm>
+            <a:off x="7208215" y="320040"/>
+            <a:ext cx="786384" cy="274320"/>
+          </a:xfrm>
+          <a:prstGeom prst="rect">
+            <a:avLst/>
+          </a:prstGeom>
+          <a:noFill/>
+          <a:ln/>
+        </p:spPr>
+        <p:txBody>
+          <a:bodyPr wrap="square" lIns="0" tIns="0" rIns="0" bIns="0" rtlCol="0" anchor="ctr"/>
+          <a:lstStyle/>
+          <a:p>
+            <a:pPr algn="ctr" indent="0" marL="0">
+              <a:buNone/>
+            </a:pPr>
+            <a:r>
+              <a:rPr lang="en-US" sz="900" dirty="0">
+                <a:solidFill>
+                  <a:srgbClr val="595959"/>
+                </a:solidFill>
+                <a:latin typeface="Malgun Gothic" pitchFamily="34" charset="0"/>
+                <a:ea typeface="Malgun Gothic" pitchFamily="34" charset="-122"/>
+                <a:cs typeface="Malgun Gothic" pitchFamily="34" charset="-120"/>
+              </a:rPr>
+              <a:t>과제 개요</a:t>
+            </a:r>
+            <a:endParaRPr lang="en-US" sz="900" dirty="0"/>
+          </a:p>
+        </p:txBody>
+      </p:sp>
+      <p:sp>
+        <p:nvSpPr>
+          <p:cNvPr id="6" name="Shape 4"/>
+          <p:cNvSpPr/>
+          <p:nvPr/>
+        </p:nvSpPr>
+        <p:spPr>
+          <a:xfrm>
+            <a:off x="8008315" y="338328"/>
+            <a:ext cx="155448" cy="237744"/>
+          </a:xfrm>
+          <a:prstGeom prst="chevron">
+            <a:avLst/>
+          </a:prstGeom>
+          <a:solidFill>
+            <a:srgbClr val="9AA0A6"/>
+          </a:solidFill>
+          <a:ln/>
+        </p:spPr>
+      </p:sp>
+      <p:sp>
+        <p:nvSpPr>
+          <p:cNvPr id="7" name="Shape 5"/>
+          <p:cNvSpPr/>
+          <p:nvPr/>
+        </p:nvSpPr>
+        <p:spPr>
+          <a:xfrm>
+            <a:off x="8177479" y="320040"/>
+            <a:ext cx="786384" cy="274320"/>
+          </a:xfrm>
+          <a:prstGeom prst="rect">
+            <a:avLst/>
+          </a:prstGeom>
+          <a:solidFill>
+            <a:srgbClr val="FFC000"/>
+          </a:solidFill>
+          <a:ln w="9525">
+            <a:solidFill>
+              <a:srgbClr val="FFC000"/>
+            </a:solidFill>
+            <a:prstDash val="solid"/>
+          </a:ln>
+        </p:spPr>
+      </p:sp>
+      <p:sp>
+        <p:nvSpPr>
+          <p:cNvPr id="8" name="Text 6"/>
+          <p:cNvSpPr/>
+          <p:nvPr/>
+        </p:nvSpPr>
+        <p:spPr>
+          <a:xfrm>
+            <a:off x="8177479" y="320040"/>
+            <a:ext cx="786384" cy="274320"/>
+          </a:xfrm>
+          <a:prstGeom prst="rect">
+            <a:avLst/>
+          </a:prstGeom>
+          <a:noFill/>
+          <a:ln/>
+        </p:spPr>
+        <p:txBody>
+          <a:bodyPr wrap="square" lIns="0" tIns="0" rIns="0" bIns="0" rtlCol="0" anchor="ctr"/>
+          <a:lstStyle/>
+          <a:p>
+            <a:pPr algn="ctr" indent="0" marL="0">
+              <a:buNone/>
+            </a:pPr>
+            <a:r>
+              <a:rPr lang="en-US" sz="900" b="1" dirty="0">
+                <a:solidFill>
+                  <a:srgbClr val="1F3864"/>
+                </a:solidFill>
+                <a:latin typeface="Malgun Gothic" pitchFamily="34" charset="0"/>
+                <a:ea typeface="Malgun Gothic" pitchFamily="34" charset="-122"/>
+                <a:cs typeface="Malgun Gothic" pitchFamily="34" charset="-120"/>
+              </a:rPr>
+              <a:t>요구사항</a:t>
+            </a:r>
+            <a:endParaRPr lang="en-US" sz="900" dirty="0"/>
+          </a:p>
+        </p:txBody>
+      </p:sp>
+      <p:sp>
+        <p:nvSpPr>
+          <p:cNvPr id="9" name="Shape 7"/>
+          <p:cNvSpPr/>
+          <p:nvPr/>
+        </p:nvSpPr>
+        <p:spPr>
+          <a:xfrm>
+            <a:off x="8977579" y="338328"/>
+            <a:ext cx="155448" cy="237744"/>
+          </a:xfrm>
+          <a:prstGeom prst="chevron">
+            <a:avLst/>
+          </a:prstGeom>
+          <a:solidFill>
+            <a:srgbClr val="9AA0A6"/>
+          </a:solidFill>
+          <a:ln/>
+        </p:spPr>
+      </p:sp>
+      <p:sp>
+        <p:nvSpPr>
+          <p:cNvPr id="10" name="Shape 8"/>
+          <p:cNvSpPr/>
+          <p:nvPr/>
+        </p:nvSpPr>
+        <p:spPr>
+          <a:xfrm>
+            <a:off x="9146743" y="320040"/>
+            <a:ext cx="786384" cy="274320"/>
+          </a:xfrm>
+          <a:prstGeom prst="rect">
+            <a:avLst/>
+          </a:prstGeom>
+          <a:solidFill>
+            <a:srgbClr val="E9E9E9"/>
+          </a:solidFill>
+          <a:ln w="9525">
+            <a:solidFill>
+              <a:srgbClr val="A6A6A6"/>
+            </a:solidFill>
+            <a:prstDash val="solid"/>
+          </a:ln>
+        </p:spPr>
+      </p:sp>
+      <p:sp>
+        <p:nvSpPr>
+          <p:cNvPr id="11" name="Text 9"/>
+          <p:cNvSpPr/>
+          <p:nvPr/>
+        </p:nvSpPr>
+        <p:spPr>
+          <a:xfrm>
+            <a:off x="9146743" y="320040"/>
+            <a:ext cx="786384" cy="274320"/>
+          </a:xfrm>
+          <a:prstGeom prst="rect">
+            <a:avLst/>
+          </a:prstGeom>
+          <a:noFill/>
+          <a:ln/>
+        </p:spPr>
+        <p:txBody>
+          <a:bodyPr wrap="square" lIns="0" tIns="0" rIns="0" bIns="0" rtlCol="0" anchor="ctr"/>
+          <a:lstStyle/>
+          <a:p>
+            <a:pPr algn="ctr" indent="0" marL="0">
+              <a:buNone/>
+            </a:pPr>
+            <a:r>
+              <a:rPr lang="en-US" sz="900" dirty="0">
+                <a:solidFill>
+                  <a:srgbClr val="595959"/>
+                </a:solidFill>
+                <a:latin typeface="Malgun Gothic" pitchFamily="34" charset="0"/>
+                <a:ea typeface="Malgun Gothic" pitchFamily="34" charset="-122"/>
+                <a:cs typeface="Malgun Gothic" pitchFamily="34" charset="-120"/>
+              </a:rPr>
+              <a:t>설계</a:t>
+            </a:r>
+            <a:endParaRPr lang="en-US" sz="900" dirty="0"/>
+          </a:p>
+        </p:txBody>
+      </p:sp>
+      <p:sp>
+        <p:nvSpPr>
+          <p:cNvPr id="12" name="Shape 10"/>
+          <p:cNvSpPr/>
+          <p:nvPr/>
+        </p:nvSpPr>
+        <p:spPr>
+          <a:xfrm>
+            <a:off x="9946843" y="338328"/>
+            <a:ext cx="155448" cy="237744"/>
+          </a:xfrm>
+          <a:prstGeom prst="chevron">
+            <a:avLst/>
+          </a:prstGeom>
+          <a:solidFill>
+            <a:srgbClr val="9AA0A6"/>
+          </a:solidFill>
+          <a:ln/>
+        </p:spPr>
+      </p:sp>
+      <p:sp>
+        <p:nvSpPr>
+          <p:cNvPr id="13" name="Shape 11"/>
+          <p:cNvSpPr/>
+          <p:nvPr/>
+        </p:nvSpPr>
+        <p:spPr>
+          <a:xfrm>
+            <a:off x="10116007" y="320040"/>
+            <a:ext cx="786384" cy="274320"/>
+          </a:xfrm>
+          <a:prstGeom prst="rect">
+            <a:avLst/>
+          </a:prstGeom>
+          <a:solidFill>
+            <a:srgbClr val="E9E9E9"/>
+          </a:solidFill>
+          <a:ln w="9525">
+            <a:solidFill>
+              <a:srgbClr val="A6A6A6"/>
+            </a:solidFill>
+            <a:prstDash val="solid"/>
+          </a:ln>
+        </p:spPr>
+      </p:sp>
+      <p:sp>
+        <p:nvSpPr>
+          <p:cNvPr id="14" name="Text 12"/>
+          <p:cNvSpPr/>
+          <p:nvPr/>
+        </p:nvSpPr>
+        <p:spPr>
+          <a:xfrm>
+            <a:off x="10116007" y="320040"/>
+            <a:ext cx="786384" cy="274320"/>
+          </a:xfrm>
+          <a:prstGeom prst="rect">
+            <a:avLst/>
+          </a:prstGeom>
+          <a:noFill/>
+          <a:ln/>
+        </p:spPr>
+        <p:txBody>
+          <a:bodyPr wrap="square" lIns="0" tIns="0" rIns="0" bIns="0" rtlCol="0" anchor="ctr"/>
+          <a:lstStyle/>
+          <a:p>
+            <a:pPr algn="ctr" indent="0" marL="0">
+              <a:buNone/>
+            </a:pPr>
+            <a:r>
+              <a:rPr lang="en-US" sz="900" dirty="0">
+                <a:solidFill>
+                  <a:srgbClr val="595959"/>
+                </a:solidFill>
+                <a:latin typeface="Malgun Gothic" pitchFamily="34" charset="0"/>
+                <a:ea typeface="Malgun Gothic" pitchFamily="34" charset="-122"/>
+                <a:cs typeface="Malgun Gothic" pitchFamily="34" charset="-120"/>
+              </a:rPr>
+              <a:t>검증</a:t>
+            </a:r>
+            <a:endParaRPr lang="en-US" sz="900" dirty="0"/>
+          </a:p>
+        </p:txBody>
+      </p:sp>
+      <p:sp>
+        <p:nvSpPr>
+          <p:cNvPr id="15" name="Shape 13"/>
+          <p:cNvSpPr/>
+          <p:nvPr/>
+        </p:nvSpPr>
+        <p:spPr>
+          <a:xfrm>
+            <a:off x="10916107" y="338328"/>
+            <a:ext cx="155448" cy="237744"/>
+          </a:xfrm>
+          <a:prstGeom prst="chevron">
+            <a:avLst/>
+          </a:prstGeom>
+          <a:solidFill>
+            <a:srgbClr val="9AA0A6"/>
+          </a:solidFill>
+          <a:ln/>
+        </p:spPr>
+      </p:sp>
+      <p:sp>
+        <p:nvSpPr>
+          <p:cNvPr id="16" name="Shape 14"/>
+          <p:cNvSpPr/>
+          <p:nvPr/>
+        </p:nvSpPr>
+        <p:spPr>
+          <a:xfrm>
+            <a:off x="11085271" y="320040"/>
+            <a:ext cx="786384" cy="274320"/>
+          </a:xfrm>
+          <a:prstGeom prst="rect">
+            <a:avLst/>
+          </a:prstGeom>
+          <a:solidFill>
+            <a:srgbClr val="E9E9E9"/>
+          </a:solidFill>
+          <a:ln w="9525">
+            <a:solidFill>
+              <a:srgbClr val="A6A6A6"/>
+            </a:solidFill>
+            <a:prstDash val="solid"/>
+          </a:ln>
+        </p:spPr>
+      </p:sp>
+      <p:sp>
+        <p:nvSpPr>
+          <p:cNvPr id="17" name="Text 15"/>
+          <p:cNvSpPr/>
+          <p:nvPr/>
+        </p:nvSpPr>
+        <p:spPr>
+          <a:xfrm>
+            <a:off x="11085271" y="320040"/>
+            <a:ext cx="786384" cy="274320"/>
+          </a:xfrm>
+          <a:prstGeom prst="rect">
+            <a:avLst/>
+          </a:prstGeom>
+          <a:noFill/>
+          <a:ln/>
+        </p:spPr>
+        <p:txBody>
+          <a:bodyPr wrap="square" lIns="0" tIns="0" rIns="0" bIns="0" rtlCol="0" anchor="ctr"/>
+          <a:lstStyle/>
+          <a:p>
+            <a:pPr algn="ctr" indent="0" marL="0">
+              <a:buNone/>
+            </a:pPr>
+            <a:r>
+              <a:rPr lang="en-US" sz="900" dirty="0">
+                <a:solidFill>
+                  <a:srgbClr val="595959"/>
+                </a:solidFill>
+                <a:latin typeface="Malgun Gothic" pitchFamily="34" charset="0"/>
+                <a:ea typeface="Malgun Gothic" pitchFamily="34" charset="-122"/>
+                <a:cs typeface="Malgun Gothic" pitchFamily="34" charset="-120"/>
+              </a:rPr>
+              <a:t>결론</a:t>
+            </a:r>
+            <a:endParaRPr lang="en-US" sz="900" dirty="0"/>
+          </a:p>
+        </p:txBody>
+      </p:sp>
+      <p:sp>
+        <p:nvSpPr>
+          <p:cNvPr id="18" name="Text 16"/>
+          <p:cNvSpPr/>
+          <p:nvPr/>
+        </p:nvSpPr>
+        <p:spPr>
+          <a:xfrm>
+            <a:off x="10728655" y="6492240"/>
+            <a:ext cx="1280160" cy="256032"/>
+          </a:xfrm>
+          <a:prstGeom prst="rect">
+            <a:avLst/>
+          </a:prstGeom>
+          <a:noFill/>
+          <a:ln/>
+        </p:spPr>
+        <p:txBody>
+          <a:bodyPr wrap="square" lIns="0" tIns="0" rIns="0" bIns="0" rtlCol="0" anchor="ctr"/>
+          <a:lstStyle/>
+          <a:p>
+            <a:pPr algn="r" indent="0" marL="0">
+              <a:buNone/>
+            </a:pPr>
+            <a:r>
+              <a:rPr lang="en-US" sz="1000" dirty="0">
+                <a:solidFill>
+                  <a:srgbClr val="7F7F7F"/>
+                </a:solidFill>
+                <a:latin typeface="Malgun Gothic" pitchFamily="34" charset="0"/>
+                <a:ea typeface="Malgun Gothic" pitchFamily="34" charset="-122"/>
+                <a:cs typeface="Malgun Gothic" pitchFamily="34" charset="-120"/>
+              </a:rPr>
+              <a:t>9 / 33</a:t>
+            </a:r>
+            <a:endParaRPr lang="en-US" sz="1000" dirty="0"/>
+          </a:p>
+        </p:txBody>
+      </p:sp>
+      <p:sp>
+        <p:nvSpPr>
+          <p:cNvPr id="19" name="Shape 17"/>
+          <p:cNvSpPr/>
+          <p:nvPr/>
+        </p:nvSpPr>
+        <p:spPr>
+          <a:xfrm>
+            <a:off x="411480" y="1161288"/>
+            <a:ext cx="41148" cy="219456"/>
+          </a:xfrm>
+          <a:prstGeom prst="rect">
+            <a:avLst/>
+          </a:prstGeom>
+          <a:solidFill>
+            <a:srgbClr val="262626"/>
+          </a:solidFill>
+          <a:ln/>
+        </p:spPr>
+      </p:sp>
+      <p:sp>
+        <p:nvSpPr>
+          <p:cNvPr id="20" name="Text 18"/>
+          <p:cNvSpPr/>
+          <p:nvPr/>
+        </p:nvSpPr>
+        <p:spPr>
+          <a:xfrm>
+            <a:off x="521208" y="1133856"/>
+            <a:ext cx="4023360" cy="274320"/>
+          </a:xfrm>
+          <a:prstGeom prst="rect">
+            <a:avLst/>
+          </a:prstGeom>
+          <a:noFill/>
+          <a:ln/>
+        </p:spPr>
+        <p:txBody>
+          <a:bodyPr wrap="square" lIns="0" tIns="0" rIns="0" bIns="0" rtlCol="0" anchor="ctr"/>
+          <a:lstStyle/>
+          <a:p>
+            <a:pPr algn="l" indent="0" marL="0">
+              <a:buNone/>
+            </a:pPr>
+            <a:r>
+              <a:rPr lang="en-US" sz="1250" b="1" dirty="0">
+                <a:solidFill>
+                  <a:srgbClr val="262626"/>
+                </a:solidFill>
+                <a:latin typeface="Malgun Gothic" pitchFamily="34" charset="0"/>
+                <a:ea typeface="Malgun Gothic" pitchFamily="34" charset="-122"/>
+                <a:cs typeface="Malgun Gothic" pitchFamily="34" charset="-120"/>
+              </a:rPr>
+              <a:t>Functional Requirements</a:t>
+            </a:r>
+            <a:endParaRPr lang="en-US" sz="1250" dirty="0"/>
+          </a:p>
+        </p:txBody>
+      </p:sp>
+      <p:sp>
+        <p:nvSpPr>
+          <p:cNvPr id="21" name="Shape 19"/>
+          <p:cNvSpPr/>
+          <p:nvPr/>
+        </p:nvSpPr>
+        <p:spPr>
+          <a:xfrm>
+            <a:off x="411480" y="1517904"/>
+            <a:ext cx="4224528" cy="310896"/>
+          </a:xfrm>
+          <a:prstGeom prst="roundRect">
+            <a:avLst>
+              <a:gd name="adj" fmla="val 14706"/>
+            </a:avLst>
+          </a:prstGeom>
+          <a:solidFill>
+            <a:srgbClr val="1F3864"/>
+          </a:solidFill>
+          <a:ln/>
+        </p:spPr>
+      </p:sp>
+      <p:sp>
+        <p:nvSpPr>
+          <p:cNvPr id="22" name="Text 20"/>
+          <p:cNvSpPr/>
+          <p:nvPr/>
+        </p:nvSpPr>
+        <p:spPr>
+          <a:xfrm>
+            <a:off x="521208" y="1517904"/>
+            <a:ext cx="4023360" cy="310896"/>
+          </a:xfrm>
+          <a:prstGeom prst="rect">
+            <a:avLst/>
+          </a:prstGeom>
+          <a:noFill/>
+          <a:ln/>
+        </p:spPr>
+        <p:txBody>
+          <a:bodyPr wrap="square" lIns="0" tIns="0" rIns="0" bIns="0" rtlCol="0" anchor="ctr"/>
+          <a:lstStyle/>
+          <a:p>
+            <a:pPr algn="l" indent="0" marL="0">
+              <a:buNone/>
+            </a:pPr>
+            <a:r>
+              <a:rPr lang="en-US" sz="950" b="1" dirty="0">
+                <a:solidFill>
+                  <a:srgbClr val="FFFFFF"/>
+                </a:solidFill>
+                <a:latin typeface="Malgun Gothic" pitchFamily="34" charset="0"/>
+                <a:ea typeface="Malgun Gothic" pitchFamily="34" charset="-122"/>
+                <a:cs typeface="Malgun Gothic" pitchFamily="34" charset="-120"/>
+              </a:rPr>
+              <a:t>FR-01 </a:t>
+            </a:r>
+            <a:pPr algn="l" indent="0" marL="0">
+              <a:buNone/>
+            </a:pPr>
+            <a:r>
+              <a:rPr lang="en-US" sz="950" b="1" dirty="0">
+                <a:solidFill>
+                  <a:srgbClr val="FFFFFF"/>
+                </a:solidFill>
+                <a:latin typeface="Malgun Gothic" pitchFamily="34" charset="0"/>
+                <a:ea typeface="Malgun Gothic" pitchFamily="34" charset="-122"/>
+                <a:cs typeface="Malgun Gothic" pitchFamily="34" charset="-120"/>
+              </a:rPr>
+              <a:t>[워크로드 서빙] </a:t>
+            </a:r>
+            <a:pPr algn="l" indent="0" marL="0">
+              <a:buNone/>
+            </a:pPr>
+            <a:r>
+              <a:rPr lang="en-US" sz="950" dirty="0">
+                <a:solidFill>
+                  <a:srgbClr val="FFFFFF"/>
+                </a:solidFill>
+                <a:latin typeface="Malgun Gothic" pitchFamily="34" charset="0"/>
+                <a:ea typeface="Malgun Gothic" pitchFamily="34" charset="-122"/>
+                <a:cs typeface="Malgun Gothic" pitchFamily="34" charset="-120"/>
+              </a:rPr>
+              <a:t>RAG·multiturn·agent E2E 서빙</a:t>
+            </a:r>
+            <a:endParaRPr lang="en-US" sz="950" dirty="0"/>
+          </a:p>
+        </p:txBody>
+      </p:sp>
+      <p:sp>
+        <p:nvSpPr>
+          <p:cNvPr id="23" name="Shape 21"/>
+          <p:cNvSpPr/>
+          <p:nvPr/>
+        </p:nvSpPr>
+        <p:spPr>
+          <a:xfrm>
+            <a:off x="411480" y="1993392"/>
+            <a:ext cx="4224528" cy="310896"/>
+          </a:xfrm>
+          <a:prstGeom prst="roundRect">
+            <a:avLst>
+              <a:gd name="adj" fmla="val 14706"/>
+            </a:avLst>
+          </a:prstGeom>
+          <a:solidFill>
+            <a:srgbClr val="1F3864"/>
+          </a:solidFill>
+          <a:ln/>
+        </p:spPr>
+      </p:sp>
+      <p:sp>
+        <p:nvSpPr>
+          <p:cNvPr id="24" name="Text 22"/>
+          <p:cNvSpPr/>
+          <p:nvPr/>
+        </p:nvSpPr>
+        <p:spPr>
+          <a:xfrm>
+            <a:off x="521208" y="1993392"/>
+            <a:ext cx="4023360" cy="310896"/>
+          </a:xfrm>
+          <a:prstGeom prst="rect">
+            <a:avLst/>
+          </a:prstGeom>
+          <a:noFill/>
+          <a:ln/>
+        </p:spPr>
+        <p:txBody>
+          <a:bodyPr wrap="square" lIns="0" tIns="0" rIns="0" bIns="0" rtlCol="0" anchor="ctr"/>
+          <a:lstStyle/>
+          <a:p>
+            <a:pPr algn="l" indent="0" marL="0">
+              <a:buNone/>
+            </a:pPr>
+            <a:r>
+              <a:rPr lang="en-US" sz="950" b="1" dirty="0">
+                <a:solidFill>
+                  <a:srgbClr val="FFFFFF"/>
+                </a:solidFill>
+                <a:latin typeface="Malgun Gothic" pitchFamily="34" charset="0"/>
+                <a:ea typeface="Malgun Gothic" pitchFamily="34" charset="-122"/>
+                <a:cs typeface="Malgun Gothic" pitchFamily="34" charset="-120"/>
+              </a:rPr>
+              <a:t>FR-02 </a:t>
+            </a:r>
+            <a:pPr algn="l" indent="0" marL="0">
+              <a:buNone/>
+            </a:pPr>
+            <a:r>
+              <a:rPr lang="en-US" sz="950" b="1" dirty="0">
+                <a:solidFill>
+                  <a:srgbClr val="FFFFFF"/>
+                </a:solidFill>
+                <a:latin typeface="Malgun Gothic" pitchFamily="34" charset="0"/>
+                <a:ea typeface="Malgun Gothic" pitchFamily="34" charset="-122"/>
+                <a:cs typeface="Malgun Gothic" pitchFamily="34" charset="-120"/>
+              </a:rPr>
+              <a:t>[KV 재사용] </a:t>
+            </a:r>
+            <a:pPr algn="l" indent="0" marL="0">
+              <a:buNone/>
+            </a:pPr>
+            <a:r>
+              <a:rPr lang="en-US" sz="950" dirty="0">
+                <a:solidFill>
+                  <a:srgbClr val="FFFFFF"/>
+                </a:solidFill>
+                <a:latin typeface="Malgun Gothic" pitchFamily="34" charset="0"/>
+                <a:ea typeface="Malgun Gothic" pitchFamily="34" charset="-122"/>
+                <a:cs typeface="Malgun Gothic" pitchFamily="34" charset="-120"/>
+              </a:rPr>
+              <a:t>prefix+비접두 재사용·영속·복원 판단</a:t>
+            </a:r>
+            <a:endParaRPr lang="en-US" sz="950" dirty="0"/>
+          </a:p>
+        </p:txBody>
+      </p:sp>
+      <p:sp>
+        <p:nvSpPr>
+          <p:cNvPr id="25" name="Shape 23"/>
+          <p:cNvSpPr/>
+          <p:nvPr/>
+        </p:nvSpPr>
+        <p:spPr>
+          <a:xfrm>
+            <a:off x="411480" y="2468880"/>
+            <a:ext cx="4224528" cy="310896"/>
+          </a:xfrm>
+          <a:prstGeom prst="roundRect">
+            <a:avLst>
+              <a:gd name="adj" fmla="val 14706"/>
+            </a:avLst>
+          </a:prstGeom>
+          <a:solidFill>
+            <a:srgbClr val="1F3864"/>
+          </a:solidFill>
+          <a:ln/>
+        </p:spPr>
+      </p:sp>
+      <p:sp>
+        <p:nvSpPr>
+          <p:cNvPr id="26" name="Text 24"/>
+          <p:cNvSpPr/>
+          <p:nvPr/>
+        </p:nvSpPr>
+        <p:spPr>
+          <a:xfrm>
+            <a:off x="521208" y="2468880"/>
+            <a:ext cx="4023360" cy="310896"/>
+          </a:xfrm>
+          <a:prstGeom prst="rect">
+            <a:avLst/>
+          </a:prstGeom>
+          <a:noFill/>
+          <a:ln/>
+        </p:spPr>
+        <p:txBody>
+          <a:bodyPr wrap="square" lIns="0" tIns="0" rIns="0" bIns="0" rtlCol="0" anchor="ctr"/>
+          <a:lstStyle/>
+          <a:p>
+            <a:pPr algn="l" indent="0" marL="0">
+              <a:buNone/>
+            </a:pPr>
+            <a:r>
+              <a:rPr lang="en-US" sz="950" b="1" dirty="0">
+                <a:solidFill>
+                  <a:srgbClr val="FFFFFF"/>
+                </a:solidFill>
+                <a:latin typeface="Malgun Gothic" pitchFamily="34" charset="0"/>
+                <a:ea typeface="Malgun Gothic" pitchFamily="34" charset="-122"/>
+                <a:cs typeface="Malgun Gothic" pitchFamily="34" charset="-120"/>
+              </a:rPr>
+              <a:t>FR-03 </a:t>
+            </a:r>
+            <a:pPr algn="l" indent="0" marL="0">
+              <a:buNone/>
+            </a:pPr>
+            <a:r>
+              <a:rPr lang="en-US" sz="950" b="1" dirty="0">
+                <a:solidFill>
+                  <a:srgbClr val="FFFFFF"/>
+                </a:solidFill>
+                <a:latin typeface="Malgun Gothic" pitchFamily="34" charset="0"/>
+                <a:ea typeface="Malgun Gothic" pitchFamily="34" charset="-122"/>
+                <a:cs typeface="Malgun Gothic" pitchFamily="34" charset="-120"/>
+              </a:rPr>
+              <a:t>[KV 압축(pruning)] </a:t>
+            </a:r>
+            <a:pPr algn="l" indent="0" marL="0">
+              <a:buNone/>
+            </a:pPr>
+            <a:r>
+              <a:rPr lang="en-US" sz="950" dirty="0">
+                <a:solidFill>
+                  <a:srgbClr val="FFFFFF"/>
+                </a:solidFill>
+                <a:latin typeface="Malgun Gothic" pitchFamily="34" charset="0"/>
+                <a:ea typeface="Malgun Gothic" pitchFamily="34" charset="-122"/>
+                <a:cs typeface="Malgun Gothic" pitchFamily="34" charset="-120"/>
+              </a:rPr>
+              <a:t>중요도 기반 pruning·요청별 차등</a:t>
+            </a:r>
+            <a:endParaRPr lang="en-US" sz="950" dirty="0"/>
+          </a:p>
+        </p:txBody>
+      </p:sp>
+      <p:sp>
+        <p:nvSpPr>
+          <p:cNvPr id="27" name="Shape 25"/>
+          <p:cNvSpPr/>
+          <p:nvPr/>
+        </p:nvSpPr>
+        <p:spPr>
+          <a:xfrm>
+            <a:off x="411480" y="2944368"/>
+            <a:ext cx="4224528" cy="310896"/>
+          </a:xfrm>
+          <a:prstGeom prst="roundRect">
+            <a:avLst>
+              <a:gd name="adj" fmla="val 14706"/>
+            </a:avLst>
+          </a:prstGeom>
+          <a:solidFill>
+            <a:srgbClr val="1F3864"/>
+          </a:solidFill>
+          <a:ln/>
+        </p:spPr>
+      </p:sp>
+      <p:sp>
+        <p:nvSpPr>
+          <p:cNvPr id="28" name="Text 26"/>
+          <p:cNvSpPr/>
+          <p:nvPr/>
+        </p:nvSpPr>
+        <p:spPr>
+          <a:xfrm>
+            <a:off x="521208" y="2944368"/>
+            <a:ext cx="4023360" cy="310896"/>
+          </a:xfrm>
+          <a:prstGeom prst="rect">
+            <a:avLst/>
+          </a:prstGeom>
+          <a:noFill/>
+          <a:ln/>
+        </p:spPr>
+        <p:txBody>
+          <a:bodyPr wrap="square" lIns="0" tIns="0" rIns="0" bIns="0" rtlCol="0" anchor="ctr"/>
+          <a:lstStyle/>
+          <a:p>
+            <a:pPr algn="l" indent="0" marL="0">
+              <a:buNone/>
+            </a:pPr>
+            <a:r>
+              <a:rPr lang="en-US" sz="950" b="1" dirty="0">
+                <a:solidFill>
+                  <a:srgbClr val="FFFFFF"/>
+                </a:solidFill>
+                <a:latin typeface="Malgun Gothic" pitchFamily="34" charset="0"/>
+                <a:ea typeface="Malgun Gothic" pitchFamily="34" charset="-122"/>
+                <a:cs typeface="Malgun Gothic" pitchFamily="34" charset="-120"/>
+              </a:rPr>
+              <a:t>FR-04 </a:t>
+            </a:r>
+            <a:pPr algn="l" indent="0" marL="0">
+              <a:buNone/>
+            </a:pPr>
+            <a:r>
+              <a:rPr lang="en-US" sz="950" b="1" dirty="0">
+                <a:solidFill>
+                  <a:srgbClr val="FFFFFF"/>
+                </a:solidFill>
+                <a:latin typeface="Malgun Gothic" pitchFamily="34" charset="0"/>
+                <a:ea typeface="Malgun Gothic" pitchFamily="34" charset="-122"/>
+                <a:cs typeface="Malgun Gothic" pitchFamily="34" charset="-120"/>
+              </a:rPr>
+              <a:t>[KV tier 배치] </a:t>
+            </a:r>
+            <a:pPr algn="l" indent="0" marL="0">
+              <a:buNone/>
+            </a:pPr>
+            <a:r>
+              <a:rPr lang="en-US" sz="950" dirty="0">
+                <a:solidFill>
+                  <a:srgbClr val="FFFFFF"/>
+                </a:solidFill>
+                <a:latin typeface="Malgun Gothic" pitchFamily="34" charset="0"/>
+                <a:ea typeface="Malgun Gothic" pitchFamily="34" charset="-122"/>
+                <a:cs typeface="Malgun Gothic" pitchFamily="34" charset="-120"/>
+              </a:rPr>
+              <a:t>commodity tier 배치·승격/강등</a:t>
+            </a:r>
+            <a:endParaRPr lang="en-US" sz="950" dirty="0"/>
+          </a:p>
+        </p:txBody>
+      </p:sp>
+      <p:sp>
+        <p:nvSpPr>
+          <p:cNvPr id="29" name="Shape 27"/>
+          <p:cNvSpPr/>
+          <p:nvPr/>
+        </p:nvSpPr>
+        <p:spPr>
+          <a:xfrm>
+            <a:off x="411480" y="3419856"/>
+            <a:ext cx="4224528" cy="310896"/>
+          </a:xfrm>
+          <a:prstGeom prst="roundRect">
+            <a:avLst>
+              <a:gd name="adj" fmla="val 14706"/>
+            </a:avLst>
+          </a:prstGeom>
+          <a:solidFill>
+            <a:srgbClr val="1F3864"/>
+          </a:solidFill>
+          <a:ln/>
+        </p:spPr>
+      </p:sp>
+      <p:sp>
+        <p:nvSpPr>
+          <p:cNvPr id="30" name="Text 28"/>
+          <p:cNvSpPr/>
+          <p:nvPr/>
+        </p:nvSpPr>
+        <p:spPr>
+          <a:xfrm>
+            <a:off x="521208" y="3419856"/>
+            <a:ext cx="4023360" cy="310896"/>
+          </a:xfrm>
+          <a:prstGeom prst="rect">
+            <a:avLst/>
+          </a:prstGeom>
+          <a:noFill/>
+          <a:ln/>
+        </p:spPr>
+        <p:txBody>
+          <a:bodyPr wrap="square" lIns="0" tIns="0" rIns="0" bIns="0" rtlCol="0" anchor="ctr"/>
+          <a:lstStyle/>
+          <a:p>
+            <a:pPr algn="l" indent="0" marL="0">
+              <a:buNone/>
+            </a:pPr>
+            <a:r>
+              <a:rPr lang="en-US" sz="950" b="1" dirty="0">
+                <a:solidFill>
+                  <a:srgbClr val="FFFFFF"/>
+                </a:solidFill>
+                <a:latin typeface="Malgun Gothic" pitchFamily="34" charset="0"/>
+                <a:ea typeface="Malgun Gothic" pitchFamily="34" charset="-122"/>
+                <a:cs typeface="Malgun Gothic" pitchFamily="34" charset="-120"/>
+              </a:rPr>
+              <a:t>FR-05 </a:t>
+            </a:r>
+            <a:pPr algn="l" indent="0" marL="0">
+              <a:buNone/>
+            </a:pPr>
+            <a:r>
+              <a:rPr lang="en-US" sz="950" b="1" dirty="0">
+                <a:solidFill>
+                  <a:srgbClr val="FFFFFF"/>
+                </a:solidFill>
+                <a:latin typeface="Malgun Gothic" pitchFamily="34" charset="0"/>
+                <a:ea typeface="Malgun Gothic" pitchFamily="34" charset="-122"/>
+                <a:cs typeface="Malgun Gothic" pitchFamily="34" charset="-120"/>
+              </a:rPr>
+              <a:t>[KV 인지 스케줄링] </a:t>
+            </a:r>
+            <a:pPr algn="l" indent="0" marL="0">
+              <a:buNone/>
+            </a:pPr>
+            <a:r>
+              <a:rPr lang="en-US" sz="950" dirty="0">
+                <a:solidFill>
+                  <a:srgbClr val="FFFFFF"/>
+                </a:solidFill>
+                <a:latin typeface="Malgun Gothic" pitchFamily="34" charset="0"/>
+                <a:ea typeface="Malgun Gothic" pitchFamily="34" charset="-122"/>
+                <a:cs typeface="Malgun Gothic" pitchFamily="34" charset="-120"/>
+              </a:rPr>
+              <a:t>locality 라우팅·KV 공간 확보</a:t>
+            </a:r>
+            <a:endParaRPr lang="en-US" sz="950" dirty="0"/>
+          </a:p>
+        </p:txBody>
+      </p:sp>
+      <p:sp>
+        <p:nvSpPr>
+          <p:cNvPr id="31" name="Shape 29"/>
+          <p:cNvSpPr/>
+          <p:nvPr/>
+        </p:nvSpPr>
+        <p:spPr>
+          <a:xfrm>
+            <a:off x="411480" y="3895344"/>
+            <a:ext cx="4224528" cy="310896"/>
+          </a:xfrm>
+          <a:prstGeom prst="roundRect">
+            <a:avLst>
+              <a:gd name="adj" fmla="val 14706"/>
+            </a:avLst>
+          </a:prstGeom>
+          <a:solidFill>
+            <a:srgbClr val="1F3864"/>
+          </a:solidFill>
+          <a:ln/>
+        </p:spPr>
+      </p:sp>
+      <p:sp>
+        <p:nvSpPr>
+          <p:cNvPr id="32" name="Text 30"/>
+          <p:cNvSpPr/>
+          <p:nvPr/>
+        </p:nvSpPr>
+        <p:spPr>
+          <a:xfrm>
+            <a:off x="521208" y="3895344"/>
+            <a:ext cx="4023360" cy="310896"/>
+          </a:xfrm>
+          <a:prstGeom prst="rect">
+            <a:avLst/>
+          </a:prstGeom>
+          <a:noFill/>
+          <a:ln/>
+        </p:spPr>
+        <p:txBody>
+          <a:bodyPr wrap="square" lIns="0" tIns="0" rIns="0" bIns="0" rtlCol="0" anchor="ctr"/>
+          <a:lstStyle/>
+          <a:p>
+            <a:pPr algn="l" indent="0" marL="0">
+              <a:buNone/>
+            </a:pPr>
+            <a:r>
+              <a:rPr lang="en-US" sz="950" b="1" dirty="0">
+                <a:solidFill>
+                  <a:srgbClr val="FFFFFF"/>
+                </a:solidFill>
+                <a:latin typeface="Malgun Gothic" pitchFamily="34" charset="0"/>
+                <a:ea typeface="Malgun Gothic" pitchFamily="34" charset="-122"/>
+                <a:cs typeface="Malgun Gothic" pitchFamily="34" charset="-120"/>
+              </a:rPr>
+              <a:t>FR-06 </a:t>
+            </a:r>
+            <a:pPr algn="l" indent="0" marL="0">
+              <a:buNone/>
+            </a:pPr>
+            <a:r>
+              <a:rPr lang="en-US" sz="950" b="1" dirty="0">
+                <a:solidFill>
+                  <a:srgbClr val="FFFFFF"/>
+                </a:solidFill>
+                <a:latin typeface="Malgun Gothic" pitchFamily="34" charset="0"/>
+                <a:ea typeface="Malgun Gothic" pitchFamily="34" charset="-122"/>
+                <a:cs typeface="Malgun Gothic" pitchFamily="34" charset="-120"/>
+              </a:rPr>
+              <a:t>[P/D 분리 실행] </a:t>
+            </a:r>
+            <a:pPr algn="l" indent="0" marL="0">
+              <a:buNone/>
+            </a:pPr>
+            <a:r>
+              <a:rPr lang="en-US" sz="950" dirty="0">
+                <a:solidFill>
+                  <a:srgbClr val="FFFFFF"/>
+                </a:solidFill>
+                <a:latin typeface="Malgun Gothic" pitchFamily="34" charset="0"/>
+                <a:ea typeface="Malgun Gothic" pitchFamily="34" charset="-122"/>
+                <a:cs typeface="Malgun Gothic" pitchFamily="34" charset="-120"/>
+              </a:rPr>
+              <a:t>인스턴스 간 KV 전송 포함 실행</a:t>
+            </a:r>
+            <a:endParaRPr lang="en-US" sz="950" dirty="0"/>
+          </a:p>
+        </p:txBody>
+      </p:sp>
+      <p:sp>
+        <p:nvSpPr>
+          <p:cNvPr id="33" name="Shape 31"/>
+          <p:cNvSpPr/>
+          <p:nvPr/>
+        </p:nvSpPr>
+        <p:spPr>
+          <a:xfrm>
+            <a:off x="411480" y="4370832"/>
+            <a:ext cx="4224528" cy="310896"/>
+          </a:xfrm>
+          <a:prstGeom prst="roundRect">
+            <a:avLst>
+              <a:gd name="adj" fmla="val 14706"/>
+            </a:avLst>
+          </a:prstGeom>
+          <a:solidFill>
+            <a:srgbClr val="1F3864"/>
+          </a:solidFill>
+          <a:ln/>
+        </p:spPr>
+      </p:sp>
+      <p:sp>
+        <p:nvSpPr>
+          <p:cNvPr id="34" name="Text 32"/>
+          <p:cNvSpPr/>
+          <p:nvPr/>
+        </p:nvSpPr>
+        <p:spPr>
+          <a:xfrm>
+            <a:off x="521208" y="4370832"/>
+            <a:ext cx="4023360" cy="310896"/>
+          </a:xfrm>
+          <a:prstGeom prst="rect">
+            <a:avLst/>
+          </a:prstGeom>
+          <a:noFill/>
+          <a:ln/>
+        </p:spPr>
+        <p:txBody>
+          <a:bodyPr wrap="square" lIns="0" tIns="0" rIns="0" bIns="0" rtlCol="0" anchor="ctr"/>
+          <a:lstStyle/>
+          <a:p>
+            <a:pPr algn="l" indent="0" marL="0">
+              <a:buNone/>
+            </a:pPr>
+            <a:r>
+              <a:rPr lang="en-US" sz="950" b="1" dirty="0">
+                <a:solidFill>
+                  <a:srgbClr val="FFFFFF"/>
+                </a:solidFill>
+                <a:latin typeface="Malgun Gothic" pitchFamily="34" charset="0"/>
+                <a:ea typeface="Malgun Gothic" pitchFamily="34" charset="-122"/>
+                <a:cs typeface="Malgun Gothic" pitchFamily="34" charset="-120"/>
+              </a:rPr>
+              <a:t>FR-07 </a:t>
+            </a:r>
+            <a:pPr algn="l" indent="0" marL="0">
+              <a:buNone/>
+            </a:pPr>
+            <a:r>
+              <a:rPr lang="en-US" sz="950" b="1" dirty="0">
+                <a:solidFill>
+                  <a:srgbClr val="FFFFFF"/>
+                </a:solidFill>
+                <a:latin typeface="Malgun Gothic" pitchFamily="34" charset="0"/>
+                <a:ea typeface="Malgun Gothic" pitchFamily="34" charset="-122"/>
+                <a:cs typeface="Malgun Gothic" pitchFamily="34" charset="-120"/>
+              </a:rPr>
+              <a:t>[KV telemetry] </a:t>
+            </a:r>
+            <a:pPr algn="l" indent="0" marL="0">
+              <a:buNone/>
+            </a:pPr>
+            <a:r>
+              <a:rPr lang="en-US" sz="950" dirty="0">
+                <a:solidFill>
+                  <a:srgbClr val="FFFFFF"/>
+                </a:solidFill>
+                <a:latin typeface="Malgun Gothic" pitchFamily="34" charset="0"/>
+                <a:ea typeface="Malgun Gothic" pitchFamily="34" charset="-122"/>
+                <a:cs typeface="Malgun Gothic" pitchFamily="34" charset="-120"/>
+              </a:rPr>
+              <a:t>관측 → 정책 피드백·P/D 조정</a:t>
+            </a:r>
+            <a:endParaRPr lang="en-US" sz="950" dirty="0"/>
+          </a:p>
+        </p:txBody>
+      </p:sp>
+      <p:sp>
+        <p:nvSpPr>
+          <p:cNvPr id="35" name="Shape 33"/>
+          <p:cNvSpPr/>
+          <p:nvPr/>
+        </p:nvSpPr>
+        <p:spPr>
+          <a:xfrm>
+            <a:off x="5029200" y="1161288"/>
+            <a:ext cx="41148" cy="219456"/>
+          </a:xfrm>
+          <a:prstGeom prst="rect">
+            <a:avLst/>
+          </a:prstGeom>
+          <a:solidFill>
+            <a:srgbClr val="262626"/>
+          </a:solidFill>
+          <a:ln/>
+        </p:spPr>
+      </p:sp>
+      <p:sp>
+        <p:nvSpPr>
+          <p:cNvPr id="36" name="Text 34"/>
+          <p:cNvSpPr/>
+          <p:nvPr/>
+        </p:nvSpPr>
+        <p:spPr>
+          <a:xfrm>
+            <a:off x="5138928" y="1133856"/>
+            <a:ext cx="4023360" cy="274320"/>
+          </a:xfrm>
+          <a:prstGeom prst="rect">
+            <a:avLst/>
+          </a:prstGeom>
+          <a:noFill/>
+          <a:ln/>
+        </p:spPr>
+        <p:txBody>
+          <a:bodyPr wrap="square" lIns="0" tIns="0" rIns="0" bIns="0" rtlCol="0" anchor="ctr"/>
+          <a:lstStyle/>
+          <a:p>
+            <a:pPr algn="l" indent="0" marL="0">
+              <a:buNone/>
+            </a:pPr>
+            <a:r>
+              <a:rPr lang="en-US" sz="1250" b="1" dirty="0">
+                <a:solidFill>
+                  <a:srgbClr val="262626"/>
+                </a:solidFill>
+                <a:latin typeface="Malgun Gothic" pitchFamily="34" charset="0"/>
+                <a:ea typeface="Malgun Gothic" pitchFamily="34" charset="-122"/>
+                <a:cs typeface="Malgun Gothic" pitchFamily="34" charset="-120"/>
+              </a:rPr>
+              <a:t>Quality Attributes</a:t>
+            </a:r>
+            <a:endParaRPr lang="en-US" sz="1250" dirty="0"/>
+          </a:p>
+        </p:txBody>
+      </p:sp>
+      <p:sp>
+        <p:nvSpPr>
+          <p:cNvPr id="37" name="Shape 35"/>
+          <p:cNvSpPr/>
+          <p:nvPr/>
+        </p:nvSpPr>
+        <p:spPr>
+          <a:xfrm>
+            <a:off x="5029200" y="1517904"/>
+            <a:ext cx="4069080" cy="310896"/>
+          </a:xfrm>
+          <a:prstGeom prst="roundRect">
+            <a:avLst>
+              <a:gd name="adj" fmla="val 14706"/>
+            </a:avLst>
+          </a:prstGeom>
+          <a:solidFill>
+            <a:srgbClr val="4E7C3A"/>
+          </a:solidFill>
+          <a:ln/>
+        </p:spPr>
+      </p:sp>
+      <p:sp>
+        <p:nvSpPr>
+          <p:cNvPr id="38" name="Text 36"/>
+          <p:cNvSpPr/>
+          <p:nvPr/>
+        </p:nvSpPr>
+        <p:spPr>
+          <a:xfrm>
+            <a:off x="5138928" y="1517904"/>
+            <a:ext cx="3867912" cy="310896"/>
+          </a:xfrm>
+          <a:prstGeom prst="rect">
+            <a:avLst/>
+          </a:prstGeom>
+          <a:noFill/>
+          <a:ln/>
+        </p:spPr>
+        <p:txBody>
+          <a:bodyPr wrap="square" lIns="0" tIns="0" rIns="0" bIns="0" rtlCol="0" anchor="ctr"/>
+          <a:lstStyle/>
+          <a:p>
+            <a:pPr algn="l" indent="0" marL="0">
+              <a:buNone/>
+            </a:pPr>
+            <a:r>
+              <a:rPr lang="en-US" sz="950" b="1" dirty="0">
+                <a:solidFill>
+                  <a:srgbClr val="FFFFFF"/>
+                </a:solidFill>
+                <a:latin typeface="Malgun Gothic" pitchFamily="34" charset="0"/>
+                <a:ea typeface="Malgun Gothic" pitchFamily="34" charset="-122"/>
+                <a:cs typeface="Malgun Gothic" pitchFamily="34" charset="-120"/>
+              </a:rPr>
+              <a:t>QA1 </a:t>
+            </a:r>
+            <a:pPr algn="l" indent="0" marL="0">
+              <a:buNone/>
+            </a:pPr>
+            <a:r>
+              <a:rPr lang="en-US" sz="950" b="1" dirty="0">
+                <a:solidFill>
+                  <a:srgbClr val="FFFFFF"/>
+                </a:solidFill>
+                <a:latin typeface="Malgun Gothic" pitchFamily="34" charset="0"/>
+                <a:ea typeface="Malgun Gothic" pitchFamily="34" charset="-122"/>
+                <a:cs typeface="Malgun Gothic" pitchFamily="34" charset="-120"/>
+              </a:rPr>
+              <a:t>[Throughput] </a:t>
+            </a:r>
+            <a:pPr algn="l" indent="0" marL="0">
+              <a:buNone/>
+            </a:pPr>
+            <a:r>
+              <a:rPr lang="en-US" sz="950" dirty="0">
+                <a:solidFill>
+                  <a:srgbClr val="FFFFFF"/>
+                </a:solidFill>
+                <a:latin typeface="Malgun Gothic" pitchFamily="34" charset="0"/>
+                <a:ea typeface="Malgun Gothic" pitchFamily="34" charset="-122"/>
+                <a:cs typeface="Malgun Gothic" pitchFamily="34" charset="-120"/>
+              </a:rPr>
+              <a:t>decode 성능 (≥2×, iso-latency)</a:t>
+            </a:r>
+            <a:endParaRPr lang="en-US" sz="950" dirty="0"/>
+          </a:p>
+        </p:txBody>
+      </p:sp>
+      <p:sp>
+        <p:nvSpPr>
+          <p:cNvPr id="39" name="Shape 37"/>
+          <p:cNvSpPr/>
+          <p:nvPr/>
+        </p:nvSpPr>
+        <p:spPr>
+          <a:xfrm>
+            <a:off x="5029200" y="1993392"/>
+            <a:ext cx="4069080" cy="310896"/>
+          </a:xfrm>
+          <a:prstGeom prst="roundRect">
+            <a:avLst>
+              <a:gd name="adj" fmla="val 14706"/>
+            </a:avLst>
+          </a:prstGeom>
+          <a:solidFill>
+            <a:srgbClr val="4E7C3A"/>
+          </a:solidFill>
+          <a:ln/>
+        </p:spPr>
+      </p:sp>
+      <p:sp>
+        <p:nvSpPr>
+          <p:cNvPr id="40" name="Text 38"/>
+          <p:cNvSpPr/>
+          <p:nvPr/>
+        </p:nvSpPr>
+        <p:spPr>
+          <a:xfrm>
+            <a:off x="5138928" y="1993392"/>
+            <a:ext cx="3867912" cy="310896"/>
+          </a:xfrm>
+          <a:prstGeom prst="rect">
+            <a:avLst/>
+          </a:prstGeom>
+          <a:noFill/>
+          <a:ln/>
+        </p:spPr>
+        <p:txBody>
+          <a:bodyPr wrap="square" lIns="0" tIns="0" rIns="0" bIns="0" rtlCol="0" anchor="ctr"/>
+          <a:lstStyle/>
+          <a:p>
+            <a:pPr algn="l" indent="0" marL="0">
+              <a:buNone/>
+            </a:pPr>
+            <a:r>
+              <a:rPr lang="en-US" sz="950" b="1" dirty="0">
+                <a:solidFill>
+                  <a:srgbClr val="FFFFFF"/>
+                </a:solidFill>
+                <a:latin typeface="Malgun Gothic" pitchFamily="34" charset="0"/>
+                <a:ea typeface="Malgun Gothic" pitchFamily="34" charset="-122"/>
+                <a:cs typeface="Malgun Gothic" pitchFamily="34" charset="-120"/>
+              </a:rPr>
+              <a:t>QA2 </a:t>
+            </a:r>
+            <a:pPr algn="l" indent="0" marL="0">
+              <a:buNone/>
+            </a:pPr>
+            <a:r>
+              <a:rPr lang="en-US" sz="950" b="1" dirty="0">
+                <a:solidFill>
+                  <a:srgbClr val="FFFFFF"/>
+                </a:solidFill>
+                <a:latin typeface="Malgun Gothic" pitchFamily="34" charset="0"/>
+                <a:ea typeface="Malgun Gothic" pitchFamily="34" charset="-122"/>
+                <a:cs typeface="Malgun Gothic" pitchFamily="34" charset="-120"/>
+              </a:rPr>
+              <a:t>[Accuracy] </a:t>
+            </a:r>
+            <a:pPr algn="l" indent="0" marL="0">
+              <a:buNone/>
+            </a:pPr>
+            <a:r>
+              <a:rPr lang="en-US" sz="950" dirty="0">
+                <a:solidFill>
+                  <a:srgbClr val="FFFFFF"/>
+                </a:solidFill>
+                <a:latin typeface="Malgun Gothic" pitchFamily="34" charset="0"/>
+                <a:ea typeface="Malgun Gothic" pitchFamily="34" charset="-122"/>
+                <a:cs typeface="Malgun Gothic" pitchFamily="34" charset="-120"/>
+              </a:rPr>
+              <a:t>품질 저하 bound (gate, ΔF1≤1%p)</a:t>
+            </a:r>
+            <a:endParaRPr lang="en-US" sz="950" dirty="0"/>
+          </a:p>
+        </p:txBody>
+      </p:sp>
+      <p:sp>
+        <p:nvSpPr>
+          <p:cNvPr id="41" name="Shape 39"/>
+          <p:cNvSpPr/>
+          <p:nvPr/>
+        </p:nvSpPr>
+        <p:spPr>
+          <a:xfrm>
+            <a:off x="5029200" y="2468880"/>
+            <a:ext cx="4069080" cy="310896"/>
+          </a:xfrm>
+          <a:prstGeom prst="roundRect">
+            <a:avLst>
+              <a:gd name="adj" fmla="val 14706"/>
+            </a:avLst>
+          </a:prstGeom>
+          <a:solidFill>
+            <a:srgbClr val="4E7C3A"/>
+          </a:solidFill>
+          <a:ln/>
+        </p:spPr>
+      </p:sp>
+      <p:sp>
+        <p:nvSpPr>
+          <p:cNvPr id="42" name="Text 40"/>
+          <p:cNvSpPr/>
+          <p:nvPr/>
+        </p:nvSpPr>
+        <p:spPr>
+          <a:xfrm>
+            <a:off x="5138928" y="2468880"/>
+            <a:ext cx="3867912" cy="310896"/>
+          </a:xfrm>
+          <a:prstGeom prst="rect">
+            <a:avLst/>
+          </a:prstGeom>
+          <a:noFill/>
+          <a:ln/>
+        </p:spPr>
+        <p:txBody>
+          <a:bodyPr wrap="square" lIns="0" tIns="0" rIns="0" bIns="0" rtlCol="0" anchor="ctr"/>
+          <a:lstStyle/>
+          <a:p>
+            <a:pPr algn="l" indent="0" marL="0">
+              <a:buNone/>
+            </a:pPr>
+            <a:r>
+              <a:rPr lang="en-US" sz="950" b="1" dirty="0">
+                <a:solidFill>
+                  <a:srgbClr val="FFFFFF"/>
+                </a:solidFill>
+                <a:latin typeface="Malgun Gothic" pitchFamily="34" charset="0"/>
+                <a:ea typeface="Malgun Gothic" pitchFamily="34" charset="-122"/>
+                <a:cs typeface="Malgun Gothic" pitchFamily="34" charset="-120"/>
+              </a:rPr>
+              <a:t>QA3 </a:t>
+            </a:r>
+            <a:pPr algn="l" indent="0" marL="0">
+              <a:buNone/>
+            </a:pPr>
+            <a:r>
+              <a:rPr lang="en-US" sz="950" b="1" dirty="0">
+                <a:solidFill>
+                  <a:srgbClr val="FFFFFF"/>
+                </a:solidFill>
+                <a:latin typeface="Malgun Gothic" pitchFamily="34" charset="0"/>
+                <a:ea typeface="Malgun Gothic" pitchFamily="34" charset="-122"/>
+                <a:cs typeface="Malgun Gothic" pitchFamily="34" charset="-120"/>
+              </a:rPr>
+              <a:t>[TTFT] </a:t>
+            </a:r>
+            <a:pPr algn="l" indent="0" marL="0">
+              <a:buNone/>
+            </a:pPr>
+            <a:r>
+              <a:rPr lang="en-US" sz="950" dirty="0">
+                <a:solidFill>
+                  <a:srgbClr val="FFFFFF"/>
+                </a:solidFill>
+                <a:latin typeface="Malgun Gothic" pitchFamily="34" charset="0"/>
+                <a:ea typeface="Malgun Gothic" pitchFamily="34" charset="-122"/>
+                <a:cs typeface="Malgun Gothic" pitchFamily="34" charset="-120"/>
+              </a:rPr>
+              <a:t>prefill 성능 (≥2×, 재사용 축)</a:t>
+            </a:r>
+            <a:endParaRPr lang="en-US" sz="950" dirty="0"/>
+          </a:p>
+        </p:txBody>
+      </p:sp>
+      <p:sp>
+        <p:nvSpPr>
+          <p:cNvPr id="43" name="Shape 41"/>
+          <p:cNvSpPr/>
+          <p:nvPr/>
+        </p:nvSpPr>
+        <p:spPr>
+          <a:xfrm>
+            <a:off x="5029200" y="2944368"/>
+            <a:ext cx="4069080" cy="310896"/>
+          </a:xfrm>
+          <a:prstGeom prst="roundRect">
+            <a:avLst>
+              <a:gd name="adj" fmla="val 14706"/>
+            </a:avLst>
+          </a:prstGeom>
+          <a:solidFill>
+            <a:srgbClr val="4E7C3A"/>
+          </a:solidFill>
+          <a:ln/>
+        </p:spPr>
+      </p:sp>
+      <p:sp>
+        <p:nvSpPr>
+          <p:cNvPr id="44" name="Text 42"/>
+          <p:cNvSpPr/>
+          <p:nvPr/>
+        </p:nvSpPr>
+        <p:spPr>
+          <a:xfrm>
+            <a:off x="5138928" y="2944368"/>
+            <a:ext cx="3867912" cy="310896"/>
+          </a:xfrm>
+          <a:prstGeom prst="rect">
+            <a:avLst/>
+          </a:prstGeom>
+          <a:noFill/>
+          <a:ln/>
+        </p:spPr>
+        <p:txBody>
+          <a:bodyPr wrap="square" lIns="0" tIns="0" rIns="0" bIns="0" rtlCol="0" anchor="ctr"/>
+          <a:lstStyle/>
+          <a:p>
+            <a:pPr algn="l" indent="0" marL="0">
+              <a:buNone/>
+            </a:pPr>
+            <a:r>
+              <a:rPr lang="en-US" sz="950" b="1" dirty="0">
+                <a:solidFill>
+                  <a:srgbClr val="FFFFFF"/>
+                </a:solidFill>
+                <a:latin typeface="Malgun Gothic" pitchFamily="34" charset="0"/>
+                <a:ea typeface="Malgun Gothic" pitchFamily="34" charset="-122"/>
+                <a:cs typeface="Malgun Gothic" pitchFamily="34" charset="-120"/>
+              </a:rPr>
+              <a:t>QA4 </a:t>
+            </a:r>
+            <a:pPr algn="l" indent="0" marL="0">
+              <a:buNone/>
+            </a:pPr>
+            <a:r>
+              <a:rPr lang="en-US" sz="950" b="1" dirty="0">
+                <a:solidFill>
+                  <a:srgbClr val="FFFFFF"/>
+                </a:solidFill>
+                <a:latin typeface="Malgun Gothic" pitchFamily="34" charset="0"/>
+                <a:ea typeface="Malgun Gothic" pitchFamily="34" charset="-122"/>
+                <a:cs typeface="Malgun Gothic" pitchFamily="34" charset="-120"/>
+              </a:rPr>
+              <a:t>[Resource Efficiency] </a:t>
+            </a:r>
+            <a:pPr algn="l" indent="0" marL="0">
+              <a:buNone/>
+            </a:pPr>
+            <a:r>
+              <a:rPr lang="en-US" sz="950" dirty="0">
+                <a:solidFill>
+                  <a:srgbClr val="FFFFFF"/>
+                </a:solidFill>
+                <a:latin typeface="Malgun Gothic" pitchFamily="34" charset="0"/>
+                <a:ea typeface="Malgun Gothic" pitchFamily="34" charset="-122"/>
+                <a:cs typeface="Malgun Gothic" pitchFamily="34" charset="-120"/>
+              </a:rPr>
+              <a:t>유효 KV 용량 (≥3×)</a:t>
+            </a:r>
+            <a:endParaRPr lang="en-US" sz="950" dirty="0"/>
+          </a:p>
+        </p:txBody>
+      </p:sp>
+      <p:sp>
+        <p:nvSpPr>
+          <p:cNvPr id="45" name="Shape 43"/>
+          <p:cNvSpPr/>
+          <p:nvPr/>
+        </p:nvSpPr>
+        <p:spPr>
+          <a:xfrm>
+            <a:off x="5029200" y="3419856"/>
+            <a:ext cx="4069080" cy="310896"/>
+          </a:xfrm>
+          <a:prstGeom prst="roundRect">
+            <a:avLst>
+              <a:gd name="adj" fmla="val 14706"/>
+            </a:avLst>
+          </a:prstGeom>
+          <a:solidFill>
+            <a:srgbClr val="4E7C3A"/>
+          </a:solidFill>
+          <a:ln/>
+        </p:spPr>
+      </p:sp>
+      <p:sp>
+        <p:nvSpPr>
+          <p:cNvPr id="46" name="Text 44"/>
+          <p:cNvSpPr/>
+          <p:nvPr/>
+        </p:nvSpPr>
+        <p:spPr>
+          <a:xfrm>
+            <a:off x="5138928" y="3419856"/>
+            <a:ext cx="3867912" cy="310896"/>
+          </a:xfrm>
+          <a:prstGeom prst="rect">
+            <a:avLst/>
+          </a:prstGeom>
+          <a:noFill/>
+          <a:ln/>
+        </p:spPr>
+        <p:txBody>
+          <a:bodyPr wrap="square" lIns="0" tIns="0" rIns="0" bIns="0" rtlCol="0" anchor="ctr"/>
+          <a:lstStyle/>
+          <a:p>
+            <a:pPr algn="l" indent="0" marL="0">
+              <a:buNone/>
+            </a:pPr>
+            <a:r>
+              <a:rPr lang="en-US" sz="950" b="1" dirty="0">
+                <a:solidFill>
+                  <a:srgbClr val="FFFFFF"/>
+                </a:solidFill>
+                <a:latin typeface="Malgun Gothic" pitchFamily="34" charset="0"/>
+                <a:ea typeface="Malgun Gothic" pitchFamily="34" charset="-122"/>
+                <a:cs typeface="Malgun Gothic" pitchFamily="34" charset="-120"/>
+              </a:rPr>
+              <a:t>QA5 </a:t>
+            </a:r>
+            <a:pPr algn="l" indent="0" marL="0">
+              <a:buNone/>
+            </a:pPr>
+            <a:r>
+              <a:rPr lang="en-US" sz="950" b="1" dirty="0">
+                <a:solidFill>
+                  <a:srgbClr val="FFFFFF"/>
+                </a:solidFill>
+                <a:latin typeface="Malgun Gothic" pitchFamily="34" charset="0"/>
+                <a:ea typeface="Malgun Gothic" pitchFamily="34" charset="-122"/>
+                <a:cs typeface="Malgun Gothic" pitchFamily="34" charset="-120"/>
+              </a:rPr>
+              <a:t>[Modifiability] </a:t>
+            </a:r>
+            <a:pPr algn="l" indent="0" marL="0">
+              <a:buNone/>
+            </a:pPr>
+            <a:r>
+              <a:rPr lang="en-US" sz="950" dirty="0">
+                <a:solidFill>
+                  <a:srgbClr val="FFFFFF"/>
+                </a:solidFill>
+                <a:latin typeface="Malgun Gothic" pitchFamily="34" charset="0"/>
+                <a:ea typeface="Malgun Gothic" pitchFamily="34" charset="-122"/>
+                <a:cs typeface="Malgun Gothic" pitchFamily="34" charset="-120"/>
+              </a:rPr>
+              <a:t>확장성·진화성 (2단계 접속점)</a:t>
+            </a:r>
+            <a:endParaRPr lang="en-US" sz="950" dirty="0"/>
+          </a:p>
+        </p:txBody>
+      </p:sp>
+      <p:sp>
+        <p:nvSpPr>
+          <p:cNvPr id="47" name="Shape 45"/>
+          <p:cNvSpPr/>
+          <p:nvPr/>
+        </p:nvSpPr>
+        <p:spPr>
+          <a:xfrm>
+            <a:off x="9189720" y="3639312"/>
+            <a:ext cx="41148" cy="219456"/>
+          </a:xfrm>
+          <a:prstGeom prst="rect">
+            <a:avLst/>
+          </a:prstGeom>
+          <a:solidFill>
+            <a:srgbClr val="262626"/>
+          </a:solidFill>
+          <a:ln/>
+        </p:spPr>
+      </p:sp>
+      <p:sp>
+        <p:nvSpPr>
+          <p:cNvPr id="48" name="Text 46"/>
+          <p:cNvSpPr/>
+          <p:nvPr/>
+        </p:nvSpPr>
+        <p:spPr>
+          <a:xfrm>
+            <a:off x="9299448" y="3611880"/>
+            <a:ext cx="4023360" cy="274320"/>
+          </a:xfrm>
+          <a:prstGeom prst="rect">
+            <a:avLst/>
+          </a:prstGeom>
+          <a:noFill/>
+          <a:ln/>
+        </p:spPr>
+        <p:txBody>
+          <a:bodyPr wrap="square" lIns="0" tIns="0" rIns="0" bIns="0" rtlCol="0" anchor="ctr"/>
+          <a:lstStyle/>
+          <a:p>
+            <a:pPr algn="l" indent="0" marL="0">
+              <a:buNone/>
+            </a:pPr>
+            <a:r>
+              <a:rPr lang="en-US" sz="1250" b="1" dirty="0">
+                <a:solidFill>
+                  <a:srgbClr val="262626"/>
+                </a:solidFill>
+                <a:latin typeface="Malgun Gothic" pitchFamily="34" charset="0"/>
+                <a:ea typeface="Malgun Gothic" pitchFamily="34" charset="-122"/>
+                <a:cs typeface="Malgun Gothic" pitchFamily="34" charset="-120"/>
+              </a:rPr>
+              <a:t>Constraints</a:t>
+            </a:r>
+            <a:endParaRPr lang="en-US" sz="1250" dirty="0"/>
+          </a:p>
+        </p:txBody>
+      </p:sp>
+      <p:sp>
+        <p:nvSpPr>
+          <p:cNvPr id="49" name="Shape 47"/>
+          <p:cNvSpPr/>
+          <p:nvPr/>
+        </p:nvSpPr>
+        <p:spPr>
+          <a:xfrm>
+            <a:off x="9189720" y="3931920"/>
+            <a:ext cx="2587752" cy="310896"/>
+          </a:xfrm>
+          <a:prstGeom prst="roundRect">
+            <a:avLst>
+              <a:gd name="adj" fmla="val 14706"/>
+            </a:avLst>
+          </a:prstGeom>
+          <a:solidFill>
+            <a:srgbClr val="843C0C"/>
+          </a:solidFill>
+          <a:ln/>
+        </p:spPr>
+      </p:sp>
+      <p:sp>
+        <p:nvSpPr>
+          <p:cNvPr id="50" name="Text 48"/>
+          <p:cNvSpPr/>
+          <p:nvPr/>
+        </p:nvSpPr>
+        <p:spPr>
+          <a:xfrm>
+            <a:off x="9299448" y="3931920"/>
+            <a:ext cx="2386584" cy="310896"/>
+          </a:xfrm>
+          <a:prstGeom prst="rect">
+            <a:avLst/>
+          </a:prstGeom>
+          <a:noFill/>
+          <a:ln/>
+        </p:spPr>
+        <p:txBody>
+          <a:bodyPr wrap="square" lIns="0" tIns="0" rIns="0" bIns="0" rtlCol="0" anchor="ctr"/>
+          <a:lstStyle/>
+          <a:p>
+            <a:pPr algn="l" indent="0" marL="0">
+              <a:buNone/>
+            </a:pPr>
+            <a:r>
+              <a:rPr lang="en-US" sz="860" b="1" dirty="0">
+                <a:solidFill>
+                  <a:srgbClr val="FFFFFF"/>
+                </a:solidFill>
+                <a:latin typeface="Malgun Gothic" pitchFamily="34" charset="0"/>
+                <a:ea typeface="Malgun Gothic" pitchFamily="34" charset="-122"/>
+                <a:cs typeface="Malgun Gothic" pitchFamily="34" charset="-120"/>
+              </a:rPr>
+              <a:t>C-01 </a:t>
+            </a:r>
+            <a:pPr algn="l" indent="0" marL="0">
+              <a:buNone/>
+            </a:pPr>
+            <a:r>
+              <a:rPr lang="en-US" sz="860" b="1" dirty="0">
+                <a:solidFill>
+                  <a:srgbClr val="FFFFFF"/>
+                </a:solidFill>
+                <a:latin typeface="Malgun Gothic" pitchFamily="34" charset="0"/>
+                <a:ea typeface="Malgun Gothic" pitchFamily="34" charset="-122"/>
+                <a:cs typeface="Malgun Gothic" pitchFamily="34" charset="-120"/>
+              </a:rPr>
+              <a:t>[디바이스 불변] </a:t>
+            </a:r>
+            <a:pPr algn="l" indent="0" marL="0">
+              <a:buNone/>
+            </a:pPr>
+            <a:r>
+              <a:rPr lang="en-US" sz="860" dirty="0">
+                <a:solidFill>
+                  <a:srgbClr val="FFFFFF"/>
+                </a:solidFill>
+                <a:latin typeface="Malgun Gothic" pitchFamily="34" charset="0"/>
+                <a:ea typeface="Malgun Gothic" pitchFamily="34" charset="-122"/>
+                <a:cs typeface="Malgun Gothic" pitchFamily="34" charset="-120"/>
+              </a:rPr>
+              <a:t>HW 스펙 변경 불가 — 파라미터 취급</a:t>
+            </a:r>
+            <a:endParaRPr lang="en-US" sz="860" dirty="0"/>
+          </a:p>
+        </p:txBody>
+      </p:sp>
+      <p:sp>
+        <p:nvSpPr>
+          <p:cNvPr id="51" name="Shape 49"/>
+          <p:cNvSpPr/>
+          <p:nvPr/>
+        </p:nvSpPr>
+        <p:spPr>
+          <a:xfrm>
+            <a:off x="9189720" y="4407408"/>
+            <a:ext cx="2587752" cy="310896"/>
+          </a:xfrm>
+          <a:prstGeom prst="roundRect">
+            <a:avLst>
+              <a:gd name="adj" fmla="val 14706"/>
+            </a:avLst>
+          </a:prstGeom>
+          <a:solidFill>
+            <a:srgbClr val="843C0C"/>
+          </a:solidFill>
+          <a:ln/>
+        </p:spPr>
+      </p:sp>
+      <p:sp>
+        <p:nvSpPr>
+          <p:cNvPr id="52" name="Text 50"/>
+          <p:cNvSpPr/>
+          <p:nvPr/>
+        </p:nvSpPr>
+        <p:spPr>
+          <a:xfrm>
+            <a:off x="9299448" y="4407408"/>
+            <a:ext cx="2386584" cy="310896"/>
+          </a:xfrm>
+          <a:prstGeom prst="rect">
+            <a:avLst/>
+          </a:prstGeom>
+          <a:noFill/>
+          <a:ln/>
+        </p:spPr>
+        <p:txBody>
+          <a:bodyPr wrap="square" lIns="0" tIns="0" rIns="0" bIns="0" rtlCol="0" anchor="ctr"/>
+          <a:lstStyle/>
+          <a:p>
+            <a:pPr algn="l" indent="0" marL="0">
+              <a:buNone/>
+            </a:pPr>
+            <a:r>
+              <a:rPr lang="en-US" sz="860" b="1" dirty="0">
+                <a:solidFill>
+                  <a:srgbClr val="FFFFFF"/>
+                </a:solidFill>
+                <a:latin typeface="Malgun Gothic" pitchFamily="34" charset="0"/>
+                <a:ea typeface="Malgun Gothic" pitchFamily="34" charset="-122"/>
+                <a:cs typeface="Malgun Gothic" pitchFamily="34" charset="-120"/>
+              </a:rPr>
+              <a:t>C-02 </a:t>
+            </a:r>
+            <a:pPr algn="l" indent="0" marL="0">
+              <a:buNone/>
+            </a:pPr>
+            <a:r>
+              <a:rPr lang="en-US" sz="860" b="1" dirty="0">
+                <a:solidFill>
+                  <a:srgbClr val="FFFFFF"/>
+                </a:solidFill>
+                <a:latin typeface="Malgun Gothic" pitchFamily="34" charset="0"/>
+                <a:ea typeface="Malgun Gothic" pitchFamily="34" charset="-122"/>
+                <a:cs typeface="Malgun Gothic" pitchFamily="34" charset="-120"/>
+              </a:rPr>
+              <a:t>[Transformer 한정] </a:t>
+            </a:r>
+            <a:pPr algn="l" indent="0" marL="0">
+              <a:buNone/>
+            </a:pPr>
+            <a:r>
+              <a:rPr lang="en-US" sz="860" dirty="0">
+                <a:solidFill>
+                  <a:srgbClr val="FFFFFF"/>
+                </a:solidFill>
+                <a:latin typeface="Malgun Gothic" pitchFamily="34" charset="0"/>
+                <a:ea typeface="Malgun Gothic" pitchFamily="34" charset="-122"/>
+                <a:cs typeface="Malgun Gothic" pitchFamily="34" charset="-120"/>
+              </a:rPr>
+              <a:t>KV cache 보유 모델만 대상</a:t>
+            </a:r>
+            <a:endParaRPr lang="en-US" sz="860" dirty="0"/>
+          </a:p>
+        </p:txBody>
+      </p:sp>
+      <p:sp>
+        <p:nvSpPr>
+          <p:cNvPr id="53" name="Shape 51"/>
+          <p:cNvSpPr/>
+          <p:nvPr/>
+        </p:nvSpPr>
+        <p:spPr>
+          <a:xfrm>
+            <a:off x="9189720" y="4882896"/>
+            <a:ext cx="2587752" cy="310896"/>
+          </a:xfrm>
+          <a:prstGeom prst="roundRect">
+            <a:avLst>
+              <a:gd name="adj" fmla="val 14706"/>
+            </a:avLst>
+          </a:prstGeom>
+          <a:solidFill>
+            <a:srgbClr val="843C0C"/>
+          </a:solidFill>
+          <a:ln/>
+        </p:spPr>
+      </p:sp>
+      <p:sp>
+        <p:nvSpPr>
+          <p:cNvPr id="54" name="Text 52"/>
+          <p:cNvSpPr/>
+          <p:nvPr/>
+        </p:nvSpPr>
+        <p:spPr>
+          <a:xfrm>
+            <a:off x="9299448" y="4882896"/>
+            <a:ext cx="2386584" cy="310896"/>
+          </a:xfrm>
+          <a:prstGeom prst="rect">
+            <a:avLst/>
+          </a:prstGeom>
+          <a:noFill/>
+          <a:ln/>
+        </p:spPr>
+        <p:txBody>
+          <a:bodyPr wrap="square" lIns="0" tIns="0" rIns="0" bIns="0" rtlCol="0" anchor="ctr"/>
+          <a:lstStyle/>
+          <a:p>
+            <a:pPr algn="l" indent="0" marL="0">
+              <a:buNone/>
+            </a:pPr>
+            <a:r>
+              <a:rPr lang="en-US" sz="860" b="1" dirty="0">
+                <a:solidFill>
+                  <a:srgbClr val="FFFFFF"/>
+                </a:solidFill>
+                <a:latin typeface="Malgun Gothic" pitchFamily="34" charset="0"/>
+                <a:ea typeface="Malgun Gothic" pitchFamily="34" charset="-122"/>
+                <a:cs typeface="Malgun Gothic" pitchFamily="34" charset="-120"/>
+              </a:rPr>
+              <a:t>C-03 </a:t>
+            </a:r>
+            <a:pPr algn="l" indent="0" marL="0">
+              <a:buNone/>
+            </a:pPr>
+            <a:r>
+              <a:rPr lang="en-US" sz="860" b="1" dirty="0">
+                <a:solidFill>
+                  <a:srgbClr val="FFFFFF"/>
+                </a:solidFill>
+                <a:latin typeface="Malgun Gothic" pitchFamily="34" charset="0"/>
+                <a:ea typeface="Malgun Gothic" pitchFamily="34" charset="-122"/>
+                <a:cs typeface="Malgun Gothic" pitchFamily="34" charset="-120"/>
+              </a:rPr>
+              <a:t>[training-free] </a:t>
+            </a:r>
+            <a:pPr algn="l" indent="0" marL="0">
+              <a:buNone/>
+            </a:pPr>
+            <a:r>
+              <a:rPr lang="en-US" sz="860" dirty="0">
+                <a:solidFill>
+                  <a:srgbClr val="FFFFFF"/>
+                </a:solidFill>
+                <a:latin typeface="Malgun Gothic" pitchFamily="34" charset="0"/>
+                <a:ea typeface="Malgun Gothic" pitchFamily="34" charset="-122"/>
+                <a:cs typeface="Malgun Gothic" pitchFamily="34" charset="-120"/>
+              </a:rPr>
+              <a:t>재학습 없이 정확도 유지</a:t>
+            </a:r>
+            <a:endParaRPr lang="en-US" sz="860" dirty="0"/>
+          </a:p>
+        </p:txBody>
+      </p:sp>
+      <p:sp>
+        <p:nvSpPr>
+          <p:cNvPr id="55" name="Shape 53"/>
+          <p:cNvSpPr/>
+          <p:nvPr/>
+        </p:nvSpPr>
+        <p:spPr>
+          <a:xfrm>
+            <a:off x="6858000" y="3950208"/>
+            <a:ext cx="411480" cy="530352"/>
+          </a:xfrm>
+          <a:prstGeom prst="downArrow">
+            <a:avLst/>
+          </a:prstGeom>
+          <a:solidFill>
+            <a:srgbClr val="4E7C3A"/>
+          </a:solidFill>
+          <a:ln/>
+        </p:spPr>
+      </p:sp>
+      <p:sp>
+        <p:nvSpPr>
+          <p:cNvPr id="56" name="Shape 54"/>
+          <p:cNvSpPr/>
+          <p:nvPr/>
+        </p:nvSpPr>
+        <p:spPr>
+          <a:xfrm>
+            <a:off x="4754880" y="4773168"/>
+            <a:ext cx="1097280" cy="420624"/>
+          </a:xfrm>
+          <a:prstGeom prst="rightArrow">
+            <a:avLst/>
+          </a:prstGeom>
+          <a:solidFill>
+            <a:srgbClr val="1F3864"/>
+          </a:solidFill>
+          <a:ln/>
+        </p:spPr>
+      </p:sp>
+      <p:sp>
+        <p:nvSpPr>
+          <p:cNvPr id="57" name="Shape 55"/>
+          <p:cNvSpPr/>
+          <p:nvPr/>
+        </p:nvSpPr>
+        <p:spPr>
+          <a:xfrm>
+            <a:off x="8275320" y="4773168"/>
+            <a:ext cx="841248" cy="420624"/>
+          </a:xfrm>
+          <a:prstGeom prst="leftArrow">
+            <a:avLst/>
+          </a:prstGeom>
+          <a:solidFill>
+            <a:srgbClr val="843C0C"/>
+          </a:solidFill>
+          <a:ln/>
+        </p:spPr>
+      </p:sp>
+      <p:sp>
+        <p:nvSpPr>
+          <p:cNvPr id="58" name="Shape 56"/>
+          <p:cNvSpPr/>
+          <p:nvPr/>
+        </p:nvSpPr>
+        <p:spPr>
+          <a:xfrm>
+            <a:off x="5943600" y="4526280"/>
+            <a:ext cx="2240280" cy="914400"/>
+          </a:xfrm>
+          <a:prstGeom prst="ellipse">
+            <a:avLst/>
+          </a:prstGeom>
+          <a:solidFill>
+            <a:srgbClr val="FFC000"/>
+          </a:solidFill>
+          <a:ln w="12700">
+            <a:solidFill>
+              <a:srgbClr val="BF9000"/>
+            </a:solidFill>
+            <a:prstDash val="solid"/>
+          </a:ln>
+        </p:spPr>
+      </p:sp>
+      <p:sp>
+        <p:nvSpPr>
+          <p:cNvPr id="59" name="Text 57"/>
+          <p:cNvSpPr/>
+          <p:nvPr/>
+        </p:nvSpPr>
+        <p:spPr>
+          <a:xfrm>
+            <a:off x="5943600" y="4526280"/>
+            <a:ext cx="2240280" cy="914400"/>
+          </a:xfrm>
+          <a:prstGeom prst="rect">
+            <a:avLst/>
+          </a:prstGeom>
+          <a:noFill/>
+          <a:ln/>
+        </p:spPr>
+        <p:txBody>
+          <a:bodyPr wrap="square" lIns="0" tIns="0" rIns="0" bIns="0" rtlCol="0" anchor="ctr"/>
+          <a:lstStyle/>
+          <a:p>
+            <a:pPr algn="ctr" indent="0" marL="0">
+              <a:buNone/>
+            </a:pPr>
+            <a:r>
+              <a:rPr lang="en-US" sz="1300" b="1" dirty="0">
+                <a:solidFill>
+                  <a:srgbClr val="1F3864"/>
+                </a:solidFill>
+                <a:latin typeface="Malgun Gothic" pitchFamily="34" charset="0"/>
+                <a:ea typeface="Malgun Gothic" pitchFamily="34" charset="-122"/>
+                <a:cs typeface="Malgun Gothic" pitchFamily="34" charset="-120"/>
+              </a:rPr>
+              <a:t>Architectural Drivers</a:t>
+            </a:r>
+            <a:endParaRPr lang="en-US" sz="1300" dirty="0"/>
+          </a:p>
+          <a:p>
+            <a:pPr algn="ctr" indent="0" marL="0">
+              <a:buNone/>
+            </a:pPr>
+            <a:r>
+              <a:rPr lang="en-US" sz="800" dirty="0">
+                <a:solidFill>
+                  <a:srgbClr val="1F3864"/>
+                </a:solidFill>
+                <a:latin typeface="Malgun Gothic" pitchFamily="34" charset="0"/>
+                <a:ea typeface="Malgun Gothic" pitchFamily="34" charset="-122"/>
+                <a:cs typeface="Malgun Gothic" pitchFamily="34" charset="-120"/>
+              </a:rPr>
+              <a:t>FR 7 · QA 5 · C 3 = 15종</a:t>
+            </a:r>
+            <a:endParaRPr lang="en-US" sz="1300" dirty="0"/>
+          </a:p>
+        </p:txBody>
+      </p:sp>
+      <p:sp>
+        <p:nvSpPr>
+          <p:cNvPr id="60" name="Shape 58"/>
+          <p:cNvSpPr/>
+          <p:nvPr/>
+        </p:nvSpPr>
+        <p:spPr>
+          <a:xfrm>
+            <a:off x="6693408" y="5559552"/>
+            <a:ext cx="731520" cy="502920"/>
+          </a:xfrm>
+          <a:prstGeom prst="downArrow">
+            <a:avLst/>
+          </a:prstGeom>
+          <a:solidFill>
+            <a:srgbClr val="A9C08C"/>
+          </a:solidFill>
+          <a:ln/>
+        </p:spPr>
+      </p:sp>
+      <p:sp>
+        <p:nvSpPr>
+          <p:cNvPr id="61" name="Text 59"/>
+          <p:cNvSpPr/>
+          <p:nvPr/>
+        </p:nvSpPr>
+        <p:spPr>
+          <a:xfrm>
+            <a:off x="2468880" y="6089904"/>
+            <a:ext cx="9144000" cy="347472"/>
+          </a:xfrm>
+          <a:prstGeom prst="rect">
+            <a:avLst/>
+          </a:prstGeom>
+          <a:noFill/>
+          <a:ln/>
+        </p:spPr>
+        <p:txBody>
+          <a:bodyPr wrap="square" lIns="0" tIns="0" rIns="0" bIns="0" rtlCol="0" anchor="ctr"/>
+          <a:lstStyle/>
+          <a:p>
+            <a:pPr algn="ctr" indent="0" marL="0">
+              <a:buNone/>
+            </a:pPr>
+            <a:r>
+              <a:rPr lang="en-US" sz="1600" b="1" dirty="0">
+                <a:solidFill>
+                  <a:srgbClr val="262626"/>
+                </a:solidFill>
+                <a:latin typeface="Malgun Gothic" pitchFamily="34" charset="0"/>
+                <a:ea typeface="Malgun Gothic" pitchFamily="34" charset="-122"/>
+                <a:cs typeface="Malgun Gothic" pitchFamily="34" charset="-120"/>
+              </a:rPr>
+              <a:t>“MCR 1단계 — KV 캐시 최적 운용 AI 런타임”</a:t>
+            </a:r>
+            <a:endParaRPr lang="en-US" sz="1600" dirty="0"/>
+          </a:p>
+        </p:txBody>
+      </p:sp>
+      <p:sp>
+        <p:nvSpPr>
+          <p:cNvPr id="62" name="Text 60"/>
+          <p:cNvSpPr/>
+          <p:nvPr/>
+        </p:nvSpPr>
+        <p:spPr>
+          <a:xfrm>
+            <a:off x="411480" y="6428232"/>
+            <a:ext cx="11338560" cy="274320"/>
+          </a:xfrm>
+          <a:prstGeom prst="rect">
+            <a:avLst/>
+          </a:prstGeom>
+          <a:noFill/>
+          <a:ln/>
+        </p:spPr>
+        <p:txBody>
+          <a:bodyPr wrap="square" lIns="0" tIns="0" rIns="0" bIns="0" rtlCol="0" anchor="ctr"/>
+          <a:lstStyle/>
+          <a:p>
+            <a:pPr algn="l" indent="0" marL="0">
+              <a:buNone/>
+            </a:pPr>
+            <a:r>
+              <a:rPr lang="en-US" sz="800" dirty="0">
+                <a:solidFill>
+                  <a:srgbClr val="404040"/>
+                </a:solidFill>
+                <a:latin typeface="Malgun Gothic" pitchFamily="34" charset="0"/>
+                <a:ea typeface="Malgun Gothic" pitchFamily="34" charset="-122"/>
+                <a:cs typeface="Malgun Gothic" pitchFamily="34" charset="-120"/>
+              </a:rPr>
+              <a:t>전 driver가 DP1–DP5 또는 확정 컴포넌트에 매핑 ✓ (2단계 이관 driver[근접연산·디바이스 plug-in]는 DP6–DP8·ADR-001로 보존)</a:t>
+            </a:r>
+            <a:endParaRPr lang="en-US" sz="800" dirty="0"/>
+          </a:p>
+        </p:txBody>
+      </p:sp>
+    </p:spTree>
+  </p:cSld>
+  <p:clrMapOvr>
+    <a:masterClrMapping/>
+  </p:clrMapOvr>
+</p:sld>
+</file>
+
+<file path=ppt/slides/slide6.xml><?xml version="1.0" encoding="utf-8"?>
+<p:sld xmlns:a="http://schemas.openxmlformats.org/drawingml/2006/main" xmlns:r="http://schemas.openxmlformats.org/officeDocument/2006/relationships" xmlns:p="http://schemas.openxmlformats.org/presentationml/2006/main">
+  <p:cSld name="Slide 6">
+    <p:spTree>
+      <p:nvGrpSpPr>
+        <p:cNvPr id="1" name=""/>
+        <p:cNvGrpSpPr/>
+        <p:nvPr/>
+      </p:nvGrpSpPr>
+      <p:grpSpPr>
+        <a:xfrm>
+          <a:off x="0" y="0"/>
+          <a:ext cx="0" cy="0"/>
+          <a:chOff x="0" y="0"/>
+          <a:chExt cx="0" cy="0"/>
+        </a:xfrm>
+      </p:grpSpPr>
+      <p:sp>
+        <p:nvSpPr>
+          <p:cNvPr id="2" name="Shape 0"/>
+          <p:cNvSpPr/>
+          <p:nvPr/>
+        </p:nvSpPr>
+        <p:spPr>
+          <a:xfrm>
+            <a:off x="0" y="0"/>
+            <a:ext cx="12191695" cy="914400"/>
+          </a:xfrm>
+          <a:prstGeom prst="rect">
+            <a:avLst/>
+          </a:prstGeom>
+          <a:solidFill>
+            <a:srgbClr val="1F3864"/>
+          </a:solidFill>
+          <a:ln/>
+        </p:spPr>
+      </p:sp>
+      <p:sp>
+        <p:nvSpPr>
+          <p:cNvPr id="3" name="Text 1"/>
+          <p:cNvSpPr/>
+          <p:nvPr/>
+        </p:nvSpPr>
+        <p:spPr>
+          <a:xfrm>
+            <a:off x="320040" y="109728"/>
+            <a:ext cx="6675120" cy="694944"/>
+          </a:xfrm>
+          <a:prstGeom prst="rect">
+            <a:avLst/>
+          </a:prstGeom>
+          <a:noFill/>
+          <a:ln/>
+        </p:spPr>
+        <p:txBody>
+          <a:bodyPr wrap="square" lIns="0" tIns="0" rIns="0" bIns="0" rtlCol="0" anchor="ctr">
+            <a:normAutofit/>
+          </a:bodyPr>
+          <a:lstStyle/>
+          <a:p>
+            <a:pPr algn="l" indent="0" marL="0">
+              <a:buNone/>
+            </a:pPr>
+            <a:r>
+              <a:rPr lang="en-US" sz="3000" b="1" dirty="0">
+                <a:solidFill>
+                  <a:srgbClr val="FFFFFF"/>
+                </a:solidFill>
+                <a:latin typeface="Malgun Gothic" pitchFamily="34" charset="0"/>
+                <a:ea typeface="Malgun Gothic" pitchFamily="34" charset="-122"/>
+                <a:cs typeface="Malgun Gothic" pitchFamily="34" charset="-120"/>
+              </a:rPr>
               <a:t>부록 A. 수집 원시 요구사항 (VOC)</a:t>
             </a:r>
             <a:endParaRPr lang="en-US" sz="3000" dirty="0"/>
@@ -21221,7 +25149,7 @@
       </p:sp>
       <p:graphicFrame>
         <p:nvGraphicFramePr>
-          <p:cNvPr id="6" name="Table 0"/>
+          <p:cNvPr id="7" name="Table 0"/>
           <p:cNvGraphicFramePr>
             <a:graphicFrameLocks noGrp="1"/>
           </p:cNvGraphicFramePr>
@@ -24815,7 +28743,7 @@
       </p:graphicFrame>
       <p:graphicFrame>
         <p:nvGraphicFramePr>
-          <p:cNvPr id="11" name="Table 1"/>
+          <p:cNvPr id="13" name="Table 1"/>
           <p:cNvGraphicFramePr>
             <a:graphicFrameLocks noGrp="1"/>
           </p:cNvGraphicFramePr>
@@ -28468,9 +32396,9 @@
 </p:sld>
 </file>
 
-<file path=ppt/slides/slide6.xml><?xml version="1.0" encoding="utf-8"?>
+<file path=ppt/slides/slide7.xml><?xml version="1.0" encoding="utf-8"?>
 <p:sld xmlns:a="http://schemas.openxmlformats.org/drawingml/2006/main" xmlns:r="http://schemas.openxmlformats.org/officeDocument/2006/relationships" xmlns:p="http://schemas.openxmlformats.org/presentationml/2006/main">
-  <p:cSld name="Slide 6">
+  <p:cSld name="Slide 7">
     <p:spTree>
       <p:nvGrpSpPr>
         <p:cNvPr id="1" name=""/>
@@ -29113,7 +33041,7 @@
       </p:sp>
       <p:graphicFrame>
         <p:nvGraphicFramePr>
-          <p:cNvPr id="7" name="Table 0"/>
+          <p:cNvPr id="8" name="Table 0"/>
           <p:cNvGraphicFramePr>
             <a:graphicFrameLocks noGrp="1"/>
           </p:cNvGraphicFramePr>
@@ -29796,7 +33724,7 @@
       </p:sp>
       <p:graphicFrame>
         <p:nvGraphicFramePr>
-          <p:cNvPr id="13" name="Table 1"/>
+          <p:cNvPr id="15" name="Table 1"/>
           <p:cNvGraphicFramePr>
             <a:graphicFrameLocks noGrp="1"/>
           </p:cNvGraphicFramePr>
@@ -30458,7 +34386,7 @@
       </p:sp>
       <p:graphicFrame>
         <p:nvGraphicFramePr>
-          <p:cNvPr id="19" name="Table 2"/>
+          <p:cNvPr id="22" name="Table 2"/>
           <p:cNvGraphicFramePr>
             <a:graphicFrameLocks noGrp="1"/>
           </p:cNvGraphicFramePr>
@@ -32588,9 +36516,9 @@
 </p:sld>
 </file>
 
-<file path=ppt/slides/slide7.xml><?xml version="1.0" encoding="utf-8"?>
+<file path=ppt/slides/slide8.xml><?xml version="1.0" encoding="utf-8"?>
 <p:sld xmlns:a="http://schemas.openxmlformats.org/drawingml/2006/main" xmlns:r="http://schemas.openxmlformats.org/officeDocument/2006/relationships" xmlns:p="http://schemas.openxmlformats.org/presentationml/2006/main">
-  <p:cSld name="Slide 7">
+  <p:cSld name="Slide 8">
     <p:spTree>
       <p:nvGrpSpPr>
         <p:cNvPr id="1" name=""/>
@@ -33440,7 +37368,7 @@
       </p:sp>
       <p:graphicFrame>
         <p:nvGraphicFramePr>
-          <p:cNvPr id="8" name="Table 0"/>
+          <p:cNvPr id="9" name="Table 0"/>
           <p:cNvGraphicFramePr>
             <a:graphicFrameLocks noGrp="1"/>
           </p:cNvGraphicFramePr>
@@ -34172,9 +38100,9 @@
 </p:sld>
 </file>
 
-<file path=ppt/slides/slide8.xml><?xml version="1.0" encoding="utf-8"?>
+<file path=ppt/slides/slide9.xml><?xml version="1.0" encoding="utf-8"?>
 <p:sld xmlns:a="http://schemas.openxmlformats.org/drawingml/2006/main" xmlns:r="http://schemas.openxmlformats.org/officeDocument/2006/relationships" xmlns:p="http://schemas.openxmlformats.org/presentationml/2006/main">
-  <p:cSld name="Slide 8">
+  <p:cSld name="Slide 9">
     <p:spTree>
       <p:nvGrpSpPr>
         <p:cNvPr id="1" name=""/>
@@ -35003,7 +38931,7 @@
       </p:sp>
       <p:graphicFrame>
         <p:nvGraphicFramePr>
-          <p:cNvPr id="9" name="Table 0"/>
+          <p:cNvPr id="10" name="Table 0"/>
           <p:cNvGraphicFramePr>
             <a:graphicFrameLocks noGrp="1"/>
           </p:cNvGraphicFramePr>
@@ -35743,1569 +39671,6 @@
                 <a:cs typeface="Malgun Gothic" pitchFamily="34" charset="-120"/>
               </a:rPr>
               <a:t>요청별 집행 조건: 토큰 중요도는 쿼리 의존(SnapKV B)인데 재사용 KV는 미래 쿼리용 영속 — pruning×재사용 충돌(등재 쟁점)로 요청별 차등 집행 가능 여부가 bound 보장성을 가름 (C)</a:t>
-            </a:r>
-            <a:endParaRPr lang="en-US" sz="880" dirty="0"/>
-          </a:p>
-        </p:txBody>
-      </p:sp>
-    </p:spTree>
-  </p:cSld>
-  <p:clrMapOvr>
-    <a:masterClrMapping/>
-  </p:clrMapOvr>
-</p:sld>
-</file>
-
-<file path=ppt/slides/slide9.xml><?xml version="1.0" encoding="utf-8"?>
-<p:sld xmlns:a="http://schemas.openxmlformats.org/drawingml/2006/main" xmlns:r="http://schemas.openxmlformats.org/officeDocument/2006/relationships" xmlns:p="http://schemas.openxmlformats.org/presentationml/2006/main">
-  <p:cSld name="Slide 9">
-    <p:spTree>
-      <p:nvGrpSpPr>
-        <p:cNvPr id="1" name=""/>
-        <p:cNvGrpSpPr/>
-        <p:nvPr/>
-      </p:nvGrpSpPr>
-      <p:grpSpPr>
-        <a:xfrm>
-          <a:off x="0" y="0"/>
-          <a:ext cx="0" cy="0"/>
-          <a:chOff x="0" y="0"/>
-          <a:chExt cx="0" cy="0"/>
-        </a:xfrm>
-      </p:grpSpPr>
-      <p:sp>
-        <p:nvSpPr>
-          <p:cNvPr id="2" name="Shape 0"/>
-          <p:cNvSpPr/>
-          <p:nvPr/>
-        </p:nvSpPr>
-        <p:spPr>
-          <a:xfrm>
-            <a:off x="0" y="0"/>
-            <a:ext cx="12191695" cy="914400"/>
-          </a:xfrm>
-          <a:prstGeom prst="rect">
-            <a:avLst/>
-          </a:prstGeom>
-          <a:solidFill>
-            <a:srgbClr val="1F3864"/>
-          </a:solidFill>
-          <a:ln/>
-        </p:spPr>
-      </p:sp>
-      <p:sp>
-        <p:nvSpPr>
-          <p:cNvPr id="3" name="Text 1"/>
-          <p:cNvSpPr/>
-          <p:nvPr/>
-        </p:nvSpPr>
-        <p:spPr>
-          <a:xfrm>
-            <a:off x="320040" y="109728"/>
-            <a:ext cx="6675120" cy="694944"/>
-          </a:xfrm>
-          <a:prstGeom prst="rect">
-            <a:avLst/>
-          </a:prstGeom>
-          <a:noFill/>
-          <a:ln/>
-        </p:spPr>
-        <p:txBody>
-          <a:bodyPr wrap="square" lIns="0" tIns="0" rIns="0" bIns="0" rtlCol="0" anchor="ctr">
-            <a:normAutofit/>
-          </a:bodyPr>
-          <a:lstStyle/>
-          <a:p>
-            <a:pPr algn="l" indent="0" marL="0">
-              <a:buNone/>
-            </a:pPr>
-            <a:r>
-              <a:rPr lang="en-US" sz="3000" b="1" dirty="0">
-                <a:solidFill>
-                  <a:srgbClr val="FFFFFF"/>
-                </a:solidFill>
-                <a:latin typeface="Malgun Gothic" pitchFamily="34" charset="0"/>
-                <a:ea typeface="Malgun Gothic" pitchFamily="34" charset="-122"/>
-                <a:cs typeface="Malgun Gothic" pitchFamily="34" charset="-120"/>
-              </a:rPr>
-              <a:t>부록 C-3. QA3 TTFT (prefill 성능)</a:t>
-            </a:r>
-            <a:endParaRPr lang="en-US" sz="3000" dirty="0"/>
-          </a:p>
-        </p:txBody>
-      </p:sp>
-      <p:sp>
-        <p:nvSpPr>
-          <p:cNvPr id="4" name="Shape 2"/>
-          <p:cNvSpPr/>
-          <p:nvPr/>
-        </p:nvSpPr>
-        <p:spPr>
-          <a:xfrm>
-            <a:off x="7208215" y="320040"/>
-            <a:ext cx="786384" cy="274320"/>
-          </a:xfrm>
-          <a:prstGeom prst="rect">
-            <a:avLst/>
-          </a:prstGeom>
-          <a:solidFill>
-            <a:srgbClr val="E9E9E9"/>
-          </a:solidFill>
-          <a:ln w="9525">
-            <a:solidFill>
-              <a:srgbClr val="A6A6A6"/>
-            </a:solidFill>
-            <a:prstDash val="solid"/>
-          </a:ln>
-        </p:spPr>
-      </p:sp>
-      <p:sp>
-        <p:nvSpPr>
-          <p:cNvPr id="5" name="Text 3"/>
-          <p:cNvSpPr/>
-          <p:nvPr/>
-        </p:nvSpPr>
-        <p:spPr>
-          <a:xfrm>
-            <a:off x="7208215" y="320040"/>
-            <a:ext cx="786384" cy="274320"/>
-          </a:xfrm>
-          <a:prstGeom prst="rect">
-            <a:avLst/>
-          </a:prstGeom>
-          <a:noFill/>
-          <a:ln/>
-        </p:spPr>
-        <p:txBody>
-          <a:bodyPr wrap="square" lIns="0" tIns="0" rIns="0" bIns="0" rtlCol="0" anchor="ctr"/>
-          <a:lstStyle/>
-          <a:p>
-            <a:pPr algn="ctr" indent="0" marL="0">
-              <a:buNone/>
-            </a:pPr>
-            <a:r>
-              <a:rPr lang="en-US" sz="900" dirty="0">
-                <a:solidFill>
-                  <a:srgbClr val="595959"/>
-                </a:solidFill>
-                <a:latin typeface="Malgun Gothic" pitchFamily="34" charset="0"/>
-                <a:ea typeface="Malgun Gothic" pitchFamily="34" charset="-122"/>
-                <a:cs typeface="Malgun Gothic" pitchFamily="34" charset="-120"/>
-              </a:rPr>
-              <a:t>과제 개요</a:t>
-            </a:r>
-            <a:endParaRPr lang="en-US" sz="900" dirty="0"/>
-          </a:p>
-        </p:txBody>
-      </p:sp>
-      <p:sp>
-        <p:nvSpPr>
-          <p:cNvPr id="6" name="Shape 4"/>
-          <p:cNvSpPr/>
-          <p:nvPr/>
-        </p:nvSpPr>
-        <p:spPr>
-          <a:xfrm>
-            <a:off x="8008315" y="338328"/>
-            <a:ext cx="155448" cy="237744"/>
-          </a:xfrm>
-          <a:prstGeom prst="chevron">
-            <a:avLst/>
-          </a:prstGeom>
-          <a:solidFill>
-            <a:srgbClr val="9AA0A6"/>
-          </a:solidFill>
-          <a:ln/>
-        </p:spPr>
-      </p:sp>
-      <p:sp>
-        <p:nvSpPr>
-          <p:cNvPr id="7" name="Shape 5"/>
-          <p:cNvSpPr/>
-          <p:nvPr/>
-        </p:nvSpPr>
-        <p:spPr>
-          <a:xfrm>
-            <a:off x="8177479" y="320040"/>
-            <a:ext cx="786384" cy="274320"/>
-          </a:xfrm>
-          <a:prstGeom prst="rect">
-            <a:avLst/>
-          </a:prstGeom>
-          <a:solidFill>
-            <a:srgbClr val="FFC000"/>
-          </a:solidFill>
-          <a:ln w="9525">
-            <a:solidFill>
-              <a:srgbClr val="FFC000"/>
-            </a:solidFill>
-            <a:prstDash val="solid"/>
-          </a:ln>
-        </p:spPr>
-      </p:sp>
-      <p:sp>
-        <p:nvSpPr>
-          <p:cNvPr id="8" name="Text 6"/>
-          <p:cNvSpPr/>
-          <p:nvPr/>
-        </p:nvSpPr>
-        <p:spPr>
-          <a:xfrm>
-            <a:off x="8177479" y="320040"/>
-            <a:ext cx="786384" cy="274320"/>
-          </a:xfrm>
-          <a:prstGeom prst="rect">
-            <a:avLst/>
-          </a:prstGeom>
-          <a:noFill/>
-          <a:ln/>
-        </p:spPr>
-        <p:txBody>
-          <a:bodyPr wrap="square" lIns="0" tIns="0" rIns="0" bIns="0" rtlCol="0" anchor="ctr"/>
-          <a:lstStyle/>
-          <a:p>
-            <a:pPr algn="ctr" indent="0" marL="0">
-              <a:buNone/>
-            </a:pPr>
-            <a:r>
-              <a:rPr lang="en-US" sz="900" b="1" dirty="0">
-                <a:solidFill>
-                  <a:srgbClr val="1F3864"/>
-                </a:solidFill>
-                <a:latin typeface="Malgun Gothic" pitchFamily="34" charset="0"/>
-                <a:ea typeface="Malgun Gothic" pitchFamily="34" charset="-122"/>
-                <a:cs typeface="Malgun Gothic" pitchFamily="34" charset="-120"/>
-              </a:rPr>
-              <a:t>요구사항</a:t>
-            </a:r>
-            <a:endParaRPr lang="en-US" sz="900" dirty="0"/>
-          </a:p>
-        </p:txBody>
-      </p:sp>
-      <p:sp>
-        <p:nvSpPr>
-          <p:cNvPr id="9" name="Shape 7"/>
-          <p:cNvSpPr/>
-          <p:nvPr/>
-        </p:nvSpPr>
-        <p:spPr>
-          <a:xfrm>
-            <a:off x="8977579" y="338328"/>
-            <a:ext cx="155448" cy="237744"/>
-          </a:xfrm>
-          <a:prstGeom prst="chevron">
-            <a:avLst/>
-          </a:prstGeom>
-          <a:solidFill>
-            <a:srgbClr val="9AA0A6"/>
-          </a:solidFill>
-          <a:ln/>
-        </p:spPr>
-      </p:sp>
-      <p:sp>
-        <p:nvSpPr>
-          <p:cNvPr id="10" name="Shape 8"/>
-          <p:cNvSpPr/>
-          <p:nvPr/>
-        </p:nvSpPr>
-        <p:spPr>
-          <a:xfrm>
-            <a:off x="9146743" y="320040"/>
-            <a:ext cx="786384" cy="274320"/>
-          </a:xfrm>
-          <a:prstGeom prst="rect">
-            <a:avLst/>
-          </a:prstGeom>
-          <a:solidFill>
-            <a:srgbClr val="E9E9E9"/>
-          </a:solidFill>
-          <a:ln w="9525">
-            <a:solidFill>
-              <a:srgbClr val="A6A6A6"/>
-            </a:solidFill>
-            <a:prstDash val="solid"/>
-          </a:ln>
-        </p:spPr>
-      </p:sp>
-      <p:sp>
-        <p:nvSpPr>
-          <p:cNvPr id="11" name="Text 9"/>
-          <p:cNvSpPr/>
-          <p:nvPr/>
-        </p:nvSpPr>
-        <p:spPr>
-          <a:xfrm>
-            <a:off x="9146743" y="320040"/>
-            <a:ext cx="786384" cy="274320"/>
-          </a:xfrm>
-          <a:prstGeom prst="rect">
-            <a:avLst/>
-          </a:prstGeom>
-          <a:noFill/>
-          <a:ln/>
-        </p:spPr>
-        <p:txBody>
-          <a:bodyPr wrap="square" lIns="0" tIns="0" rIns="0" bIns="0" rtlCol="0" anchor="ctr"/>
-          <a:lstStyle/>
-          <a:p>
-            <a:pPr algn="ctr" indent="0" marL="0">
-              <a:buNone/>
-            </a:pPr>
-            <a:r>
-              <a:rPr lang="en-US" sz="900" dirty="0">
-                <a:solidFill>
-                  <a:srgbClr val="595959"/>
-                </a:solidFill>
-                <a:latin typeface="Malgun Gothic" pitchFamily="34" charset="0"/>
-                <a:ea typeface="Malgun Gothic" pitchFamily="34" charset="-122"/>
-                <a:cs typeface="Malgun Gothic" pitchFamily="34" charset="-120"/>
-              </a:rPr>
-              <a:t>설계</a:t>
-            </a:r>
-            <a:endParaRPr lang="en-US" sz="900" dirty="0"/>
-          </a:p>
-        </p:txBody>
-      </p:sp>
-      <p:sp>
-        <p:nvSpPr>
-          <p:cNvPr id="12" name="Shape 10"/>
-          <p:cNvSpPr/>
-          <p:nvPr/>
-        </p:nvSpPr>
-        <p:spPr>
-          <a:xfrm>
-            <a:off x="9946843" y="338328"/>
-            <a:ext cx="155448" cy="237744"/>
-          </a:xfrm>
-          <a:prstGeom prst="chevron">
-            <a:avLst/>
-          </a:prstGeom>
-          <a:solidFill>
-            <a:srgbClr val="9AA0A6"/>
-          </a:solidFill>
-          <a:ln/>
-        </p:spPr>
-      </p:sp>
-      <p:sp>
-        <p:nvSpPr>
-          <p:cNvPr id="13" name="Shape 11"/>
-          <p:cNvSpPr/>
-          <p:nvPr/>
-        </p:nvSpPr>
-        <p:spPr>
-          <a:xfrm>
-            <a:off x="10116007" y="320040"/>
-            <a:ext cx="786384" cy="274320"/>
-          </a:xfrm>
-          <a:prstGeom prst="rect">
-            <a:avLst/>
-          </a:prstGeom>
-          <a:solidFill>
-            <a:srgbClr val="E9E9E9"/>
-          </a:solidFill>
-          <a:ln w="9525">
-            <a:solidFill>
-              <a:srgbClr val="A6A6A6"/>
-            </a:solidFill>
-            <a:prstDash val="solid"/>
-          </a:ln>
-        </p:spPr>
-      </p:sp>
-      <p:sp>
-        <p:nvSpPr>
-          <p:cNvPr id="14" name="Text 12"/>
-          <p:cNvSpPr/>
-          <p:nvPr/>
-        </p:nvSpPr>
-        <p:spPr>
-          <a:xfrm>
-            <a:off x="10116007" y="320040"/>
-            <a:ext cx="786384" cy="274320"/>
-          </a:xfrm>
-          <a:prstGeom prst="rect">
-            <a:avLst/>
-          </a:prstGeom>
-          <a:noFill/>
-          <a:ln/>
-        </p:spPr>
-        <p:txBody>
-          <a:bodyPr wrap="square" lIns="0" tIns="0" rIns="0" bIns="0" rtlCol="0" anchor="ctr"/>
-          <a:lstStyle/>
-          <a:p>
-            <a:pPr algn="ctr" indent="0" marL="0">
-              <a:buNone/>
-            </a:pPr>
-            <a:r>
-              <a:rPr lang="en-US" sz="900" dirty="0">
-                <a:solidFill>
-                  <a:srgbClr val="595959"/>
-                </a:solidFill>
-                <a:latin typeface="Malgun Gothic" pitchFamily="34" charset="0"/>
-                <a:ea typeface="Malgun Gothic" pitchFamily="34" charset="-122"/>
-                <a:cs typeface="Malgun Gothic" pitchFamily="34" charset="-120"/>
-              </a:rPr>
-              <a:t>검증</a:t>
-            </a:r>
-            <a:endParaRPr lang="en-US" sz="900" dirty="0"/>
-          </a:p>
-        </p:txBody>
-      </p:sp>
-      <p:sp>
-        <p:nvSpPr>
-          <p:cNvPr id="15" name="Shape 13"/>
-          <p:cNvSpPr/>
-          <p:nvPr/>
-        </p:nvSpPr>
-        <p:spPr>
-          <a:xfrm>
-            <a:off x="10916107" y="338328"/>
-            <a:ext cx="155448" cy="237744"/>
-          </a:xfrm>
-          <a:prstGeom prst="chevron">
-            <a:avLst/>
-          </a:prstGeom>
-          <a:solidFill>
-            <a:srgbClr val="9AA0A6"/>
-          </a:solidFill>
-          <a:ln/>
-        </p:spPr>
-      </p:sp>
-      <p:sp>
-        <p:nvSpPr>
-          <p:cNvPr id="16" name="Shape 14"/>
-          <p:cNvSpPr/>
-          <p:nvPr/>
-        </p:nvSpPr>
-        <p:spPr>
-          <a:xfrm>
-            <a:off x="11085271" y="320040"/>
-            <a:ext cx="786384" cy="274320"/>
-          </a:xfrm>
-          <a:prstGeom prst="rect">
-            <a:avLst/>
-          </a:prstGeom>
-          <a:solidFill>
-            <a:srgbClr val="E9E9E9"/>
-          </a:solidFill>
-          <a:ln w="9525">
-            <a:solidFill>
-              <a:srgbClr val="A6A6A6"/>
-            </a:solidFill>
-            <a:prstDash val="solid"/>
-          </a:ln>
-        </p:spPr>
-      </p:sp>
-      <p:sp>
-        <p:nvSpPr>
-          <p:cNvPr id="17" name="Text 15"/>
-          <p:cNvSpPr/>
-          <p:nvPr/>
-        </p:nvSpPr>
-        <p:spPr>
-          <a:xfrm>
-            <a:off x="11085271" y="320040"/>
-            <a:ext cx="786384" cy="274320"/>
-          </a:xfrm>
-          <a:prstGeom prst="rect">
-            <a:avLst/>
-          </a:prstGeom>
-          <a:noFill/>
-          <a:ln/>
-        </p:spPr>
-        <p:txBody>
-          <a:bodyPr wrap="square" lIns="0" tIns="0" rIns="0" bIns="0" rtlCol="0" anchor="ctr"/>
-          <a:lstStyle/>
-          <a:p>
-            <a:pPr algn="ctr" indent="0" marL="0">
-              <a:buNone/>
-            </a:pPr>
-            <a:r>
-              <a:rPr lang="en-US" sz="900" dirty="0">
-                <a:solidFill>
-                  <a:srgbClr val="595959"/>
-                </a:solidFill>
-                <a:latin typeface="Malgun Gothic" pitchFamily="34" charset="0"/>
-                <a:ea typeface="Malgun Gothic" pitchFamily="34" charset="-122"/>
-                <a:cs typeface="Malgun Gothic" pitchFamily="34" charset="-120"/>
-              </a:rPr>
-              <a:t>결론</a:t>
-            </a:r>
-            <a:endParaRPr lang="en-US" sz="900" dirty="0"/>
-          </a:p>
-        </p:txBody>
-      </p:sp>
-      <p:sp>
-        <p:nvSpPr>
-          <p:cNvPr id="18" name="Text 16"/>
-          <p:cNvSpPr/>
-          <p:nvPr/>
-        </p:nvSpPr>
-        <p:spPr>
-          <a:xfrm>
-            <a:off x="10728655" y="6492240"/>
-            <a:ext cx="1280160" cy="256032"/>
-          </a:xfrm>
-          <a:prstGeom prst="rect">
-            <a:avLst/>
-          </a:prstGeom>
-          <a:noFill/>
-          <a:ln/>
-        </p:spPr>
-        <p:txBody>
-          <a:bodyPr wrap="square" lIns="0" tIns="0" rIns="0" bIns="0" rtlCol="0" anchor="ctr"/>
-          <a:lstStyle/>
-          <a:p>
-            <a:pPr algn="r" indent="0" marL="0">
-              <a:buNone/>
-            </a:pPr>
-            <a:r>
-              <a:rPr lang="en-US" sz="1000" dirty="0">
-                <a:solidFill>
-                  <a:srgbClr val="7F7F7F"/>
-                </a:solidFill>
-                <a:latin typeface="Malgun Gothic" pitchFamily="34" charset="0"/>
-                <a:ea typeface="Malgun Gothic" pitchFamily="34" charset="-122"/>
-                <a:cs typeface="Malgun Gothic" pitchFamily="34" charset="-120"/>
-              </a:rPr>
-              <a:t>29 / 33</a:t>
-            </a:r>
-            <a:endParaRPr lang="en-US" sz="1000" dirty="0"/>
-          </a:p>
-        </p:txBody>
-      </p:sp>
-      <p:sp>
-        <p:nvSpPr>
-          <p:cNvPr id="19" name="Text 17"/>
-          <p:cNvSpPr/>
-          <p:nvPr/>
-        </p:nvSpPr>
-        <p:spPr>
-          <a:xfrm>
-            <a:off x="320040" y="1060704"/>
-            <a:ext cx="11247120" cy="274320"/>
-          </a:xfrm>
-          <a:prstGeom prst="rect">
-            <a:avLst/>
-          </a:prstGeom>
-          <a:noFill/>
-          <a:ln/>
-        </p:spPr>
-        <p:txBody>
-          <a:bodyPr wrap="square" rtlCol="0" anchor="ctr"/>
-          <a:lstStyle/>
-          <a:p>
-            <a:pPr indent="0" marL="0">
-              <a:buNone/>
-            </a:pPr>
-            <a:r>
-              <a:rPr lang="en-US" sz="1050" b="1" dirty="0">
-                <a:solidFill>
-                  <a:srgbClr val="1F3864"/>
-                </a:solidFill>
-                <a:latin typeface="Malgun Gothic" pitchFamily="34" charset="0"/>
-                <a:ea typeface="Malgun Gothic" pitchFamily="34" charset="-122"/>
-                <a:cs typeface="Malgun Gothic" pitchFamily="34" charset="-120"/>
-              </a:rPr>
-              <a:t>○ </a:t>
-            </a:r>
-            <a:pPr indent="0" marL="0">
-              <a:buNone/>
-            </a:pPr>
-            <a:r>
-              <a:rPr lang="en-US" sz="1050" b="1" dirty="0">
-                <a:solidFill>
-                  <a:srgbClr val="262626"/>
-                </a:solidFill>
-                <a:latin typeface="Malgun Gothic" pitchFamily="34" charset="0"/>
-                <a:ea typeface="Malgun Gothic" pitchFamily="34" charset="-122"/>
-                <a:cs typeface="Malgun Gothic" pitchFamily="34" charset="-120"/>
-              </a:rPr>
-              <a:t>QA3 — RAG·multiturn·agent 시나리오의 사용자 체감 판정 지표: 다시 만들지 않기의 효과</a:t>
-            </a:r>
-            <a:pPr indent="0" marL="0">
-              <a:buNone/>
-            </a:pPr>
-            <a:r>
-              <a:rPr lang="en-US" sz="900" b="1" dirty="0">
-                <a:solidFill>
-                  <a:srgbClr val="1F3864"/>
-                </a:solidFill>
-                <a:latin typeface="Malgun Gothic" pitchFamily="34" charset="0"/>
-                <a:ea typeface="Malgun Gothic" pitchFamily="34" charset="-122"/>
-                <a:cs typeface="Malgun Gothic" pitchFamily="34" charset="-120"/>
-              </a:rPr>
-              <a:t>   [중요도 H(5) · 난이도 M(3) · 우선순위 3]</a:t>
-            </a:r>
-            <a:endParaRPr lang="en-US" sz="1050" dirty="0"/>
-          </a:p>
-        </p:txBody>
-      </p:sp>
-      <p:sp>
-        <p:nvSpPr>
-          <p:cNvPr id="20" name="Shape 18"/>
-          <p:cNvSpPr/>
-          <p:nvPr/>
-        </p:nvSpPr>
-        <p:spPr>
-          <a:xfrm>
-            <a:off x="320040" y="1444752"/>
-            <a:ext cx="6537960" cy="310896"/>
-          </a:xfrm>
-          <a:prstGeom prst="rect">
-            <a:avLst/>
-          </a:prstGeom>
-          <a:solidFill>
-            <a:srgbClr val="1F3864"/>
-          </a:solidFill>
-          <a:ln/>
-        </p:spPr>
-      </p:sp>
-      <p:sp>
-        <p:nvSpPr>
-          <p:cNvPr id="21" name="Text 19"/>
-          <p:cNvSpPr/>
-          <p:nvPr/>
-        </p:nvSpPr>
-        <p:spPr>
-          <a:xfrm>
-            <a:off x="365760" y="1444752"/>
-            <a:ext cx="6446520" cy="310896"/>
-          </a:xfrm>
-          <a:prstGeom prst="rect">
-            <a:avLst/>
-          </a:prstGeom>
-          <a:noFill/>
-          <a:ln/>
-        </p:spPr>
-        <p:txBody>
-          <a:bodyPr wrap="square" lIns="0" tIns="0" rIns="0" bIns="0" rtlCol="0" anchor="ctr"/>
-          <a:lstStyle/>
-          <a:p>
-            <a:pPr algn="ctr" indent="0" marL="0">
-              <a:buNone/>
-            </a:pPr>
-            <a:r>
-              <a:rPr lang="en-US" sz="1300" b="1" dirty="0">
-                <a:solidFill>
-                  <a:srgbClr val="FFFFFF"/>
-                </a:solidFill>
-                <a:latin typeface="Malgun Gothic" pitchFamily="34" charset="0"/>
-                <a:ea typeface="Malgun Gothic" pitchFamily="34" charset="-122"/>
-                <a:cs typeface="Malgun Gothic" pitchFamily="34" charset="-120"/>
-              </a:rPr>
-              <a:t>정의 · 측정 · Baseline</a:t>
-            </a:r>
-            <a:endParaRPr lang="en-US" sz="1300" dirty="0"/>
-          </a:p>
-        </p:txBody>
-      </p:sp>
-      <p:sp>
-        <p:nvSpPr>
-          <p:cNvPr id="22" name="Text 20"/>
-          <p:cNvSpPr/>
-          <p:nvPr/>
-        </p:nvSpPr>
-        <p:spPr>
-          <a:xfrm>
-            <a:off x="365760" y="1901952"/>
-            <a:ext cx="6446520" cy="3108960"/>
-          </a:xfrm>
-          <a:prstGeom prst="rect">
-            <a:avLst/>
-          </a:prstGeom>
-          <a:noFill/>
-          <a:ln/>
-        </p:spPr>
-        <p:txBody>
-          <a:bodyPr wrap="square" lIns="0" tIns="0" rIns="0" bIns="0" rtlCol="0" anchor="t"/>
-          <a:lstStyle/>
-          <a:p>
-            <a:pPr algn="l" marL="177800" indent="-177800">
-              <a:spcAft>
-                <a:spcPts val="600"/>
-              </a:spcAft>
-              <a:buSzPct val="100000"/>
-              <a:buChar char="◆"/>
-            </a:pPr>
-            <a:r>
-              <a:rPr lang="en-US" sz="900" b="1" dirty="0">
-                <a:solidFill>
-                  <a:srgbClr val="262626"/>
-                </a:solidFill>
-                <a:latin typeface="Malgun Gothic" pitchFamily="34" charset="0"/>
-                <a:ea typeface="Malgun Gothic" pitchFamily="34" charset="-122"/>
-                <a:cs typeface="Malgun Gothic" pitchFamily="34" charset="-120"/>
-              </a:rPr>
-              <a:t>정의: baseline 대비 TTFT 단축 배율 (prefill 축) — KV 재사용(prefix·비접두)·복원 vs 재계산 판단의 효과 축</a:t>
-            </a:r>
-            <a:endParaRPr lang="en-US" sz="900" dirty="0"/>
-          </a:p>
-          <a:p>
-            <a:pPr algn="l" marL="177800" indent="-177800">
-              <a:spcAft>
-                <a:spcPts val="600"/>
-              </a:spcAft>
-              <a:buSzPct val="100000"/>
-              <a:buChar char="◆"/>
-            </a:pPr>
-            <a:r>
-              <a:rPr lang="en-US" sz="900" dirty="0">
-                <a:solidFill>
-                  <a:srgbClr val="262626"/>
-                </a:solidFill>
-                <a:latin typeface="Malgun Gothic" pitchFamily="34" charset="0"/>
-                <a:ea typeface="Malgun Gothic" pitchFamily="34" charset="-122"/>
-                <a:cs typeface="Malgun Gothic" pitchFamily="34" charset="-120"/>
-              </a:rPr>
-              <a:t>대표 워크로드 3종을 동일 HW·동일 실행 구성에서 E2E 서빙 (retrieval은 외부 컴포넌트 — 양쪽 동일 적용)</a:t>
-            </a:r>
-            <a:endParaRPr lang="en-US" sz="900" dirty="0"/>
-          </a:p>
-          <a:p>
-            <a:pPr algn="l" marL="177800" indent="-177800">
-              <a:spcAft>
-                <a:spcPts val="600"/>
-              </a:spcAft>
-              <a:buSzPct val="100000"/>
-              <a:buChar char="◆"/>
-            </a:pPr>
-            <a:r>
-              <a:rPr lang="en-US" sz="900" b="1" dirty="0">
-                <a:solidFill>
-                  <a:srgbClr val="262626"/>
-                </a:solidFill>
-                <a:latin typeface="Malgun Gothic" pitchFamily="34" charset="0"/>
-                <a:ea typeface="Malgun Gothic" pitchFamily="34" charset="-122"/>
-                <a:cs typeface="Malgun Gothic" pitchFamily="34" charset="-120"/>
-              </a:rPr>
-              <a:t>측정: 워크로드 평균 기준 판정 · p99 분포 병행 — 재사용 hit/miss 이질성으로 꼬리는 cache-miss cold 요청이 지배 (평균 = 재사용 실효, p99 = cold-path)</a:t>
-            </a:r>
-            <a:endParaRPr lang="en-US" sz="900" dirty="0"/>
-          </a:p>
-          <a:p>
-            <a:pPr algn="l" marL="177800" indent="-177800">
-              <a:spcAft>
-                <a:spcPts val="600"/>
-              </a:spcAft>
-              <a:buSzPct val="100000"/>
-              <a:buChar char="◆"/>
-            </a:pPr>
-            <a:r>
-              <a:rPr lang="en-US" sz="900" dirty="0">
-                <a:solidFill>
-                  <a:srgbClr val="262626"/>
-                </a:solidFill>
-                <a:latin typeface="Malgun Gothic" pitchFamily="34" charset="0"/>
-                <a:ea typeface="Malgun Gothic" pitchFamily="34" charset="-122"/>
-                <a:cs typeface="Malgun Gothic" pitchFamily="34" charset="-120"/>
-              </a:rPr>
-              <a:t>Baseline: 동일 HW · GPU HBM 단일 tier (QA1과 공유) — 현행 표준 스택의 최선이므로 순증분 분리</a:t>
-            </a:r>
-            <a:endParaRPr lang="en-US" sz="900" dirty="0"/>
-          </a:p>
-          <a:p>
-            <a:pPr algn="l" marL="177800" indent="-177800">
-              <a:spcAft>
-                <a:spcPts val="600"/>
-              </a:spcAft>
-              <a:buSzPct val="100000"/>
-              <a:buChar char="◆"/>
-            </a:pPr>
-            <a:r>
-              <a:rPr lang="en-US" sz="900" dirty="0">
-                <a:solidFill>
-                  <a:srgbClr val="262626"/>
-                </a:solidFill>
-                <a:latin typeface="Malgun Gothic" pitchFamily="34" charset="0"/>
-                <a:ea typeface="Malgun Gothic" pitchFamily="34" charset="-122"/>
-                <a:cs typeface="Malgun Gothic" pitchFamily="34" charset="-120"/>
-              </a:rPr>
-              <a:t>ablation: 재사용 off 대비 증분 · 보조: cache hit rate (중간 지표)</a:t>
-            </a:r>
-            <a:endParaRPr lang="en-US" sz="900" dirty="0"/>
-          </a:p>
-        </p:txBody>
-      </p:sp>
-      <p:sp>
-        <p:nvSpPr>
-          <p:cNvPr id="23" name="Shape 21"/>
-          <p:cNvSpPr/>
-          <p:nvPr/>
-        </p:nvSpPr>
-        <p:spPr>
-          <a:xfrm>
-            <a:off x="7223760" y="1444752"/>
-            <a:ext cx="4507992" cy="310896"/>
-          </a:xfrm>
-          <a:prstGeom prst="rect">
-            <a:avLst/>
-          </a:prstGeom>
-          <a:solidFill>
-            <a:srgbClr val="4E7C3A"/>
-          </a:solidFill>
-          <a:ln/>
-        </p:spPr>
-      </p:sp>
-      <p:sp>
-        <p:nvSpPr>
-          <p:cNvPr id="24" name="Text 22"/>
-          <p:cNvSpPr/>
-          <p:nvPr/>
-        </p:nvSpPr>
-        <p:spPr>
-          <a:xfrm>
-            <a:off x="7269480" y="1444752"/>
-            <a:ext cx="4416552" cy="310896"/>
-          </a:xfrm>
-          <a:prstGeom prst="rect">
-            <a:avLst/>
-          </a:prstGeom>
-          <a:noFill/>
-          <a:ln/>
-        </p:spPr>
-        <p:txBody>
-          <a:bodyPr wrap="square" lIns="0" tIns="0" rIns="0" bIns="0" rtlCol="0" anchor="ctr"/>
-          <a:lstStyle/>
-          <a:p>
-            <a:pPr algn="ctr" indent="0" marL="0">
-              <a:buNone/>
-            </a:pPr>
-            <a:r>
-              <a:rPr lang="en-US" sz="1300" b="1" dirty="0">
-                <a:solidFill>
-                  <a:srgbClr val="FFFFFF"/>
-                </a:solidFill>
-                <a:latin typeface="Malgun Gothic" pitchFamily="34" charset="0"/>
-                <a:ea typeface="Malgun Gothic" pitchFamily="34" charset="-122"/>
-                <a:cs typeface="Malgun Gothic" pitchFamily="34" charset="-120"/>
-              </a:rPr>
-              <a:t>별점 정량 bin</a:t>
-            </a:r>
-            <a:endParaRPr lang="en-US" sz="1300" dirty="0"/>
-          </a:p>
-        </p:txBody>
-      </p:sp>
-      <p:graphicFrame>
-        <p:nvGraphicFramePr>
-          <p:cNvPr id="10" name="Table 0"/>
-          <p:cNvGraphicFramePr>
-            <a:graphicFrameLocks noGrp="1"/>
-          </p:cNvGraphicFramePr>
-          <p:nvPr>
-            <p:extLst>
-              <p:ext uri="{D42A27DB-BD31-4B8C-83A1-F6EECF244321}">
-                <p14:modId xmlns:p14="http://schemas.microsoft.com/office/powerpoint/2010/main" val="1579011935"/>
-              </p:ext>
-            </p:extLst>
-          </p:nvPr>
-        </p:nvGraphicFramePr>
-        <p:xfrm>
-          <a:off x="7223760" y="1901952"/>
-          <a:ext cx="4507992" cy="914400"/>
-        </p:xfrm>
-        <a:graphic>
-          <a:graphicData uri="http://schemas.openxmlformats.org/drawingml/2006/table">
-            <a:tbl>
-              <a:tblPr/>
-              <a:tblGrid>
-                <a:gridCol w="777240"/>
-                <a:gridCol w="3730752"/>
-              </a:tblGrid>
-              <a:tr h="0">
-                <a:tc>
-                  <a:txBody>
-                    <a:bodyPr/>
-                    <a:lstStyle/>
-                    <a:p>
-                      <a:pPr algn="ctr" indent="0" marL="0">
-                        <a:buNone/>
-                      </a:pPr>
-                      <a:r>
-                        <a:rPr lang="en-US" sz="960" b="1" dirty="0">
-                          <a:solidFill>
-                            <a:srgbClr val="FFFFFF"/>
-                          </a:solidFill>
-                          <a:latin typeface="Malgun Gothic" pitchFamily="34" charset="0"/>
-                          <a:ea typeface="Malgun Gothic" pitchFamily="34" charset="-122"/>
-                          <a:cs typeface="Malgun Gothic" pitchFamily="34" charset="-120"/>
-                        </a:rPr>
-                        <a:t>별점</a:t>
-                      </a:r>
-                      <a:endParaRPr lang="en-US" sz="960" dirty="0">
-                        <a:latin typeface="Malgun Gothic" charset="0"/>
-                        <a:ea typeface="Malgun Gothic" charset="0"/>
-                        <a:cs typeface="Malgun Gothic" charset="0"/>
-                      </a:endParaRPr>
-                    </a:p>
-                  </a:txBody>
-                  <a:tcPr marL="91440" marR="91440" marT="45720" marB="45720" anchor="ctr">
-                    <a:lnL w="6350" cap="flat" cmpd="sng" algn="ctr">
-                      <a:solidFill>
-                        <a:srgbClr val="A6A6A6"/>
-                      </a:solidFill>
-                      <a:prstDash val="solid"/>
-                      <a:round/>
-                      <a:headEnd type="none" w="med" len="med"/>
-                      <a:tailEnd type="none" w="med" len="med"/>
-                    </a:lnL>
-                    <a:lnR w="6350" cap="flat" cmpd="sng" algn="ctr">
-                      <a:solidFill>
-                        <a:srgbClr val="A6A6A6"/>
-                      </a:solidFill>
-                      <a:prstDash val="solid"/>
-                      <a:round/>
-                      <a:headEnd type="none" w="med" len="med"/>
-                      <a:tailEnd type="none" w="med" len="med"/>
-                    </a:lnR>
-                    <a:lnT w="6350" cap="flat" cmpd="sng" algn="ctr">
-                      <a:solidFill>
-                        <a:srgbClr val="A6A6A6"/>
-                      </a:solidFill>
-                      <a:prstDash val="solid"/>
-                      <a:round/>
-                      <a:headEnd type="none" w="med" len="med"/>
-                      <a:tailEnd type="none" w="med" len="med"/>
-                    </a:lnT>
-                    <a:lnB w="6350" cap="flat" cmpd="sng" algn="ctr">
-                      <a:solidFill>
-                        <a:srgbClr val="A6A6A6"/>
-                      </a:solidFill>
-                      <a:prstDash val="solid"/>
-                      <a:round/>
-                      <a:headEnd type="none" w="med" len="med"/>
-                      <a:tailEnd type="none" w="med" len="med"/>
-                    </a:lnB>
-                    <a:solidFill>
-                      <a:srgbClr val="3C5F2C"/>
-                    </a:solidFill>
-                  </a:tcPr>
-                </a:tc>
-                <a:tc>
-                  <a:txBody>
-                    <a:bodyPr/>
-                    <a:lstStyle/>
-                    <a:p>
-                      <a:pPr algn="ctr" indent="0" marL="0">
-                        <a:buNone/>
-                      </a:pPr>
-                      <a:r>
-                        <a:rPr lang="en-US" sz="960" b="1" dirty="0">
-                          <a:solidFill>
-                            <a:srgbClr val="FFFFFF"/>
-                          </a:solidFill>
-                          <a:latin typeface="Malgun Gothic" pitchFamily="34" charset="0"/>
-                          <a:ea typeface="Malgun Gothic" pitchFamily="34" charset="-122"/>
-                          <a:cs typeface="Malgun Gothic" pitchFamily="34" charset="-120"/>
-                        </a:rPr>
-                        <a:t>기준</a:t>
-                      </a:r>
-                      <a:endParaRPr lang="en-US" sz="960" dirty="0">
-                        <a:latin typeface="Malgun Gothic" charset="0"/>
-                        <a:ea typeface="Malgun Gothic" charset="0"/>
-                        <a:cs typeface="Malgun Gothic" charset="0"/>
-                      </a:endParaRPr>
-                    </a:p>
-                  </a:txBody>
-                  <a:tcPr marL="91440" marR="91440" marT="45720" marB="45720" anchor="ctr">
-                    <a:lnL w="6350" cap="flat" cmpd="sng" algn="ctr">
-                      <a:solidFill>
-                        <a:srgbClr val="A6A6A6"/>
-                      </a:solidFill>
-                      <a:prstDash val="solid"/>
-                      <a:round/>
-                      <a:headEnd type="none" w="med" len="med"/>
-                      <a:tailEnd type="none" w="med" len="med"/>
-                    </a:lnL>
-                    <a:lnR w="6350" cap="flat" cmpd="sng" algn="ctr">
-                      <a:solidFill>
-                        <a:srgbClr val="A6A6A6"/>
-                      </a:solidFill>
-                      <a:prstDash val="solid"/>
-                      <a:round/>
-                      <a:headEnd type="none" w="med" len="med"/>
-                      <a:tailEnd type="none" w="med" len="med"/>
-                    </a:lnR>
-                    <a:lnT w="6350" cap="flat" cmpd="sng" algn="ctr">
-                      <a:solidFill>
-                        <a:srgbClr val="A6A6A6"/>
-                      </a:solidFill>
-                      <a:prstDash val="solid"/>
-                      <a:round/>
-                      <a:headEnd type="none" w="med" len="med"/>
-                      <a:tailEnd type="none" w="med" len="med"/>
-                    </a:lnT>
-                    <a:lnB w="6350" cap="flat" cmpd="sng" algn="ctr">
-                      <a:solidFill>
-                        <a:srgbClr val="A6A6A6"/>
-                      </a:solidFill>
-                      <a:prstDash val="solid"/>
-                      <a:round/>
-                      <a:headEnd type="none" w="med" len="med"/>
-                      <a:tailEnd type="none" w="med" len="med"/>
-                    </a:lnB>
-                    <a:solidFill>
-                      <a:srgbClr val="3C5F2C"/>
-                    </a:solidFill>
-                  </a:tcPr>
-                </a:tc>
-              </a:tr>
-              <a:tr h="0">
-                <a:tc>
-                  <a:txBody>
-                    <a:bodyPr/>
-                    <a:lstStyle/>
-                    <a:p>
-                      <a:pPr algn="ctr" indent="0" marL="0">
-                        <a:buNone/>
-                      </a:pPr>
-                      <a:r>
-                        <a:rPr lang="en-US" sz="860" dirty="0">
-                          <a:solidFill>
-                            <a:srgbClr val="262626"/>
-                          </a:solidFill>
-                          <a:latin typeface="Malgun Gothic" pitchFamily="34" charset="0"/>
-                          <a:ea typeface="Malgun Gothic" pitchFamily="34" charset="-122"/>
-                          <a:cs typeface="Malgun Gothic" pitchFamily="34" charset="-120"/>
-                        </a:rPr>
-                        <a:t>★★★</a:t>
-                      </a:r>
-                      <a:endParaRPr lang="en-US" sz="860" dirty="0">
-                        <a:latin typeface="Malgun Gothic" charset="0"/>
-                        <a:ea typeface="Malgun Gothic" charset="0"/>
-                        <a:cs typeface="Malgun Gothic" charset="0"/>
-                      </a:endParaRPr>
-                    </a:p>
-                  </a:txBody>
-                  <a:tcPr marL="50800" marR="50800" marT="25400" marB="25400" anchor="ctr">
-                    <a:lnL w="6350" cap="flat" cmpd="sng" algn="ctr">
-                      <a:solidFill>
-                        <a:srgbClr val="A6A6A6"/>
-                      </a:solidFill>
-                      <a:prstDash val="solid"/>
-                      <a:round/>
-                      <a:headEnd type="none" w="med" len="med"/>
-                      <a:tailEnd type="none" w="med" len="med"/>
-                    </a:lnL>
-                    <a:lnR w="6350" cap="flat" cmpd="sng" algn="ctr">
-                      <a:solidFill>
-                        <a:srgbClr val="A6A6A6"/>
-                      </a:solidFill>
-                      <a:prstDash val="solid"/>
-                      <a:round/>
-                      <a:headEnd type="none" w="med" len="med"/>
-                      <a:tailEnd type="none" w="med" len="med"/>
-                    </a:lnR>
-                    <a:lnT w="6350" cap="flat" cmpd="sng" algn="ctr">
-                      <a:solidFill>
-                        <a:srgbClr val="A6A6A6"/>
-                      </a:solidFill>
-                      <a:prstDash val="solid"/>
-                      <a:round/>
-                      <a:headEnd type="none" w="med" len="med"/>
-                      <a:tailEnd type="none" w="med" len="med"/>
-                    </a:lnT>
-                    <a:lnB w="6350" cap="flat" cmpd="sng" algn="ctr">
-                      <a:solidFill>
-                        <a:srgbClr val="A6A6A6"/>
-                      </a:solidFill>
-                      <a:prstDash val="solid"/>
-                      <a:round/>
-                      <a:headEnd type="none" w="med" len="med"/>
-                      <a:tailEnd type="none" w="med" len="med"/>
-                    </a:lnB>
-                    <a:solidFill>
-                      <a:srgbClr val="FFFFFF"/>
-                    </a:solidFill>
-                  </a:tcPr>
-                </a:tc>
-                <a:tc>
-                  <a:txBody>
-                    <a:bodyPr/>
-                    <a:lstStyle/>
-                    <a:p>
-                      <a:pPr algn="l" indent="0" marL="0">
-                        <a:buNone/>
-                      </a:pPr>
-                      <a:r>
-                        <a:rPr lang="en-US" sz="860" dirty="0">
-                          <a:solidFill>
-                            <a:srgbClr val="262626"/>
-                          </a:solidFill>
-                          <a:latin typeface="Malgun Gothic" pitchFamily="34" charset="0"/>
-                          <a:ea typeface="Malgun Gothic" pitchFamily="34" charset="-122"/>
-                          <a:cs typeface="Malgun Gothic" pitchFamily="34" charset="-120"/>
-                        </a:rPr>
-                        <a:t>TTFT 단축 배율 ≥ 2×</a:t>
-                      </a:r>
-                      <a:endParaRPr lang="en-US" sz="860" dirty="0">
-                        <a:latin typeface="Malgun Gothic" charset="0"/>
-                        <a:ea typeface="Malgun Gothic" charset="0"/>
-                        <a:cs typeface="Malgun Gothic" charset="0"/>
-                      </a:endParaRPr>
-                    </a:p>
-                  </a:txBody>
-                  <a:tcPr marL="50800" marR="50800" marT="25400" marB="25400" anchor="ctr">
-                    <a:lnL w="6350" cap="flat" cmpd="sng" algn="ctr">
-                      <a:solidFill>
-                        <a:srgbClr val="A6A6A6"/>
-                      </a:solidFill>
-                      <a:prstDash val="solid"/>
-                      <a:round/>
-                      <a:headEnd type="none" w="med" len="med"/>
-                      <a:tailEnd type="none" w="med" len="med"/>
-                    </a:lnL>
-                    <a:lnR w="6350" cap="flat" cmpd="sng" algn="ctr">
-                      <a:solidFill>
-                        <a:srgbClr val="A6A6A6"/>
-                      </a:solidFill>
-                      <a:prstDash val="solid"/>
-                      <a:round/>
-                      <a:headEnd type="none" w="med" len="med"/>
-                      <a:tailEnd type="none" w="med" len="med"/>
-                    </a:lnR>
-                    <a:lnT w="6350" cap="flat" cmpd="sng" algn="ctr">
-                      <a:solidFill>
-                        <a:srgbClr val="A6A6A6"/>
-                      </a:solidFill>
-                      <a:prstDash val="solid"/>
-                      <a:round/>
-                      <a:headEnd type="none" w="med" len="med"/>
-                      <a:tailEnd type="none" w="med" len="med"/>
-                    </a:lnT>
-                    <a:lnB w="6350" cap="flat" cmpd="sng" algn="ctr">
-                      <a:solidFill>
-                        <a:srgbClr val="A6A6A6"/>
-                      </a:solidFill>
-                      <a:prstDash val="solid"/>
-                      <a:round/>
-                      <a:headEnd type="none" w="med" len="med"/>
-                      <a:tailEnd type="none" w="med" len="med"/>
-                    </a:lnB>
-                    <a:solidFill>
-                      <a:srgbClr val="FFFFFF"/>
-                    </a:solidFill>
-                  </a:tcPr>
-                </a:tc>
-              </a:tr>
-              <a:tr h="0">
-                <a:tc>
-                  <a:txBody>
-                    <a:bodyPr/>
-                    <a:lstStyle/>
-                    <a:p>
-                      <a:pPr algn="ctr" indent="0" marL="0">
-                        <a:buNone/>
-                      </a:pPr>
-                      <a:r>
-                        <a:rPr lang="en-US" sz="860" dirty="0">
-                          <a:solidFill>
-                            <a:srgbClr val="262626"/>
-                          </a:solidFill>
-                          <a:latin typeface="Malgun Gothic" pitchFamily="34" charset="0"/>
-                          <a:ea typeface="Malgun Gothic" pitchFamily="34" charset="-122"/>
-                          <a:cs typeface="Malgun Gothic" pitchFamily="34" charset="-120"/>
-                        </a:rPr>
-                        <a:t>★★☆</a:t>
-                      </a:r>
-                      <a:endParaRPr lang="en-US" sz="860" dirty="0">
-                        <a:latin typeface="Malgun Gothic" charset="0"/>
-                        <a:ea typeface="Malgun Gothic" charset="0"/>
-                        <a:cs typeface="Malgun Gothic" charset="0"/>
-                      </a:endParaRPr>
-                    </a:p>
-                  </a:txBody>
-                  <a:tcPr marL="50800" marR="50800" marT="25400" marB="25400" anchor="ctr">
-                    <a:lnL w="6350" cap="flat" cmpd="sng" algn="ctr">
-                      <a:solidFill>
-                        <a:srgbClr val="A6A6A6"/>
-                      </a:solidFill>
-                      <a:prstDash val="solid"/>
-                      <a:round/>
-                      <a:headEnd type="none" w="med" len="med"/>
-                      <a:tailEnd type="none" w="med" len="med"/>
-                    </a:lnL>
-                    <a:lnR w="6350" cap="flat" cmpd="sng" algn="ctr">
-                      <a:solidFill>
-                        <a:srgbClr val="A6A6A6"/>
-                      </a:solidFill>
-                      <a:prstDash val="solid"/>
-                      <a:round/>
-                      <a:headEnd type="none" w="med" len="med"/>
-                      <a:tailEnd type="none" w="med" len="med"/>
-                    </a:lnR>
-                    <a:lnT w="6350" cap="flat" cmpd="sng" algn="ctr">
-                      <a:solidFill>
-                        <a:srgbClr val="A6A6A6"/>
-                      </a:solidFill>
-                      <a:prstDash val="solid"/>
-                      <a:round/>
-                      <a:headEnd type="none" w="med" len="med"/>
-                      <a:tailEnd type="none" w="med" len="med"/>
-                    </a:lnT>
-                    <a:lnB w="6350" cap="flat" cmpd="sng" algn="ctr">
-                      <a:solidFill>
-                        <a:srgbClr val="A6A6A6"/>
-                      </a:solidFill>
-                      <a:prstDash val="solid"/>
-                      <a:round/>
-                      <a:headEnd type="none" w="med" len="med"/>
-                      <a:tailEnd type="none" w="med" len="med"/>
-                    </a:lnB>
-                    <a:solidFill>
-                      <a:srgbClr val="FFFFFF"/>
-                    </a:solidFill>
-                  </a:tcPr>
-                </a:tc>
-                <a:tc>
-                  <a:txBody>
-                    <a:bodyPr/>
-                    <a:lstStyle/>
-                    <a:p>
-                      <a:pPr algn="l" indent="0" marL="0">
-                        <a:buNone/>
-                      </a:pPr>
-                      <a:r>
-                        <a:rPr lang="en-US" sz="860" dirty="0">
-                          <a:solidFill>
-                            <a:srgbClr val="262626"/>
-                          </a:solidFill>
-                          <a:latin typeface="Malgun Gothic" pitchFamily="34" charset="0"/>
-                          <a:ea typeface="Malgun Gothic" pitchFamily="34" charset="-122"/>
-                          <a:cs typeface="Malgun Gothic" pitchFamily="34" charset="-120"/>
-                        </a:rPr>
-                        <a:t>1.5× – 2×</a:t>
-                      </a:r>
-                      <a:endParaRPr lang="en-US" sz="860" dirty="0">
-                        <a:latin typeface="Malgun Gothic" charset="0"/>
-                        <a:ea typeface="Malgun Gothic" charset="0"/>
-                        <a:cs typeface="Malgun Gothic" charset="0"/>
-                      </a:endParaRPr>
-                    </a:p>
-                  </a:txBody>
-                  <a:tcPr marL="50800" marR="50800" marT="25400" marB="25400" anchor="ctr">
-                    <a:lnL w="6350" cap="flat" cmpd="sng" algn="ctr">
-                      <a:solidFill>
-                        <a:srgbClr val="A6A6A6"/>
-                      </a:solidFill>
-                      <a:prstDash val="solid"/>
-                      <a:round/>
-                      <a:headEnd type="none" w="med" len="med"/>
-                      <a:tailEnd type="none" w="med" len="med"/>
-                    </a:lnL>
-                    <a:lnR w="6350" cap="flat" cmpd="sng" algn="ctr">
-                      <a:solidFill>
-                        <a:srgbClr val="A6A6A6"/>
-                      </a:solidFill>
-                      <a:prstDash val="solid"/>
-                      <a:round/>
-                      <a:headEnd type="none" w="med" len="med"/>
-                      <a:tailEnd type="none" w="med" len="med"/>
-                    </a:lnR>
-                    <a:lnT w="6350" cap="flat" cmpd="sng" algn="ctr">
-                      <a:solidFill>
-                        <a:srgbClr val="A6A6A6"/>
-                      </a:solidFill>
-                      <a:prstDash val="solid"/>
-                      <a:round/>
-                      <a:headEnd type="none" w="med" len="med"/>
-                      <a:tailEnd type="none" w="med" len="med"/>
-                    </a:lnT>
-                    <a:lnB w="6350" cap="flat" cmpd="sng" algn="ctr">
-                      <a:solidFill>
-                        <a:srgbClr val="A6A6A6"/>
-                      </a:solidFill>
-                      <a:prstDash val="solid"/>
-                      <a:round/>
-                      <a:headEnd type="none" w="med" len="med"/>
-                      <a:tailEnd type="none" w="med" len="med"/>
-                    </a:lnB>
-                    <a:solidFill>
-                      <a:srgbClr val="FFFFFF"/>
-                    </a:solidFill>
-                  </a:tcPr>
-                </a:tc>
-              </a:tr>
-              <a:tr h="0">
-                <a:tc>
-                  <a:txBody>
-                    <a:bodyPr/>
-                    <a:lstStyle/>
-                    <a:p>
-                      <a:pPr algn="ctr" indent="0" marL="0">
-                        <a:buNone/>
-                      </a:pPr>
-                      <a:r>
-                        <a:rPr lang="en-US" sz="860" dirty="0">
-                          <a:solidFill>
-                            <a:srgbClr val="262626"/>
-                          </a:solidFill>
-                          <a:latin typeface="Malgun Gothic" pitchFamily="34" charset="0"/>
-                          <a:ea typeface="Malgun Gothic" pitchFamily="34" charset="-122"/>
-                          <a:cs typeface="Malgun Gothic" pitchFamily="34" charset="-120"/>
-                        </a:rPr>
-                        <a:t>★☆☆</a:t>
-                      </a:r>
-                      <a:endParaRPr lang="en-US" sz="860" dirty="0">
-                        <a:latin typeface="Malgun Gothic" charset="0"/>
-                        <a:ea typeface="Malgun Gothic" charset="0"/>
-                        <a:cs typeface="Malgun Gothic" charset="0"/>
-                      </a:endParaRPr>
-                    </a:p>
-                  </a:txBody>
-                  <a:tcPr marL="50800" marR="50800" marT="25400" marB="25400" anchor="ctr">
-                    <a:lnL w="6350" cap="flat" cmpd="sng" algn="ctr">
-                      <a:solidFill>
-                        <a:srgbClr val="A6A6A6"/>
-                      </a:solidFill>
-                      <a:prstDash val="solid"/>
-                      <a:round/>
-                      <a:headEnd type="none" w="med" len="med"/>
-                      <a:tailEnd type="none" w="med" len="med"/>
-                    </a:lnL>
-                    <a:lnR w="6350" cap="flat" cmpd="sng" algn="ctr">
-                      <a:solidFill>
-                        <a:srgbClr val="A6A6A6"/>
-                      </a:solidFill>
-                      <a:prstDash val="solid"/>
-                      <a:round/>
-                      <a:headEnd type="none" w="med" len="med"/>
-                      <a:tailEnd type="none" w="med" len="med"/>
-                    </a:lnR>
-                    <a:lnT w="6350" cap="flat" cmpd="sng" algn="ctr">
-                      <a:solidFill>
-                        <a:srgbClr val="A6A6A6"/>
-                      </a:solidFill>
-                      <a:prstDash val="solid"/>
-                      <a:round/>
-                      <a:headEnd type="none" w="med" len="med"/>
-                      <a:tailEnd type="none" w="med" len="med"/>
-                    </a:lnT>
-                    <a:lnB w="6350" cap="flat" cmpd="sng" algn="ctr">
-                      <a:solidFill>
-                        <a:srgbClr val="A6A6A6"/>
-                      </a:solidFill>
-                      <a:prstDash val="solid"/>
-                      <a:round/>
-                      <a:headEnd type="none" w="med" len="med"/>
-                      <a:tailEnd type="none" w="med" len="med"/>
-                    </a:lnB>
-                    <a:solidFill>
-                      <a:srgbClr val="FFFFFF"/>
-                    </a:solidFill>
-                  </a:tcPr>
-                </a:tc>
-                <a:tc>
-                  <a:txBody>
-                    <a:bodyPr/>
-                    <a:lstStyle/>
-                    <a:p>
-                      <a:pPr algn="l" indent="0" marL="0">
-                        <a:buNone/>
-                      </a:pPr>
-                      <a:r>
-                        <a:rPr lang="en-US" sz="860" dirty="0">
-                          <a:solidFill>
-                            <a:srgbClr val="262626"/>
-                          </a:solidFill>
-                          <a:latin typeface="Malgun Gothic" pitchFamily="34" charset="0"/>
-                          <a:ea typeface="Malgun Gothic" pitchFamily="34" charset="-122"/>
-                          <a:cs typeface="Malgun Gothic" pitchFamily="34" charset="-120"/>
-                        </a:rPr>
-                        <a:t>&lt; 1.5×</a:t>
-                      </a:r>
-                      <a:endParaRPr lang="en-US" sz="860" dirty="0">
-                        <a:latin typeface="Malgun Gothic" charset="0"/>
-                        <a:ea typeface="Malgun Gothic" charset="0"/>
-                        <a:cs typeface="Malgun Gothic" charset="0"/>
-                      </a:endParaRPr>
-                    </a:p>
-                  </a:txBody>
-                  <a:tcPr marL="50800" marR="50800" marT="25400" marB="25400" anchor="ctr">
-                    <a:lnL w="6350" cap="flat" cmpd="sng" algn="ctr">
-                      <a:solidFill>
-                        <a:srgbClr val="A6A6A6"/>
-                      </a:solidFill>
-                      <a:prstDash val="solid"/>
-                      <a:round/>
-                      <a:headEnd type="none" w="med" len="med"/>
-                      <a:tailEnd type="none" w="med" len="med"/>
-                    </a:lnL>
-                    <a:lnR w="6350" cap="flat" cmpd="sng" algn="ctr">
-                      <a:solidFill>
-                        <a:srgbClr val="A6A6A6"/>
-                      </a:solidFill>
-                      <a:prstDash val="solid"/>
-                      <a:round/>
-                      <a:headEnd type="none" w="med" len="med"/>
-                      <a:tailEnd type="none" w="med" len="med"/>
-                    </a:lnR>
-                    <a:lnT w="6350" cap="flat" cmpd="sng" algn="ctr">
-                      <a:solidFill>
-                        <a:srgbClr val="A6A6A6"/>
-                      </a:solidFill>
-                      <a:prstDash val="solid"/>
-                      <a:round/>
-                      <a:headEnd type="none" w="med" len="med"/>
-                      <a:tailEnd type="none" w="med" len="med"/>
-                    </a:lnT>
-                    <a:lnB w="6350" cap="flat" cmpd="sng" algn="ctr">
-                      <a:solidFill>
-                        <a:srgbClr val="A6A6A6"/>
-                      </a:solidFill>
-                      <a:prstDash val="solid"/>
-                      <a:round/>
-                      <a:headEnd type="none" w="med" len="med"/>
-                      <a:tailEnd type="none" w="med" len="med"/>
-                    </a:lnB>
-                    <a:solidFill>
-                      <a:srgbClr val="FFFFFF"/>
-                    </a:solidFill>
-                  </a:tcPr>
-                </a:tc>
-              </a:tr>
-            </a:tbl>
-          </a:graphicData>
-        </a:graphic>
-      </p:graphicFrame>
-      <p:sp>
-        <p:nvSpPr>
-          <p:cNvPr id="26" name="Shape 23"/>
-          <p:cNvSpPr/>
-          <p:nvPr/>
-        </p:nvSpPr>
-        <p:spPr>
-          <a:xfrm>
-            <a:off x="320040" y="4617720"/>
-            <a:ext cx="11274552" cy="310896"/>
-          </a:xfrm>
-          <a:prstGeom prst="rect">
-            <a:avLst/>
-          </a:prstGeom>
-          <a:solidFill>
-            <a:srgbClr val="1F3864"/>
-          </a:solidFill>
-          <a:ln/>
-        </p:spPr>
-      </p:sp>
-      <p:sp>
-        <p:nvSpPr>
-          <p:cNvPr id="27" name="Text 24"/>
-          <p:cNvSpPr/>
-          <p:nvPr/>
-        </p:nvSpPr>
-        <p:spPr>
-          <a:xfrm>
-            <a:off x="365760" y="4617720"/>
-            <a:ext cx="11183112" cy="310896"/>
-          </a:xfrm>
-          <a:prstGeom prst="rect">
-            <a:avLst/>
-          </a:prstGeom>
-          <a:noFill/>
-          <a:ln/>
-        </p:spPr>
-        <p:txBody>
-          <a:bodyPr wrap="square" lIns="0" tIns="0" rIns="0" bIns="0" rtlCol="0" anchor="ctr"/>
-          <a:lstStyle/>
-          <a:p>
-            <a:pPr algn="ctr" indent="0" marL="0">
-              <a:buNone/>
-            </a:pPr>
-            <a:r>
-              <a:rPr lang="en-US" sz="1300" b="1" dirty="0">
-                <a:solidFill>
-                  <a:srgbClr val="FFFFFF"/>
-                </a:solidFill>
-                <a:latin typeface="Malgun Gothic" pitchFamily="34" charset="0"/>
-                <a:ea typeface="Malgun Gothic" pitchFamily="34" charset="-122"/>
-                <a:cs typeface="Malgun Gothic" pitchFamily="34" charset="-120"/>
-              </a:rPr>
-              <a:t>bin 근거 (A 자체 실측 · B 문헌 · C 구조 논증)</a:t>
-            </a:r>
-            <a:endParaRPr lang="en-US" sz="1300" dirty="0"/>
-          </a:p>
-        </p:txBody>
-      </p:sp>
-      <p:sp>
-        <p:nvSpPr>
-          <p:cNvPr id="28" name="Text 25"/>
-          <p:cNvSpPr/>
-          <p:nvPr/>
-        </p:nvSpPr>
-        <p:spPr>
-          <a:xfrm>
-            <a:off x="365760" y="5074920"/>
-            <a:ext cx="11183112" cy="1325880"/>
-          </a:xfrm>
-          <a:prstGeom prst="rect">
-            <a:avLst/>
-          </a:prstGeom>
-          <a:noFill/>
-          <a:ln/>
-        </p:spPr>
-        <p:txBody>
-          <a:bodyPr wrap="square" rtlCol="0" anchor="t"/>
-          <a:lstStyle/>
-          <a:p>
-            <a:pPr marL="101600" indent="-101600">
-              <a:spcAft>
-                <a:spcPts val="400"/>
-              </a:spcAft>
-              <a:buSzPct val="100000"/>
-              <a:buChar char="◆"/>
-            </a:pPr>
-            <a:r>
-              <a:rPr lang="en-US" sz="880" dirty="0">
-                <a:solidFill>
-                  <a:srgbClr val="262626"/>
-                </a:solidFill>
-                <a:latin typeface="Malgun Gothic" pitchFamily="34" charset="0"/>
-                <a:ea typeface="Malgun Gothic" pitchFamily="34" charset="-122"/>
-                <a:cs typeface="Malgun Gothic" pitchFamily="34" charset="-120"/>
-              </a:rPr>
-              <a:t>CacheBlend (EuroSys'25 Best Paper) — RAG KV 재사용 + 선택 재계산(HKVD 10–15%)으로 TTFT 2.2–3.3× 단축, 품질 저하 F1/Rouge-L 0.01–0.03 (B)</a:t>
-            </a:r>
-            <a:endParaRPr lang="en-US" sz="880" dirty="0"/>
-          </a:p>
-          <a:p>
-            <a:pPr marL="101600" indent="-101600">
-              <a:spcAft>
-                <a:spcPts val="400"/>
-              </a:spcAft>
-              <a:buSzPct val="100000"/>
-              <a:buChar char="◆"/>
-            </a:pPr>
-            <a:r>
-              <a:rPr lang="en-US" sz="880" dirty="0">
-                <a:solidFill>
-                  <a:srgbClr val="262626"/>
-                </a:solidFill>
-                <a:latin typeface="Malgun Gothic" pitchFamily="34" charset="0"/>
-                <a:ea typeface="Malgun Gothic" pitchFamily="34" charset="-122"/>
-                <a:cs typeface="Malgun Gothic" pitchFamily="34" charset="-120"/>
-              </a:rPr>
-              <a:t>SGLang RadixAttention — prefix 재사용으로 prefill 재계산 제거 (B)</a:t>
-            </a:r>
-            <a:endParaRPr lang="en-US" sz="880" dirty="0"/>
-          </a:p>
-          <a:p>
-            <a:pPr marL="101600" indent="-101600">
-              <a:spcAft>
-                <a:spcPts val="400"/>
-              </a:spcAft>
-              <a:buSzPct val="100000"/>
-              <a:buChar char="◆"/>
-            </a:pPr>
-            <a:r>
-              <a:rPr lang="en-US" sz="880" dirty="0">
-                <a:solidFill>
-                  <a:srgbClr val="262626"/>
-                </a:solidFill>
-                <a:latin typeface="Malgun Gothic" pitchFamily="34" charset="0"/>
-                <a:ea typeface="Malgun Gothic" pitchFamily="34" charset="-122"/>
-                <a:cs typeface="Malgun Gothic" pitchFamily="34" charset="-120"/>
-              </a:rPr>
-              <a:t>2× = CacheBlend 하단 2.2×의 보수 반올림 (C) — prefix+비접두 결합·복원 판단을 갖춘 시스템의 하한. 1.5×는 단일 기법 부분 적용 도달선 (C)</a:t>
             </a:r>
             <a:endParaRPr lang="en-US" sz="880" dirty="0"/>
           </a:p>
